--- a/Android10/2_Pixel3_Device_Investigation.pptx
+++ b/Android10/2_Pixel3_Device_Investigation.pptx
@@ -5,7 +5,7 @@
     <p:sldMasterId id="2147483648" r:id="rId1"/>
   </p:sldMasterIdLst>
   <p:notesMasterIdLst>
-    <p:notesMasterId r:id="rId46"/>
+    <p:notesMasterId r:id="rId47"/>
   </p:notesMasterIdLst>
   <p:sldIdLst>
     <p:sldId id="287" r:id="rId2"/>
@@ -33,25 +33,26 @@
     <p:sldId id="345" r:id="rId24"/>
     <p:sldId id="312" r:id="rId25"/>
     <p:sldId id="313" r:id="rId26"/>
-    <p:sldId id="318" r:id="rId27"/>
-    <p:sldId id="319" r:id="rId28"/>
-    <p:sldId id="307" r:id="rId29"/>
-    <p:sldId id="302" r:id="rId30"/>
-    <p:sldId id="308" r:id="rId31"/>
-    <p:sldId id="310" r:id="rId32"/>
-    <p:sldId id="311" r:id="rId33"/>
-    <p:sldId id="328" r:id="rId34"/>
-    <p:sldId id="309" r:id="rId35"/>
-    <p:sldId id="320" r:id="rId36"/>
-    <p:sldId id="321" r:id="rId37"/>
-    <p:sldId id="322" r:id="rId38"/>
-    <p:sldId id="336" r:id="rId39"/>
-    <p:sldId id="339" r:id="rId40"/>
-    <p:sldId id="340" r:id="rId41"/>
-    <p:sldId id="346" r:id="rId42"/>
-    <p:sldId id="305" r:id="rId43"/>
-    <p:sldId id="337" r:id="rId44"/>
-    <p:sldId id="323" r:id="rId45"/>
+    <p:sldId id="302" r:id="rId27"/>
+    <p:sldId id="308" r:id="rId28"/>
+    <p:sldId id="310" r:id="rId29"/>
+    <p:sldId id="311" r:id="rId30"/>
+    <p:sldId id="328" r:id="rId31"/>
+    <p:sldId id="309" r:id="rId32"/>
+    <p:sldId id="320" r:id="rId33"/>
+    <p:sldId id="321" r:id="rId34"/>
+    <p:sldId id="322" r:id="rId35"/>
+    <p:sldId id="307" r:id="rId36"/>
+    <p:sldId id="336" r:id="rId37"/>
+    <p:sldId id="339" r:id="rId38"/>
+    <p:sldId id="340" r:id="rId39"/>
+    <p:sldId id="346" r:id="rId40"/>
+    <p:sldId id="305" r:id="rId41"/>
+    <p:sldId id="337" r:id="rId42"/>
+    <p:sldId id="323" r:id="rId43"/>
+    <p:sldId id="348" r:id="rId44"/>
+    <p:sldId id="318" r:id="rId45"/>
+    <p:sldId id="347" r:id="rId46"/>
   </p:sldIdLst>
   <p:sldSz cx="12192000" cy="6858000"/>
   <p:notesSz cx="6858000" cy="9144000"/>
@@ -158,61 +159,99 @@
 </p:presentation>
 </file>
 
+<file path=ppt/revisionInfo.xml><?xml version="1.0" encoding="utf-8"?>
+<p1510:revInfo xmlns:a="http://schemas.openxmlformats.org/drawingml/2006/main" xmlns:r="http://schemas.openxmlformats.org/officeDocument/2006/relationships" xmlns:p1510="http://schemas.microsoft.com/office/powerpoint/2015/10/main">
+  <p1510:revLst>
+    <p1510:client id="{4DDEDB3F-2FC2-41EB-AC31-C1F468BC9EDC}" v="14" dt="2026-09-10T03:38:54.936"/>
+  </p1510:revLst>
+</p1510:revInfo>
+</file>
+
 <file path=ppt/changesInfos/changesInfo1.xml><?xml version="1.0" encoding="utf-8"?>
 <pc:chgInfo xmlns:a="http://schemas.openxmlformats.org/drawingml/2006/main" xmlns:r="http://schemas.openxmlformats.org/officeDocument/2006/relationships" xmlns:ac="http://schemas.microsoft.com/office/drawing/2013/main/command" xmlns:pc="http://schemas.microsoft.com/office/powerpoint/2013/main/command">
   <pc:docChgLst>
     <pc:chgData name="Weifeng Xu" userId="e7aed605-a3dd-4d5a-a692-a87037af107b" providerId="ADAL" clId="{F99F8FFF-BA20-43EA-924B-4DF5D2A785F3}"/>
-    <pc:docChg chg="undo custSel modSld sldOrd">
-      <pc:chgData name="Weifeng Xu" userId="e7aed605-a3dd-4d5a-a692-a87037af107b" providerId="ADAL" clId="{F99F8FFF-BA20-43EA-924B-4DF5D2A785F3}" dt="2026-02-11T17:18:39.892" v="153" actId="20577"/>
+    <pc:docChg chg="undo redo custSel addSld delSld modSld sldOrd">
+      <pc:chgData name="Weifeng Xu" userId="e7aed605-a3dd-4d5a-a692-a87037af107b" providerId="ADAL" clId="{F99F8FFF-BA20-43EA-924B-4DF5D2A785F3}" dt="2026-09-10T03:38:54.936" v="447"/>
       <pc:docMkLst>
         <pc:docMk/>
       </pc:docMkLst>
       <pc:sldChg chg="modSp mod">
-        <pc:chgData name="Weifeng Xu" userId="e7aed605-a3dd-4d5a-a692-a87037af107b" providerId="ADAL" clId="{F99F8FFF-BA20-43EA-924B-4DF5D2A785F3}" dt="2026-02-11T16:58:05.904" v="65" actId="20577"/>
+        <pc:chgData name="Weifeng Xu" userId="e7aed605-a3dd-4d5a-a692-a87037af107b" providerId="ADAL" clId="{F99F8FFF-BA20-43EA-924B-4DF5D2A785F3}" dt="2026-09-10T01:14:45.167" v="154" actId="6549"/>
         <pc:sldMkLst>
           <pc:docMk/>
           <pc:sldMk cId="2783025053" sldId="287"/>
         </pc:sldMkLst>
         <pc:spChg chg="mod">
-          <ac:chgData name="Weifeng Xu" userId="e7aed605-a3dd-4d5a-a692-a87037af107b" providerId="ADAL" clId="{F99F8FFF-BA20-43EA-924B-4DF5D2A785F3}" dt="2026-02-11T16:58:05.904" v="65" actId="20577"/>
+          <ac:chgData name="Weifeng Xu" userId="e7aed605-a3dd-4d5a-a692-a87037af107b" providerId="ADAL" clId="{F99F8FFF-BA20-43EA-924B-4DF5D2A785F3}" dt="2026-09-10T01:14:45.167" v="154" actId="6549"/>
           <ac:spMkLst>
             <pc:docMk/>
             <pc:sldMk cId="2783025053" sldId="287"/>
-            <ac:spMk id="2" creationId="{F6E4132F-ED01-4C15-A54D-66D33B52D55E}"/>
+            <ac:spMk id="4" creationId="{9B649C4F-48C8-4CC6-BAE6-40898A5F80F4}"/>
+          </ac:spMkLst>
+        </pc:spChg>
+      </pc:sldChg>
+      <pc:sldChg chg="ord">
+        <pc:chgData name="Weifeng Xu" userId="e7aed605-a3dd-4d5a-a692-a87037af107b" providerId="ADAL" clId="{F99F8FFF-BA20-43EA-924B-4DF5D2A785F3}" dt="2026-09-10T03:14:14.771" v="329"/>
+        <pc:sldMkLst>
+          <pc:docMk/>
+          <pc:sldMk cId="3237227748" sldId="307"/>
+        </pc:sldMkLst>
+      </pc:sldChg>
+      <pc:sldChg chg="modSp mod ord">
+        <pc:chgData name="Weifeng Xu" userId="e7aed605-a3dd-4d5a-a692-a87037af107b" providerId="ADAL" clId="{F99F8FFF-BA20-43EA-924B-4DF5D2A785F3}" dt="2026-09-10T03:30:19.550" v="400"/>
+        <pc:sldMkLst>
+          <pc:docMk/>
+          <pc:sldMk cId="3337387503" sldId="318"/>
+        </pc:sldMkLst>
+        <pc:spChg chg="mod">
+          <ac:chgData name="Weifeng Xu" userId="e7aed605-a3dd-4d5a-a692-a87037af107b" providerId="ADAL" clId="{F99F8FFF-BA20-43EA-924B-4DF5D2A785F3}" dt="2026-09-10T03:08:19.651" v="299" actId="14100"/>
+          <ac:spMkLst>
+            <pc:docMk/>
+            <pc:sldMk cId="3337387503" sldId="318"/>
+            <ac:spMk id="2" creationId="{86863385-441E-4CDB-A324-D740F6B05E36}"/>
+          </ac:spMkLst>
+        </pc:spChg>
+        <pc:spChg chg="mod">
+          <ac:chgData name="Weifeng Xu" userId="e7aed605-a3dd-4d5a-a692-a87037af107b" providerId="ADAL" clId="{F99F8FFF-BA20-43EA-924B-4DF5D2A785F3}" dt="2026-09-10T03:08:55.091" v="313" actId="14100"/>
+          <ac:spMkLst>
+            <pc:docMk/>
+            <pc:sldMk cId="3337387503" sldId="318"/>
+            <ac:spMk id="3" creationId="{DCB33D10-342B-4C24-A670-C8D5256EAC6A}"/>
+          </ac:spMkLst>
+        </pc:spChg>
+        <pc:spChg chg="mod">
+          <ac:chgData name="Weifeng Xu" userId="e7aed605-a3dd-4d5a-a692-a87037af107b" providerId="ADAL" clId="{F99F8FFF-BA20-43EA-924B-4DF5D2A785F3}" dt="2026-09-10T03:05:54.931" v="285" actId="207"/>
+          <ac:spMkLst>
+            <pc:docMk/>
+            <pc:sldMk cId="3337387503" sldId="318"/>
+            <ac:spMk id="7" creationId="{ECFEF11C-29AD-4336-9C16-F6BB60DC0A73}"/>
+          </ac:spMkLst>
+        </pc:spChg>
+      </pc:sldChg>
+      <pc:sldChg chg="modSp del mod">
+        <pc:chgData name="Weifeng Xu" userId="e7aed605-a3dd-4d5a-a692-a87037af107b" providerId="ADAL" clId="{F99F8FFF-BA20-43EA-924B-4DF5D2A785F3}" dt="2026-09-10T03:17:15.123" v="330" actId="47"/>
+        <pc:sldMkLst>
+          <pc:docMk/>
+          <pc:sldMk cId="2446382234" sldId="319"/>
+        </pc:sldMkLst>
+        <pc:spChg chg="mod">
+          <ac:chgData name="Weifeng Xu" userId="e7aed605-a3dd-4d5a-a692-a87037af107b" providerId="ADAL" clId="{F99F8FFF-BA20-43EA-924B-4DF5D2A785F3}" dt="2026-09-10T03:02:13.283" v="276" actId="6549"/>
+          <ac:spMkLst>
+            <pc:docMk/>
+            <pc:sldMk cId="2446382234" sldId="319"/>
+            <ac:spMk id="5" creationId="{30F094FB-F93E-4D74-8CDE-BD9580E4F361}"/>
           </ac:spMkLst>
         </pc:spChg>
       </pc:sldChg>
       <pc:sldChg chg="modSp mod">
-        <pc:chgData name="Weifeng Xu" userId="e7aed605-a3dd-4d5a-a692-a87037af107b" providerId="ADAL" clId="{F99F8FFF-BA20-43EA-924B-4DF5D2A785F3}" dt="2026-02-11T17:18:39.892" v="153" actId="20577"/>
-        <pc:sldMkLst>
-          <pc:docMk/>
-          <pc:sldMk cId="705099595" sldId="330"/>
-        </pc:sldMkLst>
-        <pc:spChg chg="mod">
-          <ac:chgData name="Weifeng Xu" userId="e7aed605-a3dd-4d5a-a692-a87037af107b" providerId="ADAL" clId="{F99F8FFF-BA20-43EA-924B-4DF5D2A785F3}" dt="2026-02-11T17:18:39.892" v="153" actId="20577"/>
-          <ac:spMkLst>
-            <pc:docMk/>
-            <pc:sldMk cId="705099595" sldId="330"/>
-            <ac:spMk id="2" creationId="{54279787-2712-479C-8C5F-2A162530DC31}"/>
-          </ac:spMkLst>
-        </pc:spChg>
-      </pc:sldChg>
-      <pc:sldChg chg="modSp mod">
-        <pc:chgData name="Weifeng Xu" userId="e7aed605-a3dd-4d5a-a692-a87037af107b" providerId="ADAL" clId="{F99F8FFF-BA20-43EA-924B-4DF5D2A785F3}" dt="2026-02-11T17:15:59.656" v="145" actId="20577"/>
+        <pc:chgData name="Weifeng Xu" userId="e7aed605-a3dd-4d5a-a692-a87037af107b" providerId="ADAL" clId="{F99F8FFF-BA20-43EA-924B-4DF5D2A785F3}" dt="2026-09-10T03:36:01.133" v="440" actId="20577"/>
         <pc:sldMkLst>
           <pc:docMk/>
           <pc:sldMk cId="3866431432" sldId="333"/>
         </pc:sldMkLst>
         <pc:spChg chg="mod">
-          <ac:chgData name="Weifeng Xu" userId="e7aed605-a3dd-4d5a-a692-a87037af107b" providerId="ADAL" clId="{F99F8FFF-BA20-43EA-924B-4DF5D2A785F3}" dt="2026-02-11T17:05:20.036" v="130" actId="20577"/>
-          <ac:spMkLst>
-            <pc:docMk/>
-            <pc:sldMk cId="3866431432" sldId="333"/>
-            <ac:spMk id="3" creationId="{920EE40A-3D9F-4C76-AE07-56527D0A0493}"/>
-          </ac:spMkLst>
-        </pc:spChg>
-        <pc:spChg chg="mod">
-          <ac:chgData name="Weifeng Xu" userId="e7aed605-a3dd-4d5a-a692-a87037af107b" providerId="ADAL" clId="{F99F8FFF-BA20-43EA-924B-4DF5D2A785F3}" dt="2026-02-11T17:15:59.656" v="145" actId="20577"/>
+          <ac:chgData name="Weifeng Xu" userId="e7aed605-a3dd-4d5a-a692-a87037af107b" providerId="ADAL" clId="{F99F8FFF-BA20-43EA-924B-4DF5D2A785F3}" dt="2026-09-10T03:36:01.133" v="440" actId="20577"/>
           <ac:spMkLst>
             <pc:docMk/>
             <pc:sldMk cId="3866431432" sldId="333"/>
@@ -220,80 +259,150 @@
           </ac:spMkLst>
         </pc:spChg>
       </pc:sldChg>
-      <pc:sldChg chg="modSp mod ord">
-        <pc:chgData name="Weifeng Xu" userId="e7aed605-a3dd-4d5a-a692-a87037af107b" providerId="ADAL" clId="{F99F8FFF-BA20-43EA-924B-4DF5D2A785F3}" dt="2026-02-11T17:16:11.989" v="152" actId="6549"/>
+      <pc:sldChg chg="modSp mod">
+        <pc:chgData name="Weifeng Xu" userId="e7aed605-a3dd-4d5a-a692-a87037af107b" providerId="ADAL" clId="{F99F8FFF-BA20-43EA-924B-4DF5D2A785F3}" dt="2026-09-10T02:51:48.885" v="241" actId="20577"/>
         <pc:sldMkLst>
           <pc:docMk/>
-          <pc:sldMk cId="2092816551" sldId="334"/>
+          <pc:sldMk cId="1004862962" sldId="338"/>
         </pc:sldMkLst>
-        <pc:spChg chg="mod">
-          <ac:chgData name="Weifeng Xu" userId="e7aed605-a3dd-4d5a-a692-a87037af107b" providerId="ADAL" clId="{F99F8FFF-BA20-43EA-924B-4DF5D2A785F3}" dt="2026-02-11T17:16:11.989" v="152" actId="6549"/>
-          <ac:spMkLst>
+        <pc:graphicFrameChg chg="modGraphic">
+          <ac:chgData name="Weifeng Xu" userId="e7aed605-a3dd-4d5a-a692-a87037af107b" providerId="ADAL" clId="{F99F8FFF-BA20-43EA-924B-4DF5D2A785F3}" dt="2026-09-10T02:51:48.885" v="241" actId="20577"/>
+          <ac:graphicFrameMkLst>
             <pc:docMk/>
-            <pc:sldMk cId="2092816551" sldId="334"/>
-            <ac:spMk id="4" creationId="{49C2FCA1-650A-42EA-95A7-7A2FFD015D28}"/>
-          </ac:spMkLst>
-        </pc:spChg>
-        <pc:spChg chg="mod">
-          <ac:chgData name="Weifeng Xu" userId="e7aed605-a3dd-4d5a-a692-a87037af107b" providerId="ADAL" clId="{F99F8FFF-BA20-43EA-924B-4DF5D2A785F3}" dt="2026-02-11T17:00:43.964" v="111" actId="6549"/>
-          <ac:spMkLst>
-            <pc:docMk/>
-            <pc:sldMk cId="2092816551" sldId="334"/>
-            <ac:spMk id="5" creationId="{4E9A3CBC-D866-46E5-AA37-8D47564F10CA}"/>
-          </ac:spMkLst>
-        </pc:spChg>
+            <pc:sldMk cId="1004862962" sldId="338"/>
+            <ac:graphicFrameMk id="6" creationId="{58D48E90-A3CF-467C-B13E-F69D849C22F5}"/>
+          </ac:graphicFrameMkLst>
+        </pc:graphicFrameChg>
       </pc:sldChg>
       <pc:sldChg chg="modSp mod">
-        <pc:chgData name="Weifeng Xu" userId="e7aed605-a3dd-4d5a-a692-a87037af107b" providerId="ADAL" clId="{F99F8FFF-BA20-43EA-924B-4DF5D2A785F3}" dt="2026-02-11T17:07:07.305" v="139" actId="20577"/>
+        <pc:chgData name="Weifeng Xu" userId="e7aed605-a3dd-4d5a-a692-a87037af107b" providerId="ADAL" clId="{F99F8FFF-BA20-43EA-924B-4DF5D2A785F3}" dt="2026-09-10T03:38:54.936" v="447"/>
         <pc:sldMkLst>
           <pc:docMk/>
           <pc:sldMk cId="2092254946" sldId="341"/>
         </pc:sldMkLst>
         <pc:spChg chg="mod">
-          <ac:chgData name="Weifeng Xu" userId="e7aed605-a3dd-4d5a-a692-a87037af107b" providerId="ADAL" clId="{F99F8FFF-BA20-43EA-924B-4DF5D2A785F3}" dt="2026-02-11T17:07:07.305" v="139" actId="20577"/>
+          <ac:chgData name="Weifeng Xu" userId="e7aed605-a3dd-4d5a-a692-a87037af107b" providerId="ADAL" clId="{F99F8FFF-BA20-43EA-924B-4DF5D2A785F3}" dt="2026-09-10T01:18:21.041" v="205" actId="20577"/>
           <ac:spMkLst>
             <pc:docMk/>
             <pc:sldMk cId="2092254946" sldId="341"/>
             <ac:spMk id="4" creationId="{38772083-1F8A-4C69-8797-37893A5BBE99}"/>
           </ac:spMkLst>
         </pc:spChg>
+        <pc:graphicFrameChg chg="mod modGraphic">
+          <ac:chgData name="Weifeng Xu" userId="e7aed605-a3dd-4d5a-a692-a87037af107b" providerId="ADAL" clId="{F99F8FFF-BA20-43EA-924B-4DF5D2A785F3}" dt="2026-09-10T03:38:54.936" v="447"/>
+          <ac:graphicFrameMkLst>
+            <pc:docMk/>
+            <pc:sldMk cId="2092254946" sldId="341"/>
+            <ac:graphicFrameMk id="5" creationId="{2270B41F-1C59-4C7E-A402-D6E7C492DC78}"/>
+          </ac:graphicFrameMkLst>
+        </pc:graphicFrameChg>
       </pc:sldChg>
-    </pc:docChg>
-  </pc:docChgLst>
-  <pc:docChgLst>
-    <pc:chgData name="Weifeng Xu" userId="S::id31ga53@ubalt.edu::e7aed605-a3dd-4d5a-a692-a87037af107b" providerId="AD" clId="Web-{AC031AAB-A5EA-2F31-AAEC-DD7CF424C604}"/>
-    <pc:docChg chg="modSld">
-      <pc:chgData name="Weifeng Xu" userId="S::id31ga53@ubalt.edu::e7aed605-a3dd-4d5a-a692-a87037af107b" providerId="AD" clId="Web-{AC031AAB-A5EA-2F31-AAEC-DD7CF424C604}" dt="2026-02-05T17:30:28.495" v="72" actId="20577"/>
-      <pc:docMkLst>
-        <pc:docMk/>
-      </pc:docMkLst>
-      <pc:sldChg chg="modSp">
-        <pc:chgData name="Weifeng Xu" userId="S::id31ga53@ubalt.edu::e7aed605-a3dd-4d5a-a692-a87037af107b" providerId="AD" clId="Web-{AC031AAB-A5EA-2F31-AAEC-DD7CF424C604}" dt="2026-02-05T17:30:28.495" v="72" actId="20577"/>
+      <pc:sldChg chg="addSp delSp modSp mod modClrScheme delDesignElem chgLayout">
+        <pc:chgData name="Weifeng Xu" userId="e7aed605-a3dd-4d5a-a692-a87037af107b" providerId="ADAL" clId="{F99F8FFF-BA20-43EA-924B-4DF5D2A785F3}" dt="2026-09-10T01:29:36.673" v="238" actId="14100"/>
         <pc:sldMkLst>
           <pc:docMk/>
-          <pc:sldMk cId="705099595" sldId="330"/>
+          <pc:sldMk cId="1212920146" sldId="342"/>
+        </pc:sldMkLst>
+        <pc:spChg chg="mod ord">
+          <ac:chgData name="Weifeng Xu" userId="e7aed605-a3dd-4d5a-a692-a87037af107b" providerId="ADAL" clId="{F99F8FFF-BA20-43EA-924B-4DF5D2A785F3}" dt="2026-09-10T01:25:36.091" v="218" actId="20577"/>
+          <ac:spMkLst>
+            <pc:docMk/>
+            <pc:sldMk cId="1212920146" sldId="342"/>
+            <ac:spMk id="2" creationId="{F612764D-5D39-4D4B-90CA-B752986C71BA}"/>
+          </ac:spMkLst>
+        </pc:spChg>
+        <pc:spChg chg="add del mod ord">
+          <ac:chgData name="Weifeng Xu" userId="e7aed605-a3dd-4d5a-a692-a87037af107b" providerId="ADAL" clId="{F99F8FFF-BA20-43EA-924B-4DF5D2A785F3}" dt="2026-09-10T01:24:56.741" v="209" actId="700"/>
+          <ac:spMkLst>
+            <pc:docMk/>
+            <pc:sldMk cId="1212920146" sldId="342"/>
+            <ac:spMk id="3" creationId="{807B89B9-620B-44DA-1A2B-51D4B6A5C228}"/>
+          </ac:spMkLst>
+        </pc:spChg>
+        <pc:spChg chg="add del">
+          <ac:chgData name="Weifeng Xu" userId="e7aed605-a3dd-4d5a-a692-a87037af107b" providerId="ADAL" clId="{F99F8FFF-BA20-43EA-924B-4DF5D2A785F3}" dt="2026-09-10T01:24:59.785" v="210" actId="700"/>
+          <ac:spMkLst>
+            <pc:docMk/>
+            <pc:sldMk cId="1212920146" sldId="342"/>
+            <ac:spMk id="11" creationId="{42285737-90EE-47DC-AC80-8AE156B11969}"/>
+          </ac:spMkLst>
+        </pc:spChg>
+        <pc:spChg chg="del mod">
+          <ac:chgData name="Weifeng Xu" userId="e7aed605-a3dd-4d5a-a692-a87037af107b" providerId="ADAL" clId="{F99F8FFF-BA20-43EA-924B-4DF5D2A785F3}" dt="2026-09-10T01:26:12.044" v="226" actId="478"/>
+          <ac:spMkLst>
+            <pc:docMk/>
+            <pc:sldMk cId="1212920146" sldId="342"/>
+            <ac:spMk id="20" creationId="{1974F4DD-CEFA-4407-B9FB-910858255C1C}"/>
+          </ac:spMkLst>
+        </pc:spChg>
+        <pc:grpChg chg="add del">
+          <ac:chgData name="Weifeng Xu" userId="e7aed605-a3dd-4d5a-a692-a87037af107b" providerId="ADAL" clId="{F99F8FFF-BA20-43EA-924B-4DF5D2A785F3}" dt="2026-09-10T01:24:59.785" v="210" actId="700"/>
+          <ac:grpSpMkLst>
+            <pc:docMk/>
+            <pc:sldMk cId="1212920146" sldId="342"/>
+            <ac:grpSpMk id="13" creationId="{B57BDC17-F1B3-455F-BBF1-680AA1F25C06}"/>
+          </ac:grpSpMkLst>
+        </pc:grpChg>
+        <pc:picChg chg="mod">
+          <ac:chgData name="Weifeng Xu" userId="e7aed605-a3dd-4d5a-a692-a87037af107b" providerId="ADAL" clId="{F99F8FFF-BA20-43EA-924B-4DF5D2A785F3}" dt="2026-09-10T01:29:36.673" v="238" actId="14100"/>
+          <ac:picMkLst>
+            <pc:docMk/>
+            <pc:sldMk cId="1212920146" sldId="342"/>
+            <ac:picMk id="4" creationId="{61CD536E-341E-45DA-9DAE-CF5E8D3E0A07}"/>
+          </ac:picMkLst>
+        </pc:picChg>
+        <pc:picChg chg="mod">
+          <ac:chgData name="Weifeng Xu" userId="e7aed605-a3dd-4d5a-a692-a87037af107b" providerId="ADAL" clId="{F99F8FFF-BA20-43EA-924B-4DF5D2A785F3}" dt="2026-09-10T01:29:34.537" v="237" actId="1076"/>
+          <ac:picMkLst>
+            <pc:docMk/>
+            <pc:sldMk cId="1212920146" sldId="342"/>
+            <ac:picMk id="6" creationId="{15E83763-BD52-4597-A1DA-B44CEFD7F413}"/>
+          </ac:picMkLst>
+        </pc:picChg>
+      </pc:sldChg>
+      <pc:sldChg chg="modSp new mod ord">
+        <pc:chgData name="Weifeng Xu" userId="e7aed605-a3dd-4d5a-a692-a87037af107b" providerId="ADAL" clId="{F99F8FFF-BA20-43EA-924B-4DF5D2A785F3}" dt="2026-09-10T03:30:19.550" v="400"/>
+        <pc:sldMkLst>
+          <pc:docMk/>
+          <pc:sldMk cId="1650449520" sldId="347"/>
         </pc:sldMkLst>
         <pc:spChg chg="mod">
-          <ac:chgData name="Weifeng Xu" userId="S::id31ga53@ubalt.edu::e7aed605-a3dd-4d5a-a692-a87037af107b" providerId="AD" clId="Web-{AC031AAB-A5EA-2F31-AAEC-DD7CF424C604}" dt="2026-02-05T17:30:28.495" v="72" actId="20577"/>
+          <ac:chgData name="Weifeng Xu" userId="e7aed605-a3dd-4d5a-a692-a87037af107b" providerId="ADAL" clId="{F99F8FFF-BA20-43EA-924B-4DF5D2A785F3}" dt="2026-09-10T03:09:22.673" v="315"/>
           <ac:spMkLst>
             <pc:docMk/>
-            <pc:sldMk cId="705099595" sldId="330"/>
-            <ac:spMk id="2" creationId="{54279787-2712-479C-8C5F-2A162530DC31}"/>
+            <pc:sldMk cId="1650449520" sldId="347"/>
+            <ac:spMk id="2" creationId="{27730052-6B92-EC20-5B76-339D45876EA9}"/>
+          </ac:spMkLst>
+        </pc:spChg>
+        <pc:spChg chg="mod">
+          <ac:chgData name="Weifeng Xu" userId="e7aed605-a3dd-4d5a-a692-a87037af107b" providerId="ADAL" clId="{F99F8FFF-BA20-43EA-924B-4DF5D2A785F3}" dt="2026-09-10T03:27:03.939" v="398" actId="14"/>
+          <ac:spMkLst>
+            <pc:docMk/>
+            <pc:sldMk cId="1650449520" sldId="347"/>
+            <ac:spMk id="3" creationId="{A070D867-26D4-FE3E-A4F7-31719E878826}"/>
           </ac:spMkLst>
         </pc:spChg>
       </pc:sldChg>
-      <pc:sldChg chg="modSp">
-        <pc:chgData name="Weifeng Xu" userId="S::id31ga53@ubalt.edu::e7aed605-a3dd-4d5a-a692-a87037af107b" providerId="AD" clId="Web-{AC031AAB-A5EA-2F31-AAEC-DD7CF424C604}" dt="2026-02-05T17:18:38.763" v="48" actId="20577"/>
+      <pc:sldChg chg="addSp modSp new mod modClrScheme chgLayout">
+        <pc:chgData name="Weifeng Xu" userId="e7aed605-a3dd-4d5a-a692-a87037af107b" providerId="ADAL" clId="{F99F8FFF-BA20-43EA-924B-4DF5D2A785F3}" dt="2026-09-10T03:34:20.820" v="415" actId="20577"/>
         <pc:sldMkLst>
           <pc:docMk/>
-          <pc:sldMk cId="3866431432" sldId="333"/>
+          <pc:sldMk cId="4067287333" sldId="348"/>
         </pc:sldMkLst>
-        <pc:spChg chg="mod">
-          <ac:chgData name="Weifeng Xu" userId="S::id31ga53@ubalt.edu::e7aed605-a3dd-4d5a-a692-a87037af107b" providerId="AD" clId="Web-{AC031AAB-A5EA-2F31-AAEC-DD7CF424C604}" dt="2026-02-05T17:18:38.763" v="48" actId="20577"/>
+        <pc:spChg chg="add mod">
+          <ac:chgData name="Weifeng Xu" userId="e7aed605-a3dd-4d5a-a692-a87037af107b" providerId="ADAL" clId="{F99F8FFF-BA20-43EA-924B-4DF5D2A785F3}" dt="2026-09-10T03:34:20.820" v="415" actId="20577"/>
           <ac:spMkLst>
             <pc:docMk/>
-            <pc:sldMk cId="3866431432" sldId="333"/>
-            <ac:spMk id="4" creationId="{A7BFE6BE-353E-4AD3-B14E-6E3511F50FB4}"/>
+            <pc:sldMk cId="4067287333" sldId="348"/>
+            <ac:spMk id="2" creationId="{67E54316-0396-7652-AFF2-5244C76244ED}"/>
+          </ac:spMkLst>
+        </pc:spChg>
+        <pc:spChg chg="add mod">
+          <ac:chgData name="Weifeng Xu" userId="e7aed605-a3dd-4d5a-a692-a87037af107b" providerId="ADAL" clId="{F99F8FFF-BA20-43EA-924B-4DF5D2A785F3}" dt="2026-09-10T03:31:08.569" v="402" actId="700"/>
+          <ac:spMkLst>
+            <pc:docMk/>
+            <pc:sldMk cId="4067287333" sldId="348"/>
+            <ac:spMk id="3" creationId="{80C449BD-FD0E-441D-0C5D-6521FCB7BA6C}"/>
           </ac:spMkLst>
         </pc:spChg>
       </pc:sldChg>
@@ -384,7 +493,7 @@
           <a:p>
             <a:fld id="{EE41F6E3-57F9-402E-BDBA-5B2DE11C8530}" type="datetimeFigureOut">
               <a:rPr lang="en-US" smtClean="0"/>
-              <a:t>2/11/2026</a:t>
+              <a:t>9/9/2026</a:t>
             </a:fld>
             <a:endParaRPr lang="en-US"/>
           </a:p>
@@ -2437,8 +2546,11 @@
           <a:p>
             <a:r>
               <a:rPr lang="en-US" dirty="0"/>
-              <a:t>https://fossbytes.com/google-play-services-necessity/</a:t>
-            </a:r>
+              <a:t>tree 'Pixel 3/data/data/com.google.android.gm' -L 1</a:t>
+            </a:r>
+          </a:p>
+          <a:p>
+            <a:endParaRPr lang="en-US" dirty="0"/>
           </a:p>
         </p:txBody>
       </p:sp>
@@ -2459,7 +2571,7 @@
           <a:p>
             <a:fld id="{DDBF98C7-164A-4723-84F0-B1E4B080DDEC}" type="slidenum">
               <a:rPr lang="en-US" smtClean="0"/>
-              <a:t>27</a:t>
+              <a:t>26</a:t>
             </a:fld>
             <a:endParaRPr lang="en-US"/>
           </a:p>
@@ -2468,7 +2580,7 @@
     </p:spTree>
     <p:extLst>
       <p:ext uri="{BB962C8B-B14F-4D97-AF65-F5344CB8AC3E}">
-        <p14:creationId xmlns:p14="http://schemas.microsoft.com/office/powerpoint/2010/main" val="1137033371"/>
+        <p14:creationId xmlns:p14="http://schemas.microsoft.com/office/powerpoint/2010/main" val="3730848369"/>
       </p:ext>
     </p:extLst>
   </p:cSld>
@@ -2524,99 +2636,15 @@
           <a:p>
             <a:r>
               <a:rPr lang="en-US" dirty="0"/>
-              <a:t>grep -</a:t>
+              <a:t>cat  'Pixel 3/data/data/com.google.android.gm/</a:t>
             </a:r>
             <a:r>
               <a:rPr lang="en-US" dirty="0" err="1"/>
-              <a:t>EiorhI</a:t>
-            </a:r>
-            <a:r>
-              <a:rPr lang="en-US" dirty="0"/>
-              <a:t> '([[:</a:t>
-            </a:r>
-            <a:r>
-              <a:rPr lang="en-US" dirty="0" err="1"/>
-              <a:t>alnum</a:t>
-            </a:r>
-            <a:r>
-              <a:rPr lang="en-US" dirty="0"/>
-              <a:t>:]_.-]+@</a:t>
-            </a:r>
-            <a:r>
-              <a:rPr lang="en-US" dirty="0" err="1"/>
-              <a:t>gmail</a:t>
-            </a:r>
-            <a:r>
-              <a:rPr lang="en-US" dirty="0"/>
-              <a:t>\.com)' 'Pixel 3'| </a:t>
-            </a:r>
-            <a:r>
-              <a:rPr lang="en-US" dirty="0" err="1"/>
-              <a:t>sort|uniq</a:t>
-            </a:r>
-            <a:r>
-              <a:rPr lang="en-US" dirty="0"/>
-              <a:t> -c | sort -nr | head</a:t>
-            </a:r>
-          </a:p>
-          <a:p>
-            <a:r>
-              <a:rPr lang="en-US" dirty="0"/>
-              <a:t> 608 thisisdfir@gmail.com</a:t>
-            </a:r>
-          </a:p>
-          <a:p>
-            <a:r>
-              <a:rPr lang="en-US" dirty="0"/>
-              <a:t>    120 thisisdfirtwo@gmail.com</a:t>
-            </a:r>
-          </a:p>
-          <a:p>
-            <a:r>
-              <a:rPr lang="en-US" dirty="0"/>
-              <a:t>     10 nc_1_mail_thisisdfir@gmail.com</a:t>
-            </a:r>
-          </a:p>
-          <a:p>
-            <a:r>
-              <a:rPr lang="en-US" dirty="0"/>
-              <a:t>      6 feature_list_thisisdfir@gmail.com</a:t>
-            </a:r>
-          </a:p>
-          <a:p>
-            <a:r>
-              <a:rPr lang="en-US" dirty="0"/>
-              <a:t>      4 ncg_1_account_thisisdfirtwo@gmail.com</a:t>
-            </a:r>
-          </a:p>
-          <a:p>
-            <a:r>
-              <a:rPr lang="en-US" dirty="0"/>
-              <a:t>      4 ncg_1_account_thisisdfir@gmail.com</a:t>
-            </a:r>
-          </a:p>
-          <a:p>
-            <a:r>
-              <a:rPr lang="en-US" dirty="0"/>
-              <a:t>      4 flagsLastLogged-thisisdfir@gmail.com</a:t>
-            </a:r>
-          </a:p>
-          <a:p>
-            <a:r>
-              <a:rPr lang="en-US" dirty="0"/>
-              <a:t>      2 waa-enabledthisisdfir@gmail.com</a:t>
-            </a:r>
-          </a:p>
-          <a:p>
-            <a:r>
-              <a:rPr lang="en-US" dirty="0"/>
-              <a:t>      2 user-settings-cachethisisdfir@gmail.com</a:t>
-            </a:r>
-          </a:p>
-          <a:p>
-            <a:r>
-              <a:rPr lang="en-US" dirty="0"/>
-              <a:t>      2 toc-cookiethisisdfir@gmail.com</a:t>
+              <a:t>shared_prefs</a:t>
+            </a:r>
+            <a:r>
+              <a:rPr lang="en-US" dirty="0"/>
+              <a:t>/Gmail.xml'</a:t>
             </a:r>
           </a:p>
         </p:txBody>
@@ -2647,7 +2675,7 @@
     </p:spTree>
     <p:extLst>
       <p:ext uri="{BB962C8B-B14F-4D97-AF65-F5344CB8AC3E}">
-        <p14:creationId xmlns:p14="http://schemas.microsoft.com/office/powerpoint/2010/main" val="2188783745"/>
+        <p14:creationId xmlns:p14="http://schemas.microsoft.com/office/powerpoint/2010/main" val="1581432760"/>
       </p:ext>
     </p:extLst>
   </p:cSld>
@@ -2703,11 +2731,16 @@
           <a:p>
             <a:r>
               <a:rPr lang="en-US" dirty="0"/>
-              <a:t>tree 'Pixel 3/data/data/com.google.android.gm' -L 1</a:t>
-            </a:r>
-          </a:p>
-          <a:p>
-            <a:endParaRPr lang="en-US" dirty="0"/>
+              <a:t>cat  'Pixel 3/data/data/com.google.android.gm/</a:t>
+            </a:r>
+            <a:r>
+              <a:rPr lang="en-US" dirty="0" err="1"/>
+              <a:t>shared_prefs</a:t>
+            </a:r>
+            <a:r>
+              <a:rPr lang="en-US" dirty="0"/>
+              <a:t>/UnifiedEmail.xml'</a:t>
+            </a:r>
           </a:p>
         </p:txBody>
       </p:sp>
@@ -2737,7 +2770,7 @@
     </p:spTree>
     <p:extLst>
       <p:ext uri="{BB962C8B-B14F-4D97-AF65-F5344CB8AC3E}">
-        <p14:creationId xmlns:p14="http://schemas.microsoft.com/office/powerpoint/2010/main" val="3730848369"/>
+        <p14:creationId xmlns:p14="http://schemas.microsoft.com/office/powerpoint/2010/main" val="712906607"/>
       </p:ext>
     </p:extLst>
   </p:cSld>
@@ -2792,18 +2825,9 @@
           <a:lstStyle/>
           <a:p>
             <a:r>
-              <a:rPr lang="en-GB" dirty="0"/>
-              <a:t>grep patch  'Pixel 3/system/</a:t>
-            </a:r>
-            <a:r>
-              <a:rPr lang="en-GB" dirty="0" err="1"/>
-              <a:t>build.prop</a:t>
-            </a:r>
-            <a:r>
-              <a:rPr lang="en-GB" dirty="0"/>
-              <a:t>'</a:t>
-            </a:r>
-            <a:endParaRPr lang="en-US" dirty="0"/>
+              <a:rPr lang="en-US" dirty="0"/>
+              <a:t>https://source.android.com/security/bulletin/2020-01-01#2020-01-01-details</a:t>
+            </a:r>
           </a:p>
         </p:txBody>
       </p:sp>
@@ -2889,15 +2913,15 @@
           <a:p>
             <a:r>
               <a:rPr lang="en-US" dirty="0"/>
-              <a:t>cat  'Pixel 3/data/data/com.google.android.gm/</a:t>
+              <a:t>tree 'Pixel 3/data/data/</a:t>
             </a:r>
             <a:r>
               <a:rPr lang="en-US" dirty="0" err="1"/>
-              <a:t>shared_prefs</a:t>
-            </a:r>
-            <a:r>
-              <a:rPr lang="en-US" dirty="0"/>
-              <a:t>/Gmail.xml'</a:t>
+              <a:t>com.android.vending</a:t>
+            </a:r>
+            <a:r>
+              <a:rPr lang="en-US" dirty="0"/>
+              <a:t>/cache/logs/' </a:t>
             </a:r>
           </a:p>
         </p:txBody>
@@ -2919,7 +2943,7 @@
           <a:p>
             <a:fld id="{DDBF98C7-164A-4723-84F0-B1E4B080DDEC}" type="slidenum">
               <a:rPr lang="en-US" smtClean="0"/>
-              <a:t>31</a:t>
+              <a:t>30</a:t>
             </a:fld>
             <a:endParaRPr lang="en-US"/>
           </a:p>
@@ -2928,7 +2952,7 @@
     </p:spTree>
     <p:extLst>
       <p:ext uri="{BB962C8B-B14F-4D97-AF65-F5344CB8AC3E}">
-        <p14:creationId xmlns:p14="http://schemas.microsoft.com/office/powerpoint/2010/main" val="1581432760"/>
+        <p14:creationId xmlns:p14="http://schemas.microsoft.com/office/powerpoint/2010/main" val="3234931618"/>
       </p:ext>
     </p:extLst>
   </p:cSld>
@@ -2984,15 +3008,13 @@
           <a:p>
             <a:r>
               <a:rPr lang="en-US" dirty="0"/>
-              <a:t>cat  'Pixel 3/data/data/com.google.android.gm/</a:t>
-            </a:r>
-            <a:r>
-              <a:rPr lang="en-US" dirty="0" err="1"/>
-              <a:t>shared_prefs</a:t>
-            </a:r>
-            <a:r>
-              <a:rPr lang="en-US" dirty="0"/>
-              <a:t>/UnifiedEmail.xml'</a:t>
+              <a:t>https://www.intertech.com/android-development-tutorial-job-scheduler/</a:t>
+            </a:r>
+          </a:p>
+          <a:p>
+            <a:r>
+              <a:rPr lang="en-US" dirty="0"/>
+              <a:t>https://www.zoftino.com/android-job-scheduler-example</a:t>
             </a:r>
           </a:p>
         </p:txBody>
@@ -3014,7 +3036,7 @@
           <a:p>
             <a:fld id="{DDBF98C7-164A-4723-84F0-B1E4B080DDEC}" type="slidenum">
               <a:rPr lang="en-US" smtClean="0"/>
-              <a:t>32</a:t>
+              <a:t>31</a:t>
             </a:fld>
             <a:endParaRPr lang="en-US"/>
           </a:p>
@@ -3023,7 +3045,7 @@
     </p:spTree>
     <p:extLst>
       <p:ext uri="{BB962C8B-B14F-4D97-AF65-F5344CB8AC3E}">
-        <p14:creationId xmlns:p14="http://schemas.microsoft.com/office/powerpoint/2010/main" val="712906607"/>
+        <p14:creationId xmlns:p14="http://schemas.microsoft.com/office/powerpoint/2010/main" val="533302154"/>
       </p:ext>
     </p:extLst>
   </p:cSld>
@@ -3079,15 +3101,19 @@
           <a:p>
             <a:r>
               <a:rPr lang="en-US" dirty="0"/>
-              <a:t>tree 'Pixel 3/data/data/</a:t>
-            </a:r>
-            <a:r>
-              <a:rPr lang="en-US" dirty="0" err="1"/>
-              <a:t>com.android.vending</a:t>
-            </a:r>
-            <a:r>
-              <a:rPr lang="en-US" dirty="0"/>
-              <a:t>/cache/logs/' </a:t>
+              <a:t>https://developer.android.com/reference/android/app/job/JobInfo.html</a:t>
+            </a:r>
+          </a:p>
+          <a:p>
+            <a:r>
+              <a:rPr lang="en-US" dirty="0"/>
+              <a:t>https://www.intertech.com/android-development-tutorial-job-scheduler/</a:t>
+            </a:r>
+          </a:p>
+          <a:p>
+            <a:r>
+              <a:rPr lang="en-US" dirty="0"/>
+              <a:t>https://medium.com/google-developers/scheduling-jobs-like-a-pro-with-jobscheduler-286ef8510129</a:t>
             </a:r>
           </a:p>
         </p:txBody>
@@ -3109,7 +3135,7 @@
           <a:p>
             <a:fld id="{DDBF98C7-164A-4723-84F0-B1E4B080DDEC}" type="slidenum">
               <a:rPr lang="en-US" smtClean="0"/>
-              <a:t>33</a:t>
+              <a:t>32</a:t>
             </a:fld>
             <a:endParaRPr lang="en-US"/>
           </a:p>
@@ -3118,7 +3144,7 @@
     </p:spTree>
     <p:extLst>
       <p:ext uri="{BB962C8B-B14F-4D97-AF65-F5344CB8AC3E}">
-        <p14:creationId xmlns:p14="http://schemas.microsoft.com/office/powerpoint/2010/main" val="3234931618"/>
+        <p14:creationId xmlns:p14="http://schemas.microsoft.com/office/powerpoint/2010/main" val="1761194060"/>
       </p:ext>
     </p:extLst>
   </p:cSld>
@@ -3174,14 +3200,15 @@
           <a:p>
             <a:r>
               <a:rPr lang="en-US" dirty="0"/>
-              <a:t>https://www.intertech.com/android-development-tutorial-job-scheduler/</a:t>
-            </a:r>
-          </a:p>
-          <a:p>
-            <a:r>
-              <a:rPr lang="en-US" dirty="0"/>
-              <a:t>https://www.zoftino.com/android-job-scheduler-example</a:t>
-            </a:r>
+              <a:t>https://www.epochconverter.</a:t>
+            </a:r>
+            <a:r>
+              <a:rPr lang="en-US"/>
+              <a:t>com/</a:t>
+            </a:r>
+          </a:p>
+          <a:p>
+            <a:endParaRPr lang="en-US" dirty="0"/>
           </a:p>
         </p:txBody>
       </p:sp>
@@ -3202,7 +3229,7 @@
           <a:p>
             <a:fld id="{DDBF98C7-164A-4723-84F0-B1E4B080DDEC}" type="slidenum">
               <a:rPr lang="en-US" smtClean="0"/>
-              <a:t>34</a:t>
+              <a:t>33</a:t>
             </a:fld>
             <a:endParaRPr lang="en-US"/>
           </a:p>
@@ -3211,7 +3238,7 @@
     </p:spTree>
     <p:extLst>
       <p:ext uri="{BB962C8B-B14F-4D97-AF65-F5344CB8AC3E}">
-        <p14:creationId xmlns:p14="http://schemas.microsoft.com/office/powerpoint/2010/main" val="533302154"/>
+        <p14:creationId xmlns:p14="http://schemas.microsoft.com/office/powerpoint/2010/main" val="4132547325"/>
       </p:ext>
     </p:extLst>
   </p:cSld>
@@ -3266,21 +3293,42 @@
           <a:lstStyle/>
           <a:p>
             <a:r>
-              <a:rPr lang="en-US" dirty="0"/>
-              <a:t>https://developer.android.com/reference/android/app/job/JobInfo.html</a:t>
-            </a:r>
-          </a:p>
-          <a:p>
-            <a:r>
-              <a:rPr lang="en-US" dirty="0"/>
-              <a:t>https://www.intertech.com/android-development-tutorial-job-scheduler/</a:t>
-            </a:r>
-          </a:p>
-          <a:p>
-            <a:r>
-              <a:rPr lang="en-US" dirty="0"/>
-              <a:t>https://medium.com/google-developers/scheduling-jobs-like-a-pro-with-jobscheduler-286ef8510129</a:t>
-            </a:r>
+              <a:rPr lang="en-GB" dirty="0"/>
+              <a:t>grep -</a:t>
+            </a:r>
+            <a:r>
+              <a:rPr lang="en-GB" dirty="0" err="1"/>
+              <a:t>Eio</a:t>
+            </a:r>
+            <a:r>
+              <a:rPr lang="en-GB" dirty="0"/>
+              <a:t> '([[:</a:t>
+            </a:r>
+            <a:r>
+              <a:rPr lang="en-GB" dirty="0" err="1"/>
+              <a:t>alnum</a:t>
+            </a:r>
+            <a:r>
+              <a:rPr lang="en-GB" dirty="0"/>
+              <a:t>:]_.-]+@[[:</a:t>
+            </a:r>
+            <a:r>
+              <a:rPr lang="en-GB" dirty="0" err="1"/>
+              <a:t>alnum</a:t>
+            </a:r>
+            <a:r>
+              <a:rPr lang="en-GB" dirty="0"/>
+              <a:t>:]_.-]+\.[[:alpha:].]{2,6})'   'Pixel 3/data/system/job/jobs.xml' | sort | </a:t>
+            </a:r>
+            <a:r>
+              <a:rPr lang="en-GB" dirty="0" err="1"/>
+              <a:t>uniq</a:t>
+            </a:r>
+            <a:r>
+              <a:rPr lang="en-GB" dirty="0"/>
+              <a:t> -c</a:t>
+            </a:r>
+            <a:endParaRPr lang="en-US" dirty="0"/>
           </a:p>
         </p:txBody>
       </p:sp>
@@ -3301,7 +3349,7 @@
           <a:p>
             <a:fld id="{DDBF98C7-164A-4723-84F0-B1E4B080DDEC}" type="slidenum">
               <a:rPr lang="en-US" smtClean="0"/>
-              <a:t>35</a:t>
+              <a:t>34</a:t>
             </a:fld>
             <a:endParaRPr lang="en-US"/>
           </a:p>
@@ -3310,7 +3358,7 @@
     </p:spTree>
     <p:extLst>
       <p:ext uri="{BB962C8B-B14F-4D97-AF65-F5344CB8AC3E}">
-        <p14:creationId xmlns:p14="http://schemas.microsoft.com/office/powerpoint/2010/main" val="1761194060"/>
+        <p14:creationId xmlns:p14="http://schemas.microsoft.com/office/powerpoint/2010/main" val="2885160239"/>
       </p:ext>
     </p:extLst>
   </p:cSld>
@@ -3366,15 +3414,100 @@
           <a:p>
             <a:r>
               <a:rPr lang="en-US" dirty="0"/>
-              <a:t>https://www.epochconverter.</a:t>
-            </a:r>
-            <a:r>
-              <a:rPr lang="en-US"/>
-              <a:t>com/</a:t>
-            </a:r>
-          </a:p>
-          <a:p>
-            <a:endParaRPr lang="en-US" dirty="0"/>
+              <a:t>grep -</a:t>
+            </a:r>
+            <a:r>
+              <a:rPr lang="en-US" dirty="0" err="1"/>
+              <a:t>EiorhI</a:t>
+            </a:r>
+            <a:r>
+              <a:rPr lang="en-US" dirty="0"/>
+              <a:t> '([[:</a:t>
+            </a:r>
+            <a:r>
+              <a:rPr lang="en-US" dirty="0" err="1"/>
+              <a:t>alnum</a:t>
+            </a:r>
+            <a:r>
+              <a:rPr lang="en-US" dirty="0"/>
+              <a:t>:]_.-]+@</a:t>
+            </a:r>
+            <a:r>
+              <a:rPr lang="en-US" dirty="0" err="1"/>
+              <a:t>gmail</a:t>
+            </a:r>
+            <a:r>
+              <a:rPr lang="en-US" dirty="0"/>
+              <a:t>\.com)' 'Pixel 3'| </a:t>
+            </a:r>
+            <a:r>
+              <a:rPr lang="en-US" dirty="0" err="1"/>
+              <a:t>sort|uniq</a:t>
+            </a:r>
+            <a:r>
+              <a:rPr lang="en-US" dirty="0"/>
+              <a:t> -c | sort -nr | head</a:t>
+            </a:r>
+          </a:p>
+          <a:p>
+            <a:r>
+              <a:rPr lang="en-US" dirty="0"/>
+              <a:t> 608 thisisdfir@gmail.com</a:t>
+            </a:r>
+          </a:p>
+          <a:p>
+            <a:r>
+              <a:rPr lang="en-US" dirty="0"/>
+              <a:t>    120 thisisdfirtwo@gmail.com</a:t>
+            </a:r>
+          </a:p>
+          <a:p>
+            <a:r>
+              <a:rPr lang="en-US" dirty="0"/>
+              <a:t>     10 nc_1_mail_thisisdfir@gmail.com</a:t>
+            </a:r>
+          </a:p>
+          <a:p>
+            <a:r>
+              <a:rPr lang="en-US" dirty="0"/>
+              <a:t>      6 feature_list_thisisdfir@gmail.com</a:t>
+            </a:r>
+          </a:p>
+          <a:p>
+            <a:r>
+              <a:rPr lang="en-US" dirty="0"/>
+              <a:t>      4 ncg_1_account_thisisdfirtwo@gmail.com</a:t>
+            </a:r>
+          </a:p>
+          <a:p>
+            <a:r>
+              <a:rPr lang="en-US" dirty="0"/>
+              <a:t>      4 ncg_1_account_thisisdfir@gmail.com</a:t>
+            </a:r>
+          </a:p>
+          <a:p>
+            <a:r>
+              <a:rPr lang="en-US" dirty="0"/>
+              <a:t>      4 flagsLastLogged-thisisdfir@gmail.com</a:t>
+            </a:r>
+          </a:p>
+          <a:p>
+            <a:r>
+              <a:rPr lang="en-US" dirty="0"/>
+              <a:t>      2 waa-enabledthisisdfir@gmail.com</a:t>
+            </a:r>
+          </a:p>
+          <a:p>
+            <a:r>
+              <a:rPr lang="en-US" dirty="0"/>
+              <a:t>      2 user-settings-cachethisisdfir@gmail.com</a:t>
+            </a:r>
+          </a:p>
+          <a:p>
+            <a:r>
+              <a:rPr lang="en-US" dirty="0"/>
+              <a:t>      2 toc-cookiethisisdfir@gmail.com</a:t>
+            </a:r>
           </a:p>
         </p:txBody>
       </p:sp>
@@ -3395,7 +3528,7 @@
           <a:p>
             <a:fld id="{DDBF98C7-164A-4723-84F0-B1E4B080DDEC}" type="slidenum">
               <a:rPr lang="en-US" smtClean="0"/>
-              <a:t>36</a:t>
+              <a:t>35</a:t>
             </a:fld>
             <a:endParaRPr lang="en-US"/>
           </a:p>
@@ -3404,7 +3537,7 @@
     </p:spTree>
     <p:extLst>
       <p:ext uri="{BB962C8B-B14F-4D97-AF65-F5344CB8AC3E}">
-        <p14:creationId xmlns:p14="http://schemas.microsoft.com/office/powerpoint/2010/main" val="4132547325"/>
+        <p14:creationId xmlns:p14="http://schemas.microsoft.com/office/powerpoint/2010/main" val="2188783745"/>
       </p:ext>
     </p:extLst>
   </p:cSld>
@@ -3459,42 +3592,17 @@
           <a:lstStyle/>
           <a:p>
             <a:r>
-              <a:rPr lang="en-GB" dirty="0"/>
-              <a:t>grep -</a:t>
-            </a:r>
-            <a:r>
-              <a:rPr lang="en-GB" dirty="0" err="1"/>
-              <a:t>Eio</a:t>
-            </a:r>
-            <a:r>
-              <a:rPr lang="en-GB" dirty="0"/>
-              <a:t> '([[:</a:t>
-            </a:r>
-            <a:r>
-              <a:rPr lang="en-GB" dirty="0" err="1"/>
-              <a:t>alnum</a:t>
-            </a:r>
-            <a:r>
-              <a:rPr lang="en-GB" dirty="0"/>
-              <a:t>:]_.-]+@[[:</a:t>
-            </a:r>
-            <a:r>
-              <a:rPr lang="en-GB" dirty="0" err="1"/>
-              <a:t>alnum</a:t>
-            </a:r>
-            <a:r>
-              <a:rPr lang="en-GB" dirty="0"/>
-              <a:t>:]_.-]+\.[[:alpha:].]{2,6})'   'Pixel 3/data/system/job/jobs.xml' | sort | </a:t>
-            </a:r>
-            <a:r>
-              <a:rPr lang="en-GB" dirty="0" err="1"/>
-              <a:t>uniq</a:t>
-            </a:r>
-            <a:r>
-              <a:rPr lang="en-GB" dirty="0"/>
-              <a:t> -c</a:t>
-            </a:r>
-            <a:endParaRPr lang="en-US" dirty="0"/>
+              <a:rPr lang="en-US" dirty="0"/>
+              <a:t>tree -L 1  'Pixel 3/data/</a:t>
+            </a:r>
+            <a:r>
+              <a:rPr lang="en-US" dirty="0" err="1"/>
+              <a:t>system_ce</a:t>
+            </a:r>
+            <a:r>
+              <a:rPr lang="en-US" dirty="0"/>
+              <a:t>/0/'</a:t>
+            </a:r>
           </a:p>
         </p:txBody>
       </p:sp>
@@ -3515,7 +3623,7 @@
           <a:p>
             <a:fld id="{DDBF98C7-164A-4723-84F0-B1E4B080DDEC}" type="slidenum">
               <a:rPr lang="en-US" smtClean="0"/>
-              <a:t>37</a:t>
+              <a:t>36</a:t>
             </a:fld>
             <a:endParaRPr lang="en-US"/>
           </a:p>
@@ -3524,7 +3632,7 @@
     </p:spTree>
     <p:extLst>
       <p:ext uri="{BB962C8B-B14F-4D97-AF65-F5344CB8AC3E}">
-        <p14:creationId xmlns:p14="http://schemas.microsoft.com/office/powerpoint/2010/main" val="2885160239"/>
+        <p14:creationId xmlns:p14="http://schemas.microsoft.com/office/powerpoint/2010/main" val="3379722647"/>
       </p:ext>
     </p:extLst>
   </p:cSld>
@@ -3584,7 +3692,7 @@
             </a:r>
             <a:r>
               <a:rPr lang="en-US" dirty="0" err="1"/>
-              <a:t>system_ce</a:t>
+              <a:t>system_de</a:t>
             </a:r>
             <a:r>
               <a:rPr lang="en-US" dirty="0"/>
@@ -3610,7 +3718,7 @@
           <a:p>
             <a:fld id="{DDBF98C7-164A-4723-84F0-B1E4B080DDEC}" type="slidenum">
               <a:rPr lang="en-US" smtClean="0"/>
-              <a:t>38</a:t>
+              <a:t>37</a:t>
             </a:fld>
             <a:endParaRPr lang="en-US"/>
           </a:p>
@@ -3619,7 +3727,7 @@
     </p:spTree>
     <p:extLst>
       <p:ext uri="{BB962C8B-B14F-4D97-AF65-F5344CB8AC3E}">
-        <p14:creationId xmlns:p14="http://schemas.microsoft.com/office/powerpoint/2010/main" val="3379722647"/>
+        <p14:creationId xmlns:p14="http://schemas.microsoft.com/office/powerpoint/2010/main" val="668300939"/>
       </p:ext>
     </p:extLst>
   </p:cSld>
@@ -3674,17 +3782,127 @@
           <a:lstStyle/>
           <a:p>
             <a:r>
-              <a:rPr lang="en-US" dirty="0"/>
-              <a:t>tree -L 1  'Pixel 3/data/</a:t>
-            </a:r>
-            <a:r>
-              <a:rPr lang="en-US" dirty="0" err="1"/>
+              <a:rPr lang="en-GB" dirty="0"/>
+              <a:t>sqlite3 'Pixel 3/data/</a:t>
+            </a:r>
+            <a:r>
+              <a:rPr lang="en-GB" dirty="0" err="1"/>
               <a:t>system_de</a:t>
             </a:r>
             <a:r>
-              <a:rPr lang="en-US" dirty="0"/>
-              <a:t>/0/'</a:t>
-            </a:r>
+              <a:rPr lang="en-GB" dirty="0"/>
+              <a:t>/0/</a:t>
+            </a:r>
+            <a:r>
+              <a:rPr lang="en-GB" dirty="0" err="1"/>
+              <a:t>accounts_de.db</a:t>
+            </a:r>
+            <a:r>
+              <a:rPr lang="en-GB" dirty="0"/>
+              <a:t>'</a:t>
+            </a:r>
+          </a:p>
+          <a:p>
+            <a:r>
+              <a:rPr lang="en-GB" dirty="0"/>
+              <a:t>select name, type, datetime(</a:t>
+            </a:r>
+            <a:r>
+              <a:rPr lang="en-GB" dirty="0" err="1"/>
+              <a:t>last_password_entry_time_millis_epoch</a:t>
+            </a:r>
+            <a:r>
+              <a:rPr lang="en-GB" dirty="0"/>
+              <a:t>/1000, 'UNIXEPOCH') from accounts;</a:t>
+            </a:r>
+          </a:p>
+          <a:p>
+            <a:endParaRPr lang="en-GB" dirty="0"/>
+          </a:p>
+          <a:p>
+            <a:r>
+              <a:rPr lang="en-GB" dirty="0"/>
+              <a:t>thisisdfir@gmail.com|com.google|2020-01-29 15:41:07</a:t>
+            </a:r>
+          </a:p>
+          <a:p>
+            <a:r>
+              <a:rPr lang="en-GB" dirty="0"/>
+              <a:t>858233690|org.telegram.messenger|2020-01-29 18:31:04</a:t>
+            </a:r>
+          </a:p>
+          <a:p>
+            <a:r>
+              <a:rPr lang="en-GB" dirty="0"/>
+              <a:t>Signal|org.thoughtcrime.securesms|2020-01-29 18:31:40</a:t>
+            </a:r>
+          </a:p>
+          <a:p>
+            <a:r>
+              <a:rPr lang="en-GB" dirty="0" err="1"/>
+              <a:t>imo</a:t>
+            </a:r>
+            <a:r>
+              <a:rPr lang="en-GB" dirty="0"/>
+              <a:t> HD|com.imo.android.imous|2020-01-29 18:32:00</a:t>
+            </a:r>
+          </a:p>
+          <a:p>
+            <a:r>
+              <a:rPr lang="en-GB" dirty="0"/>
+              <a:t>TikTok|com.zhiliaoapp.musically|2020-01-29 18:43:16</a:t>
+            </a:r>
+          </a:p>
+          <a:p>
+            <a:r>
+              <a:rPr lang="en-GB" dirty="0"/>
+              <a:t>Messenger|com.facebook.messenger|2020-01-29 18:51:02</a:t>
+            </a:r>
+          </a:p>
+          <a:p>
+            <a:r>
+              <a:rPr lang="en-GB" dirty="0"/>
+              <a:t>TDfir|com.twitter.android.auth.login|2020-01-29 19:42:51</a:t>
+            </a:r>
+          </a:p>
+          <a:p>
+            <a:r>
+              <a:rPr lang="en-GB" dirty="0"/>
+              <a:t>WhatsApp|com.whatsapp|2020-01-29 21:10:02</a:t>
+            </a:r>
+          </a:p>
+          <a:p>
+            <a:r>
+              <a:rPr lang="en-GB" dirty="0"/>
+              <a:t>thisisdfir|com.silentcircle.account|2020-02-01 20:41:31</a:t>
+            </a:r>
+          </a:p>
+          <a:p>
+            <a:r>
+              <a:rPr lang="en-GB" dirty="0"/>
+              <a:t>Skype|com.skype.raider|2020-02-01 21:08:20</a:t>
+            </a:r>
+          </a:p>
+          <a:p>
+            <a:r>
+              <a:rPr lang="en-GB" dirty="0"/>
+              <a:t>TextNow|com.enflick.android.TextNow.account|2020-02-08 19:54:52</a:t>
+            </a:r>
+          </a:p>
+          <a:p>
+            <a:r>
+              <a:rPr lang="en-GB" dirty="0"/>
+              <a:t>+19195794674|com.viber.voip|2020-02-08 20:15:38</a:t>
+            </a:r>
+          </a:p>
+          <a:p>
+            <a:r>
+              <a:rPr lang="en-GB" dirty="0"/>
+              <a:t>Duo|com.google.android.apps.tachyon|2020-02-14 01:19:15</a:t>
+            </a:r>
+          </a:p>
+          <a:p>
+            <a:endParaRPr lang="en-US" dirty="0"/>
           </a:p>
         </p:txBody>
       </p:sp>
@@ -3705,7 +3923,7 @@
           <a:p>
             <a:fld id="{DDBF98C7-164A-4723-84F0-B1E4B080DDEC}" type="slidenum">
               <a:rPr lang="en-US" smtClean="0"/>
-              <a:t>39</a:t>
+              <a:t>38</a:t>
             </a:fld>
             <a:endParaRPr lang="en-US"/>
           </a:p>
@@ -3714,7 +3932,7 @@
     </p:spTree>
     <p:extLst>
       <p:ext uri="{BB962C8B-B14F-4D97-AF65-F5344CB8AC3E}">
-        <p14:creationId xmlns:p14="http://schemas.microsoft.com/office/powerpoint/2010/main" val="668300939"/>
+        <p14:creationId xmlns:p14="http://schemas.microsoft.com/office/powerpoint/2010/main" val="1271153874"/>
       </p:ext>
     </p:extLst>
   </p:cSld>
@@ -3769,126 +3987,38 @@
           <a:lstStyle/>
           <a:p>
             <a:r>
-              <a:rPr lang="en-GB" dirty="0"/>
-              <a:t>sqlite3 'Pixel 3/data/</a:t>
-            </a:r>
-            <a:r>
-              <a:rPr lang="en-GB" dirty="0" err="1"/>
-              <a:t>system_de</a:t>
-            </a:r>
-            <a:r>
-              <a:rPr lang="en-GB" dirty="0"/>
-              <a:t>/0/</a:t>
-            </a:r>
-            <a:r>
-              <a:rPr lang="en-GB" dirty="0" err="1"/>
-              <a:t>accounts_de.db</a:t>
-            </a:r>
-            <a:r>
-              <a:rPr lang="en-GB" dirty="0"/>
-              <a:t>'</a:t>
-            </a:r>
-          </a:p>
-          <a:p>
-            <a:r>
-              <a:rPr lang="en-GB" dirty="0"/>
-              <a:t>select name, type, datetime(</a:t>
-            </a:r>
-            <a:r>
-              <a:rPr lang="en-GB" dirty="0" err="1"/>
-              <a:t>last_password_entry_time_millis_epoch</a:t>
-            </a:r>
-            <a:r>
-              <a:rPr lang="en-GB" dirty="0"/>
-              <a:t>/1000, 'UNIXEPOCH') from accounts;</a:t>
-            </a:r>
-          </a:p>
-          <a:p>
-            <a:endParaRPr lang="en-GB" dirty="0"/>
-          </a:p>
-          <a:p>
-            <a:r>
-              <a:rPr lang="en-GB" dirty="0"/>
-              <a:t>thisisdfir@gmail.com|com.google|2020-01-29 15:41:07</a:t>
-            </a:r>
-          </a:p>
-          <a:p>
-            <a:r>
-              <a:rPr lang="en-GB" dirty="0"/>
-              <a:t>858233690|org.telegram.messenger|2020-01-29 18:31:04</a:t>
-            </a:r>
-          </a:p>
-          <a:p>
-            <a:r>
-              <a:rPr lang="en-GB" dirty="0"/>
-              <a:t>Signal|org.thoughtcrime.securesms|2020-01-29 18:31:40</a:t>
-            </a:r>
-          </a:p>
-          <a:p>
-            <a:r>
-              <a:rPr lang="en-GB" dirty="0" err="1"/>
-              <a:t>imo</a:t>
-            </a:r>
-            <a:r>
-              <a:rPr lang="en-GB" dirty="0"/>
-              <a:t> HD|com.imo.android.imous|2020-01-29 18:32:00</a:t>
-            </a:r>
-          </a:p>
-          <a:p>
-            <a:r>
-              <a:rPr lang="en-GB" dirty="0"/>
-              <a:t>TikTok|com.zhiliaoapp.musically|2020-01-29 18:43:16</a:t>
-            </a:r>
-          </a:p>
-          <a:p>
-            <a:r>
-              <a:rPr lang="en-GB" dirty="0"/>
-              <a:t>Messenger|com.facebook.messenger|2020-01-29 18:51:02</a:t>
-            </a:r>
-          </a:p>
-          <a:p>
-            <a:r>
-              <a:rPr lang="en-GB" dirty="0"/>
-              <a:t>TDfir|com.twitter.android.auth.login|2020-01-29 19:42:51</a:t>
-            </a:r>
-          </a:p>
-          <a:p>
-            <a:r>
-              <a:rPr lang="en-GB" dirty="0"/>
-              <a:t>WhatsApp|com.whatsapp|2020-01-29 21:10:02</a:t>
-            </a:r>
-          </a:p>
-          <a:p>
-            <a:r>
-              <a:rPr lang="en-GB" dirty="0"/>
-              <a:t>thisisdfir|com.silentcircle.account|2020-02-01 20:41:31</a:t>
-            </a:r>
-          </a:p>
-          <a:p>
-            <a:r>
-              <a:rPr lang="en-GB" dirty="0"/>
-              <a:t>Skype|com.skype.raider|2020-02-01 21:08:20</a:t>
-            </a:r>
-          </a:p>
-          <a:p>
-            <a:r>
-              <a:rPr lang="en-GB" dirty="0"/>
-              <a:t>TextNow|com.enflick.android.TextNow.account|2020-02-08 19:54:52</a:t>
-            </a:r>
-          </a:p>
-          <a:p>
-            <a:r>
-              <a:rPr lang="en-GB" dirty="0"/>
-              <a:t>+19195794674|com.viber.voip|2020-02-08 20:15:38</a:t>
-            </a:r>
-          </a:p>
-          <a:p>
-            <a:r>
-              <a:rPr lang="en-GB" dirty="0"/>
-              <a:t>Duo|com.google.android.apps.tachyon|2020-02-14 01:19:15</a:t>
-            </a:r>
-          </a:p>
-          <a:p>
+              <a:rPr lang="fr-FR" dirty="0" err="1"/>
+              <a:t>grep</a:t>
+            </a:r>
+            <a:r>
+              <a:rPr lang="fr-FR" dirty="0"/>
+              <a:t> -i '</a:t>
+            </a:r>
+            <a:r>
+              <a:rPr lang="fr-FR" dirty="0" err="1"/>
+              <a:t>bluetooth</a:t>
+            </a:r>
+            <a:r>
+              <a:rPr lang="fr-FR" dirty="0"/>
+              <a:t>' 'Pixel 3/data/system/</a:t>
+            </a:r>
+            <a:r>
+              <a:rPr lang="fr-FR" dirty="0" err="1"/>
+              <a:t>users</a:t>
+            </a:r>
+            <a:r>
+              <a:rPr lang="fr-FR" dirty="0"/>
+              <a:t>/0/settings_secure.xml'</a:t>
+            </a:r>
+          </a:p>
+          <a:p>
+            <a:endParaRPr lang="fr-FR" dirty="0"/>
+          </a:p>
+          <a:p>
+            <a:r>
+              <a:rPr lang="fr-FR" dirty="0"/>
+              <a:t>7C:D9:5C:AC:A2:CE</a:t>
+            </a:r>
             <a:endParaRPr lang="en-US" dirty="0"/>
           </a:p>
         </p:txBody>
@@ -3919,7 +4049,7 @@
     </p:spTree>
     <p:extLst>
       <p:ext uri="{BB962C8B-B14F-4D97-AF65-F5344CB8AC3E}">
-        <p14:creationId xmlns:p14="http://schemas.microsoft.com/office/powerpoint/2010/main" val="1271153874"/>
+        <p14:creationId xmlns:p14="http://schemas.microsoft.com/office/powerpoint/2010/main" val="789691542"/>
       </p:ext>
     </p:extLst>
   </p:cSld>
@@ -4086,38 +4216,212 @@
           <a:lstStyle/>
           <a:p>
             <a:r>
-              <a:rPr lang="fr-FR" dirty="0" err="1"/>
-              <a:t>grep</a:t>
-            </a:r>
-            <a:r>
-              <a:rPr lang="fr-FR" dirty="0"/>
-              <a:t> -i '</a:t>
-            </a:r>
-            <a:r>
-              <a:rPr lang="fr-FR" dirty="0" err="1"/>
-              <a:t>bluetooth</a:t>
-            </a:r>
-            <a:r>
-              <a:rPr lang="fr-FR" dirty="0"/>
-              <a:t>' 'Pixel 3/data/system/</a:t>
-            </a:r>
-            <a:r>
-              <a:rPr lang="fr-FR" dirty="0" err="1"/>
-              <a:t>users</a:t>
-            </a:r>
-            <a:r>
-              <a:rPr lang="fr-FR" dirty="0"/>
-              <a:t>/0/settings_secure.xml'</a:t>
-            </a:r>
-          </a:p>
-          <a:p>
-            <a:endParaRPr lang="fr-FR" dirty="0"/>
-          </a:p>
-          <a:p>
-            <a:r>
-              <a:rPr lang="fr-FR" dirty="0"/>
-              <a:t>7C:D9:5C:AC:A2:CE</a:t>
-            </a:r>
+              <a:rPr lang="en-US" dirty="0"/>
+              <a:t>cat 'Pixel 3/data/</a:t>
+            </a:r>
+            <a:r>
+              <a:rPr lang="en-US" dirty="0" err="1"/>
+              <a:t>misc</a:t>
+            </a:r>
+            <a:r>
+              <a:rPr lang="en-US" dirty="0"/>
+              <a:t>/</a:t>
+            </a:r>
+            <a:r>
+              <a:rPr lang="en-US" dirty="0" err="1"/>
+              <a:t>wifi</a:t>
+            </a:r>
+            <a:r>
+              <a:rPr lang="en-US" dirty="0"/>
+              <a:t>/WifiConfigStore.xml’ </a:t>
+            </a:r>
+          </a:p>
+          <a:p>
+            <a:endParaRPr lang="en-US" dirty="0"/>
+          </a:p>
+          <a:p>
+            <a:r>
+              <a:rPr lang="en-US" dirty="0"/>
+              <a:t>&lt;?xml version='1.0' encoding='utf-8' standalone='yes' ?&gt;</a:t>
+            </a:r>
+          </a:p>
+          <a:p>
+            <a:r>
+              <a:rPr lang="en-US" dirty="0"/>
+              <a:t>&lt;</a:t>
+            </a:r>
+            <a:r>
+              <a:rPr lang="en-US" dirty="0" err="1"/>
+              <a:t>WifiConfigStoreData</a:t>
+            </a:r>
+            <a:r>
+              <a:rPr lang="en-US" dirty="0"/>
+              <a:t>&gt;</a:t>
+            </a:r>
+          </a:p>
+          <a:p>
+            <a:r>
+              <a:rPr lang="en-US" dirty="0"/>
+              <a:t>&lt;int name="Version" value="2" /&gt;</a:t>
+            </a:r>
+          </a:p>
+          <a:p>
+            <a:r>
+              <a:rPr lang="en-US" dirty="0"/>
+              <a:t>&lt;Integrity&gt;</a:t>
+            </a:r>
+          </a:p>
+          <a:p>
+            <a:r>
+              <a:rPr lang="en-US" dirty="0"/>
+              <a:t>&lt;byte-array name="</a:t>
+            </a:r>
+            <a:r>
+              <a:rPr lang="en-US" dirty="0" err="1"/>
+              <a:t>EncryptedData</a:t>
+            </a:r>
+            <a:r>
+              <a:rPr lang="en-US" dirty="0"/>
+              <a:t>" num="48"&gt;e71394aa95f2d767a1c46e787ca99c0478e12467241553a8551005969fd38294e8a4082529d69a15d5bc49f28ca21a54&lt;/byte-array&gt;</a:t>
+            </a:r>
+          </a:p>
+          <a:p>
+            <a:r>
+              <a:rPr lang="en-US" dirty="0"/>
+              <a:t>&lt;byte-array name="IV" num="12"&gt;18234dad790da5cb3ba8eceb&lt;/byte-array&gt;</a:t>
+            </a:r>
+          </a:p>
+          <a:p>
+            <a:r>
+              <a:rPr lang="en-US" dirty="0"/>
+              <a:t>&lt;/Integrity&gt;</a:t>
+            </a:r>
+          </a:p>
+          <a:p>
+            <a:r>
+              <a:rPr lang="en-US" dirty="0"/>
+              <a:t>&lt;</a:t>
+            </a:r>
+            <a:r>
+              <a:rPr lang="en-US" dirty="0" err="1"/>
+              <a:t>NetworkList</a:t>
+            </a:r>
+            <a:r>
+              <a:rPr lang="en-US" dirty="0"/>
+              <a:t> /&gt;</a:t>
+            </a:r>
+          </a:p>
+          <a:p>
+            <a:r>
+              <a:rPr lang="en-US" dirty="0"/>
+              <a:t>&lt;</a:t>
+            </a:r>
+            <a:r>
+              <a:rPr lang="en-US" dirty="0" err="1"/>
+              <a:t>MacAddressMap</a:t>
+            </a:r>
+            <a:r>
+              <a:rPr lang="en-US" dirty="0"/>
+              <a:t>&gt;</a:t>
+            </a:r>
+          </a:p>
+          <a:p>
+            <a:r>
+              <a:rPr lang="en-US" dirty="0"/>
+              <a:t>&lt;map name="</a:t>
+            </a:r>
+            <a:r>
+              <a:rPr lang="en-US" dirty="0" err="1"/>
+              <a:t>MacMapEntry</a:t>
+            </a:r>
+            <a:r>
+              <a:rPr lang="en-US" dirty="0"/>
+              <a:t>"&gt;</a:t>
+            </a:r>
+          </a:p>
+          <a:p>
+            <a:r>
+              <a:rPr lang="en-US" dirty="0"/>
+              <a:t>&lt;string name="&amp;quot;CcookiesDcastleR5&amp;quot;WPA_PSK"&gt;ae:f6:c7:a8:a5:c2&lt;/string&gt;</a:t>
+            </a:r>
+          </a:p>
+          <a:p>
+            <a:r>
+              <a:rPr lang="en-US" dirty="0"/>
+              <a:t>&lt;/map&gt;</a:t>
+            </a:r>
+          </a:p>
+          <a:p>
+            <a:r>
+              <a:rPr lang="en-US" dirty="0"/>
+              <a:t>&lt;/</a:t>
+            </a:r>
+            <a:r>
+              <a:rPr lang="en-US" dirty="0" err="1"/>
+              <a:t>MacAddressMap</a:t>
+            </a:r>
+            <a:r>
+              <a:rPr lang="en-US" dirty="0"/>
+              <a:t>&gt;</a:t>
+            </a:r>
+          </a:p>
+          <a:p>
+            <a:r>
+              <a:rPr lang="en-US" dirty="0"/>
+              <a:t>&lt;</a:t>
+            </a:r>
+            <a:r>
+              <a:rPr lang="en-US" dirty="0" err="1"/>
+              <a:t>PasspointConfigData</a:t>
+            </a:r>
+            <a:r>
+              <a:rPr lang="en-US" dirty="0"/>
+              <a:t>&gt;</a:t>
+            </a:r>
+          </a:p>
+          <a:p>
+            <a:r>
+              <a:rPr lang="en-US" dirty="0"/>
+              <a:t>&lt;long name="</a:t>
+            </a:r>
+            <a:r>
+              <a:rPr lang="en-US" dirty="0" err="1"/>
+              <a:t>ProviderIndex</a:t>
+            </a:r>
+            <a:r>
+              <a:rPr lang="en-US" dirty="0"/>
+              <a:t>" value="0" /&gt;</a:t>
+            </a:r>
+          </a:p>
+          <a:p>
+            <a:r>
+              <a:rPr lang="en-US" dirty="0"/>
+              <a:t>&lt;/</a:t>
+            </a:r>
+            <a:r>
+              <a:rPr lang="en-US" dirty="0" err="1"/>
+              <a:t>PasspointConfigData</a:t>
+            </a:r>
+            <a:r>
+              <a:rPr lang="en-US" dirty="0"/>
+              <a:t>&gt;</a:t>
+            </a:r>
+          </a:p>
+          <a:p>
+            <a:r>
+              <a:rPr lang="en-US" dirty="0"/>
+              <a:t>&lt;/</a:t>
+            </a:r>
+            <a:r>
+              <a:rPr lang="en-US" dirty="0" err="1"/>
+              <a:t>WifiConfigStoreData</a:t>
+            </a:r>
+            <a:r>
+              <a:rPr lang="en-US" dirty="0"/>
+              <a:t>&gt;</a:t>
+            </a:r>
+          </a:p>
+          <a:p>
             <a:endParaRPr lang="en-US" dirty="0"/>
           </a:p>
         </p:txBody>
@@ -4139,7 +4443,7 @@
           <a:p>
             <a:fld id="{DDBF98C7-164A-4723-84F0-B1E4B080DDEC}" type="slidenum">
               <a:rPr lang="en-US" smtClean="0"/>
-              <a:t>42</a:t>
+              <a:t>41</a:t>
             </a:fld>
             <a:endParaRPr lang="en-US"/>
           </a:p>
@@ -4148,7 +4452,7 @@
     </p:spTree>
     <p:extLst>
       <p:ext uri="{BB962C8B-B14F-4D97-AF65-F5344CB8AC3E}">
-        <p14:creationId xmlns:p14="http://schemas.microsoft.com/office/powerpoint/2010/main" val="789691542"/>
+        <p14:creationId xmlns:p14="http://schemas.microsoft.com/office/powerpoint/2010/main" val="1832259185"/>
       </p:ext>
     </p:extLst>
   </p:cSld>
@@ -4204,211 +4508,57 @@
           <a:p>
             <a:r>
               <a:rPr lang="en-US" dirty="0"/>
-              <a:t>cat 'Pixel 3/data/</a:t>
+              <a:t>find 'Pixel 3' -</a:t>
             </a:r>
             <a:r>
               <a:rPr lang="en-US" dirty="0" err="1"/>
-              <a:t>misc</a:t>
-            </a:r>
-            <a:r>
-              <a:rPr lang="en-US" dirty="0"/>
+              <a:t>iname</a:t>
+            </a:r>
+            <a:r>
+              <a:rPr lang="en-US" dirty="0"/>
+              <a:t> '</a:t>
+            </a:r>
+            <a:r>
+              <a:rPr lang="en-US" dirty="0" err="1"/>
+              <a:t>wpa</a:t>
+            </a:r>
+            <a:r>
+              <a:rPr lang="en-US" dirty="0"/>
+              <a:t>*’</a:t>
+            </a:r>
+          </a:p>
+          <a:p>
+            <a:endParaRPr lang="en-US" dirty="0"/>
+          </a:p>
+          <a:p>
+            <a:r>
+              <a:rPr lang="fr-FR" dirty="0"/>
+              <a:t>cat 'Pixel 3/</a:t>
+            </a:r>
+            <a:r>
+              <a:rPr lang="fr-FR" dirty="0" err="1"/>
+              <a:t>vendor</a:t>
+            </a:r>
+            <a:r>
+              <a:rPr lang="fr-FR" dirty="0"/>
               <a:t>/</a:t>
             </a:r>
             <a:r>
-              <a:rPr lang="en-US" dirty="0" err="1"/>
-              <a:t>wifi</a:t>
-            </a:r>
-            <a:r>
-              <a:rPr lang="en-US" dirty="0"/>
-              <a:t>/WifiConfigStore.xml’ </a:t>
-            </a:r>
-          </a:p>
-          <a:p>
-            <a:endParaRPr lang="en-US" dirty="0"/>
-          </a:p>
-          <a:p>
-            <a:r>
-              <a:rPr lang="en-US" dirty="0"/>
-              <a:t>&lt;?xml version='1.0' encoding='utf-8' standalone='yes' ?&gt;</a:t>
-            </a:r>
-          </a:p>
-          <a:p>
-            <a:r>
-              <a:rPr lang="en-US" dirty="0"/>
-              <a:t>&lt;</a:t>
-            </a:r>
-            <a:r>
-              <a:rPr lang="en-US" dirty="0" err="1"/>
-              <a:t>WifiConfigStoreData</a:t>
-            </a:r>
-            <a:r>
-              <a:rPr lang="en-US" dirty="0"/>
-              <a:t>&gt;</a:t>
-            </a:r>
-          </a:p>
-          <a:p>
-            <a:r>
-              <a:rPr lang="en-US" dirty="0"/>
-              <a:t>&lt;int name="Version" value="2" /&gt;</a:t>
-            </a:r>
-          </a:p>
-          <a:p>
-            <a:r>
-              <a:rPr lang="en-US" dirty="0"/>
-              <a:t>&lt;Integrity&gt;</a:t>
-            </a:r>
-          </a:p>
-          <a:p>
-            <a:r>
-              <a:rPr lang="en-US" dirty="0"/>
-              <a:t>&lt;byte-array name="</a:t>
-            </a:r>
-            <a:r>
-              <a:rPr lang="en-US" dirty="0" err="1"/>
-              <a:t>EncryptedData</a:t>
-            </a:r>
-            <a:r>
-              <a:rPr lang="en-US" dirty="0"/>
-              <a:t>" num="48"&gt;e71394aa95f2d767a1c46e787ca99c0478e12467241553a8551005969fd38294e8a4082529d69a15d5bc49f28ca21a54&lt;/byte-array&gt;</a:t>
-            </a:r>
-          </a:p>
-          <a:p>
-            <a:r>
-              <a:rPr lang="en-US" dirty="0"/>
-              <a:t>&lt;byte-array name="IV" num="12"&gt;18234dad790da5cb3ba8eceb&lt;/byte-array&gt;</a:t>
-            </a:r>
-          </a:p>
-          <a:p>
-            <a:r>
-              <a:rPr lang="en-US" dirty="0"/>
-              <a:t>&lt;/Integrity&gt;</a:t>
-            </a:r>
-          </a:p>
-          <a:p>
-            <a:r>
-              <a:rPr lang="en-US" dirty="0"/>
-              <a:t>&lt;</a:t>
-            </a:r>
-            <a:r>
-              <a:rPr lang="en-US" dirty="0" err="1"/>
-              <a:t>NetworkList</a:t>
-            </a:r>
-            <a:r>
-              <a:rPr lang="en-US" dirty="0"/>
-              <a:t> /&gt;</a:t>
-            </a:r>
-          </a:p>
-          <a:p>
-            <a:r>
-              <a:rPr lang="en-US" dirty="0"/>
-              <a:t>&lt;</a:t>
-            </a:r>
-            <a:r>
-              <a:rPr lang="en-US" dirty="0" err="1"/>
-              <a:t>MacAddressMap</a:t>
-            </a:r>
-            <a:r>
-              <a:rPr lang="en-US" dirty="0"/>
-              <a:t>&gt;</a:t>
-            </a:r>
-          </a:p>
-          <a:p>
-            <a:r>
-              <a:rPr lang="en-US" dirty="0"/>
-              <a:t>&lt;map name="</a:t>
-            </a:r>
-            <a:r>
-              <a:rPr lang="en-US" dirty="0" err="1"/>
-              <a:t>MacMapEntry</a:t>
-            </a:r>
-            <a:r>
-              <a:rPr lang="en-US" dirty="0"/>
-              <a:t>"&gt;</a:t>
-            </a:r>
-          </a:p>
-          <a:p>
-            <a:r>
-              <a:rPr lang="en-US" dirty="0"/>
-              <a:t>&lt;string name="&amp;quot;CcookiesDcastleR5&amp;quot;WPA_PSK"&gt;ae:f6:c7:a8:a5:c2&lt;/string&gt;</a:t>
-            </a:r>
-          </a:p>
-          <a:p>
-            <a:r>
-              <a:rPr lang="en-US" dirty="0"/>
-              <a:t>&lt;/map&gt;</a:t>
-            </a:r>
-          </a:p>
-          <a:p>
-            <a:r>
-              <a:rPr lang="en-US" dirty="0"/>
-              <a:t>&lt;/</a:t>
-            </a:r>
-            <a:r>
-              <a:rPr lang="en-US" dirty="0" err="1"/>
-              <a:t>MacAddressMap</a:t>
-            </a:r>
-            <a:r>
-              <a:rPr lang="en-US" dirty="0"/>
-              <a:t>&gt;</a:t>
-            </a:r>
-          </a:p>
-          <a:p>
-            <a:r>
-              <a:rPr lang="en-US" dirty="0"/>
-              <a:t>&lt;</a:t>
-            </a:r>
-            <a:r>
-              <a:rPr lang="en-US" dirty="0" err="1"/>
-              <a:t>PasspointConfigData</a:t>
-            </a:r>
-            <a:r>
-              <a:rPr lang="en-US" dirty="0"/>
-              <a:t>&gt;</a:t>
-            </a:r>
-          </a:p>
-          <a:p>
-            <a:r>
-              <a:rPr lang="en-US" dirty="0"/>
-              <a:t>&lt;long name="</a:t>
-            </a:r>
-            <a:r>
-              <a:rPr lang="en-US" dirty="0" err="1"/>
-              <a:t>ProviderIndex</a:t>
-            </a:r>
-            <a:r>
-              <a:rPr lang="en-US" dirty="0"/>
-              <a:t>" value="0" /&gt;</a:t>
-            </a:r>
-          </a:p>
-          <a:p>
-            <a:r>
-              <a:rPr lang="en-US" dirty="0"/>
-              <a:t>&lt;/</a:t>
-            </a:r>
-            <a:r>
-              <a:rPr lang="en-US" dirty="0" err="1"/>
-              <a:t>PasspointConfigData</a:t>
-            </a:r>
-            <a:r>
-              <a:rPr lang="en-US" dirty="0"/>
-              <a:t>&gt;</a:t>
-            </a:r>
-          </a:p>
-          <a:p>
-            <a:r>
-              <a:rPr lang="en-US" dirty="0"/>
-              <a:t>&lt;/</a:t>
-            </a:r>
-            <a:r>
-              <a:rPr lang="en-US" dirty="0" err="1"/>
-              <a:t>WifiConfigStoreData</a:t>
-            </a:r>
-            <a:r>
-              <a:rPr lang="en-US" dirty="0"/>
-              <a:t>&gt;</a:t>
-            </a:r>
-          </a:p>
-          <a:p>
+              <a:rPr lang="fr-FR" dirty="0" err="1"/>
+              <a:t>etc</a:t>
+            </a:r>
+            <a:r>
+              <a:rPr lang="fr-FR" dirty="0"/>
+              <a:t>/wifi/</a:t>
+            </a:r>
+            <a:r>
+              <a:rPr lang="fr-FR" dirty="0" err="1"/>
+              <a:t>wpa_supplicant.conf</a:t>
+            </a:r>
+            <a:r>
+              <a:rPr lang="fr-FR" dirty="0"/>
+              <a:t>'</a:t>
+            </a:r>
             <a:endParaRPr lang="en-US" dirty="0"/>
           </a:p>
         </p:txBody>
@@ -4430,144 +4580,7 @@
           <a:p>
             <a:fld id="{DDBF98C7-164A-4723-84F0-B1E4B080DDEC}" type="slidenum">
               <a:rPr lang="en-US" smtClean="0"/>
-              <a:t>43</a:t>
-            </a:fld>
-            <a:endParaRPr lang="en-US"/>
-          </a:p>
-        </p:txBody>
-      </p:sp>
-    </p:spTree>
-    <p:extLst>
-      <p:ext uri="{BB962C8B-B14F-4D97-AF65-F5344CB8AC3E}">
-        <p14:creationId xmlns:p14="http://schemas.microsoft.com/office/powerpoint/2010/main" val="1832259185"/>
-      </p:ext>
-    </p:extLst>
-  </p:cSld>
-  <p:clrMapOvr>
-    <a:masterClrMapping/>
-  </p:clrMapOvr>
-</p:notes>
-</file>
-
-<file path=ppt/notesSlides/notesSlide32.xml><?xml version="1.0" encoding="utf-8"?>
-<p:notes xmlns:a="http://schemas.openxmlformats.org/drawingml/2006/main" xmlns:r="http://schemas.openxmlformats.org/officeDocument/2006/relationships" xmlns:p="http://schemas.openxmlformats.org/presentationml/2006/main">
-  <p:cSld>
-    <p:spTree>
-      <p:nvGrpSpPr>
-        <p:cNvPr id="1" name=""/>
-        <p:cNvGrpSpPr/>
-        <p:nvPr/>
-      </p:nvGrpSpPr>
-      <p:grpSpPr>
-        <a:xfrm>
-          <a:off x="0" y="0"/>
-          <a:ext cx="0" cy="0"/>
-          <a:chOff x="0" y="0"/>
-          <a:chExt cx="0" cy="0"/>
-        </a:xfrm>
-      </p:grpSpPr>
-      <p:sp>
-        <p:nvSpPr>
-          <p:cNvPr id="2" name="Slide Image Placeholder 1"/>
-          <p:cNvSpPr>
-            <a:spLocks noGrp="1" noRot="1" noChangeAspect="1"/>
-          </p:cNvSpPr>
-          <p:nvPr>
-            <p:ph type="sldImg"/>
-          </p:nvPr>
-        </p:nvSpPr>
-        <p:spPr/>
-      </p:sp>
-      <p:sp>
-        <p:nvSpPr>
-          <p:cNvPr id="3" name="Notes Placeholder 2"/>
-          <p:cNvSpPr>
-            <a:spLocks noGrp="1"/>
-          </p:cNvSpPr>
-          <p:nvPr>
-            <p:ph type="body" idx="1"/>
-          </p:nvPr>
-        </p:nvSpPr>
-        <p:spPr/>
-        <p:txBody>
-          <a:bodyPr/>
-          <a:lstStyle/>
-          <a:p>
-            <a:r>
-              <a:rPr lang="en-US" dirty="0"/>
-              <a:t>find 'Pixel 3' -</a:t>
-            </a:r>
-            <a:r>
-              <a:rPr lang="en-US" dirty="0" err="1"/>
-              <a:t>iname</a:t>
-            </a:r>
-            <a:r>
-              <a:rPr lang="en-US" dirty="0"/>
-              <a:t> '</a:t>
-            </a:r>
-            <a:r>
-              <a:rPr lang="en-US" dirty="0" err="1"/>
-              <a:t>wpa</a:t>
-            </a:r>
-            <a:r>
-              <a:rPr lang="en-US" dirty="0"/>
-              <a:t>*’</a:t>
-            </a:r>
-          </a:p>
-          <a:p>
-            <a:endParaRPr lang="en-US" dirty="0"/>
-          </a:p>
-          <a:p>
-            <a:r>
-              <a:rPr lang="fr-FR" dirty="0"/>
-              <a:t>cat 'Pixel 3/</a:t>
-            </a:r>
-            <a:r>
-              <a:rPr lang="fr-FR" dirty="0" err="1"/>
-              <a:t>vendor</a:t>
-            </a:r>
-            <a:r>
-              <a:rPr lang="fr-FR" dirty="0"/>
-              <a:t>/</a:t>
-            </a:r>
-            <a:r>
-              <a:rPr lang="fr-FR" dirty="0" err="1"/>
-              <a:t>etc</a:t>
-            </a:r>
-            <a:r>
-              <a:rPr lang="fr-FR" dirty="0"/>
-              <a:t>/wifi/</a:t>
-            </a:r>
-            <a:r>
-              <a:rPr lang="fr-FR" dirty="0" err="1"/>
-              <a:t>wpa_supplicant.conf</a:t>
-            </a:r>
-            <a:r>
-              <a:rPr lang="fr-FR" dirty="0"/>
-              <a:t>'</a:t>
-            </a:r>
-            <a:endParaRPr lang="en-US" dirty="0"/>
-          </a:p>
-        </p:txBody>
-      </p:sp>
-      <p:sp>
-        <p:nvSpPr>
-          <p:cNvPr id="4" name="Slide Number Placeholder 3"/>
-          <p:cNvSpPr>
-            <a:spLocks noGrp="1"/>
-          </p:cNvSpPr>
-          <p:nvPr>
-            <p:ph type="sldNum" sz="quarter" idx="5"/>
-          </p:nvPr>
-        </p:nvSpPr>
-        <p:spPr/>
-        <p:txBody>
-          <a:bodyPr/>
-          <a:lstStyle/>
-          <a:p>
-            <a:fld id="{DDBF98C7-164A-4723-84F0-B1E4B080DDEC}" type="slidenum">
-              <a:rPr lang="en-US" smtClean="0"/>
-              <a:t>44</a:t>
+              <a:t>42</a:t>
             </a:fld>
             <a:endParaRPr lang="en-US"/>
           </a:p>
@@ -5371,7 +5384,7 @@
           <a:p>
             <a:fld id="{4263717A-E3C1-4BED-ABE0-B7069385E023}" type="datetimeFigureOut">
               <a:rPr lang="en-US" smtClean="0"/>
-              <a:t>2/11/2026</a:t>
+              <a:t>9/9/2026</a:t>
             </a:fld>
             <a:endParaRPr lang="en-US"/>
           </a:p>
@@ -5544,7 +5557,7 @@
           <a:p>
             <a:fld id="{4263717A-E3C1-4BED-ABE0-B7069385E023}" type="datetimeFigureOut">
               <a:rPr lang="en-US" smtClean="0"/>
-              <a:t>2/11/2026</a:t>
+              <a:t>9/9/2026</a:t>
             </a:fld>
             <a:endParaRPr lang="en-US"/>
           </a:p>
@@ -5722,7 +5735,7 @@
           <a:p>
             <a:fld id="{4263717A-E3C1-4BED-ABE0-B7069385E023}" type="datetimeFigureOut">
               <a:rPr lang="en-US" smtClean="0"/>
-              <a:t>2/11/2026</a:t>
+              <a:t>9/9/2026</a:t>
             </a:fld>
             <a:endParaRPr lang="en-US"/>
           </a:p>
@@ -5890,7 +5903,7 @@
           <a:p>
             <a:fld id="{4263717A-E3C1-4BED-ABE0-B7069385E023}" type="datetimeFigureOut">
               <a:rPr lang="en-US" smtClean="0"/>
-              <a:t>2/11/2026</a:t>
+              <a:t>9/9/2026</a:t>
             </a:fld>
             <a:endParaRPr lang="en-US"/>
           </a:p>
@@ -6135,7 +6148,7 @@
           <a:p>
             <a:fld id="{4263717A-E3C1-4BED-ABE0-B7069385E023}" type="datetimeFigureOut">
               <a:rPr lang="en-US" smtClean="0"/>
-              <a:t>2/11/2026</a:t>
+              <a:t>9/9/2026</a:t>
             </a:fld>
             <a:endParaRPr lang="en-US"/>
           </a:p>
@@ -6364,7 +6377,7 @@
           <a:p>
             <a:fld id="{4263717A-E3C1-4BED-ABE0-B7069385E023}" type="datetimeFigureOut">
               <a:rPr lang="en-US" smtClean="0"/>
-              <a:t>2/11/2026</a:t>
+              <a:t>9/9/2026</a:t>
             </a:fld>
             <a:endParaRPr lang="en-US"/>
           </a:p>
@@ -6728,7 +6741,7 @@
           <a:p>
             <a:fld id="{4263717A-E3C1-4BED-ABE0-B7069385E023}" type="datetimeFigureOut">
               <a:rPr lang="en-US" smtClean="0"/>
-              <a:t>2/11/2026</a:t>
+              <a:t>9/9/2026</a:t>
             </a:fld>
             <a:endParaRPr lang="en-US"/>
           </a:p>
@@ -6845,7 +6858,7 @@
           <a:p>
             <a:fld id="{4263717A-E3C1-4BED-ABE0-B7069385E023}" type="datetimeFigureOut">
               <a:rPr lang="en-US" smtClean="0"/>
-              <a:t>2/11/2026</a:t>
+              <a:t>9/9/2026</a:t>
             </a:fld>
             <a:endParaRPr lang="en-US"/>
           </a:p>
@@ -6940,7 +6953,7 @@
           <a:p>
             <a:fld id="{4263717A-E3C1-4BED-ABE0-B7069385E023}" type="datetimeFigureOut">
               <a:rPr lang="en-US" smtClean="0"/>
-              <a:t>2/11/2026</a:t>
+              <a:t>9/9/2026</a:t>
             </a:fld>
             <a:endParaRPr lang="en-US"/>
           </a:p>
@@ -7215,7 +7228,7 @@
           <a:p>
             <a:fld id="{4263717A-E3C1-4BED-ABE0-B7069385E023}" type="datetimeFigureOut">
               <a:rPr lang="en-US" smtClean="0"/>
-              <a:t>2/11/2026</a:t>
+              <a:t>9/9/2026</a:t>
             </a:fld>
             <a:endParaRPr lang="en-US"/>
           </a:p>
@@ -7467,7 +7480,7 @@
           <a:p>
             <a:fld id="{4263717A-E3C1-4BED-ABE0-B7069385E023}" type="datetimeFigureOut">
               <a:rPr lang="en-US" smtClean="0"/>
-              <a:t>2/11/2026</a:t>
+              <a:t>9/9/2026</a:t>
             </a:fld>
             <a:endParaRPr lang="en-US"/>
           </a:p>
@@ -7678,7 +7691,7 @@
           <a:p>
             <a:fld id="{4263717A-E3C1-4BED-ABE0-B7069385E023}" type="datetimeFigureOut">
               <a:rPr lang="en-US" smtClean="0"/>
-              <a:t>2/11/2026</a:t>
+              <a:t>9/9/2026</a:t>
             </a:fld>
             <a:endParaRPr lang="en-US"/>
           </a:p>
@@ -8270,7 +8283,7 @@
           <a:p>
             <a:r>
               <a:rPr lang="en-US" dirty="0"/>
-              <a:t>Pixel3 Device Investigations</a:t>
+              <a:t>Pixel Device Investigations</a:t>
             </a:r>
           </a:p>
         </p:txBody>
@@ -10661,7 +10674,7 @@
           <p:nvPr>
             <p:extLst>
               <p:ext uri="{D42A27DB-BD31-4B8C-83A1-F6EECF244321}">
-                <p14:modId xmlns:p14="http://schemas.microsoft.com/office/powerpoint/2010/main" val="1427909944"/>
+                <p14:modId xmlns:p14="http://schemas.microsoft.com/office/powerpoint/2010/main" val="3152127795"/>
               </p:ext>
             </p:extLst>
           </p:nvPr>
@@ -10756,7 +10769,9 @@
                         <a:defRPr/>
                       </a:pPr>
                       <a:r>
-                        <a:rPr lang="de-DE" dirty="0"/>
+                        <a:rPr lang="de-DE" dirty="0">
+                          <a:latin typeface="Arial Narrow" panose="020B0606020202030204" pitchFamily="34" charset="0"/>
+                        </a:rPr>
                         <a:t>Pixel 3/data/system/users/userlist.xml</a:t>
                       </a:r>
                     </a:p>
@@ -10777,7 +10792,7 @@
                     <a:p>
                       <a:r>
                         <a:rPr lang="en-US" dirty="0"/>
-                        <a:t>User name, </a:t>
+                        <a:t>User name</a:t>
                       </a:r>
                     </a:p>
                   </a:txBody>
@@ -10789,7 +10804,9 @@
                     <a:lstStyle/>
                     <a:p>
                       <a:r>
-                        <a:rPr lang="de-DE" dirty="0"/>
+                        <a:rPr lang="de-DE" dirty="0">
+                          <a:latin typeface="Arial Narrow" panose="020B0606020202030204" pitchFamily="34" charset="0"/>
+                        </a:rPr>
                         <a:t>Pixel 3/data/system/users/0.xml</a:t>
                       </a:r>
                     </a:p>
@@ -10812,7 +10829,9 @@
                         <a:defRPr/>
                       </a:pPr>
                       <a:r>
-                        <a:rPr lang="de-DE" dirty="0"/>
+                        <a:rPr lang="de-DE" dirty="0">
+                          <a:latin typeface="Arial Narrow" panose="020B0606020202030204" pitchFamily="34" charset="0"/>
+                        </a:rPr>
                         <a:t>Pixel 3/data/system/users/1.xml</a:t>
                       </a:r>
                     </a:p>
@@ -10845,37 +10864,53 @@
                     <a:lstStyle/>
                     <a:p>
                       <a:r>
-                        <a:rPr lang="de-DE" dirty="0"/>
+                        <a:rPr lang="de-DE" dirty="0">
+                          <a:latin typeface="Arial Narrow" panose="020B0606020202030204" pitchFamily="34" charset="0"/>
+                        </a:rPr>
                         <a:t>Pixel 3/</a:t>
                       </a:r>
                       <a:r>
-                        <a:rPr lang="en-US" dirty="0"/>
+                        <a:rPr lang="en-US" dirty="0">
+                          <a:latin typeface="Arial Narrow" panose="020B0606020202030204" pitchFamily="34" charset="0"/>
+                        </a:rPr>
                         <a:t>data/data/com.google.android.gm/</a:t>
                       </a:r>
                       <a:r>
-                        <a:rPr lang="en-US" dirty="0" err="1"/>
+                        <a:rPr lang="en-US" dirty="0" err="1">
+                          <a:latin typeface="Arial Narrow" panose="020B0606020202030204" pitchFamily="34" charset="0"/>
+                        </a:rPr>
                         <a:t>shared_prefs</a:t>
                       </a:r>
                       <a:r>
-                        <a:rPr lang="en-US" dirty="0"/>
+                        <a:rPr lang="en-US" dirty="0">
+                          <a:latin typeface="Arial Narrow" panose="020B0606020202030204" pitchFamily="34" charset="0"/>
+                        </a:rPr>
                         <a:t>/Gmail.xml</a:t>
                       </a:r>
                     </a:p>
                     <a:p>
                       <a:r>
-                        <a:rPr lang="de-DE" dirty="0"/>
+                        <a:rPr lang="de-DE" dirty="0">
+                          <a:latin typeface="Arial Narrow" panose="020B0606020202030204" pitchFamily="34" charset="0"/>
+                        </a:rPr>
                         <a:t>Pixel 3/</a:t>
                       </a:r>
                       <a:r>
-                        <a:rPr lang="en-US" dirty="0"/>
+                        <a:rPr lang="en-US" dirty="0">
+                          <a:latin typeface="Arial Narrow" panose="020B0606020202030204" pitchFamily="34" charset="0"/>
+                        </a:rPr>
                         <a:t>data/data/com.google.android.gm/</a:t>
                       </a:r>
                       <a:r>
-                        <a:rPr lang="en-US" dirty="0" err="1"/>
+                        <a:rPr lang="en-US" dirty="0" err="1">
+                          <a:latin typeface="Arial Narrow" panose="020B0606020202030204" pitchFamily="34" charset="0"/>
+                        </a:rPr>
                         <a:t>shared_prefs</a:t>
                       </a:r>
                       <a:r>
-                        <a:rPr lang="en-US" dirty="0"/>
+                        <a:rPr lang="en-US" dirty="0">
+                          <a:latin typeface="Arial Narrow" panose="020B0606020202030204" pitchFamily="34" charset="0"/>
+                        </a:rPr>
                         <a:t>/UnifiedEmail.xml</a:t>
                       </a:r>
                     </a:p>
@@ -10908,10 +10943,14 @@
                     <a:lstStyle/>
                     <a:p>
                       <a:r>
-                        <a:rPr lang="it-IT" dirty="0"/>
+                        <a:rPr lang="it-IT" dirty="0">
+                          <a:latin typeface="Arial Narrow" panose="020B0606020202030204" pitchFamily="34" charset="0"/>
+                        </a:rPr>
                         <a:t>Pixel 3/data/data/com.android.vending/cache/logs/</a:t>
                       </a:r>
-                      <a:endParaRPr lang="en-US" dirty="0"/>
+                      <a:endParaRPr lang="en-US" dirty="0">
+                        <a:latin typeface="Arial Narrow" panose="020B0606020202030204" pitchFamily="34" charset="0"/>
+                      </a:endParaRPr>
                     </a:p>
                   </a:txBody>
                   <a:tcPr/>
@@ -10942,7 +10981,9 @@
                     <a:lstStyle/>
                     <a:p>
                       <a:r>
-                        <a:rPr lang="nn-NO" dirty="0"/>
+                        <a:rPr lang="nn-NO" dirty="0">
+                          <a:latin typeface="Arial Narrow" panose="020B0606020202030204" pitchFamily="34" charset="0"/>
+                        </a:rPr>
                         <a:t>Pixel 3/data/system_ce/0/account_ce.db  </a:t>
                       </a:r>
                       <a:r>
@@ -10950,6 +10991,7 @@
                           <a:solidFill>
                             <a:srgbClr val="FF0000"/>
                           </a:solidFill>
+                          <a:latin typeface="Arial Narrow" panose="020B0606020202030204" pitchFamily="34" charset="0"/>
                         </a:rPr>
                         <a:t>Credential-Encrypted (CE) storage.</a:t>
                       </a:r>
@@ -10973,7 +11015,9 @@
                         <a:defRPr/>
                       </a:pPr>
                       <a:r>
-                        <a:rPr lang="nn-NO" dirty="0"/>
+                        <a:rPr lang="nn-NO" dirty="0">
+                          <a:latin typeface="Arial Narrow" panose="020B0606020202030204" pitchFamily="34" charset="0"/>
+                        </a:rPr>
                         <a:t>Pixel 3/data/system_de/0/account_de.db </a:t>
                       </a:r>
                       <a:r>
@@ -10981,6 +11025,7 @@
                           <a:solidFill>
                             <a:srgbClr val="FF0000"/>
                           </a:solidFill>
+                          <a:latin typeface="Arial Narrow" panose="020B0606020202030204" pitchFamily="34" charset="0"/>
                         </a:rPr>
                         <a:t>Device-Encrypted (DE) storage</a:t>
                       </a:r>
@@ -10988,6 +11033,7 @@
                         <a:solidFill>
                           <a:srgbClr val="FF0000"/>
                         </a:solidFill>
+                        <a:latin typeface="Arial Narrow" panose="020B0606020202030204" pitchFamily="34" charset="0"/>
                       </a:endParaRPr>
                     </a:p>
                   </a:txBody>
@@ -11706,8 +11752,15 @@
           <a:p>
             <a:r>
               <a:rPr lang="en-US" dirty="0"/>
-              <a:t>Bluetooth Mac address and Wi-Fi</a:t>
-            </a:r>
+              <a:t>Bluetooth MAC address and Wi-Fi</a:t>
+            </a:r>
+          </a:p>
+          <a:p>
+            <a:r>
+              <a:rPr lang="en-GB" dirty="0"/>
+              <a:t>Other artifacts generated by API usage</a:t>
+            </a:r>
+            <a:endParaRPr lang="en-US" dirty="0"/>
           </a:p>
         </p:txBody>
       </p:sp>
@@ -12781,791 +12834,6 @@
 <file path=ppt/slides/slide26.xml><?xml version="1.0" encoding="utf-8"?>
 <p:sld xmlns:a="http://schemas.openxmlformats.org/drawingml/2006/main" xmlns:r="http://schemas.openxmlformats.org/officeDocument/2006/relationships" xmlns:p="http://schemas.openxmlformats.org/presentationml/2006/main">
   <p:cSld>
-    <p:bg>
-      <p:bgPr>
-        <a:solidFill>
-          <a:schemeClr val="bg1"/>
-        </a:solidFill>
-        <a:effectLst/>
-      </p:bgPr>
-    </p:bg>
-    <p:spTree>
-      <p:nvGrpSpPr>
-        <p:cNvPr id="1" name=""/>
-        <p:cNvGrpSpPr/>
-        <p:nvPr/>
-      </p:nvGrpSpPr>
-      <p:grpSpPr>
-        <a:xfrm>
-          <a:off x="0" y="0"/>
-          <a:ext cx="0" cy="0"/>
-          <a:chOff x="0" y="0"/>
-          <a:chExt cx="0" cy="0"/>
-        </a:xfrm>
-      </p:grpSpPr>
-      <p:sp>
-        <p:nvSpPr>
-          <p:cNvPr id="2" name="Title 1">
-            <a:extLst>
-              <a:ext uri="{FF2B5EF4-FFF2-40B4-BE49-F238E27FC236}">
-                <a16:creationId xmlns:a16="http://schemas.microsoft.com/office/drawing/2014/main" id="{86863385-441E-4CDB-A324-D740F6B05E36}"/>
-              </a:ext>
-            </a:extLst>
-          </p:cNvPr>
-          <p:cNvSpPr>
-            <a:spLocks noGrp="1"/>
-          </p:cNvSpPr>
-          <p:nvPr>
-            <p:ph type="title"/>
-          </p:nvPr>
-        </p:nvSpPr>
-        <p:spPr>
-          <a:xfrm>
-            <a:off x="648929" y="629266"/>
-            <a:ext cx="4944152" cy="1622321"/>
-          </a:xfrm>
-        </p:spPr>
-        <p:txBody>
-          <a:bodyPr>
-            <a:normAutofit/>
-          </a:bodyPr>
-          <a:lstStyle/>
-          <a:p>
-            <a:r>
-              <a:rPr lang="en-GB" sz="3700"/>
-              <a:t>What is the App Google Play Services ID?</a:t>
-            </a:r>
-            <a:endParaRPr lang="en-US" sz="3700" dirty="0"/>
-          </a:p>
-        </p:txBody>
-      </p:sp>
-      <p:sp>
-        <p:nvSpPr>
-          <p:cNvPr id="3" name="Content Placeholder 2">
-            <a:extLst>
-              <a:ext uri="{FF2B5EF4-FFF2-40B4-BE49-F238E27FC236}">
-                <a16:creationId xmlns:a16="http://schemas.microsoft.com/office/drawing/2014/main" id="{DCB33D10-342B-4C24-A670-C8D5256EAC6A}"/>
-              </a:ext>
-            </a:extLst>
-          </p:cNvPr>
-          <p:cNvSpPr>
-            <a:spLocks noGrp="1"/>
-          </p:cNvSpPr>
-          <p:nvPr>
-            <p:ph idx="1"/>
-          </p:nvPr>
-        </p:nvSpPr>
-        <p:spPr>
-          <a:xfrm>
-            <a:off x="648930" y="2438400"/>
-            <a:ext cx="4944151" cy="3785419"/>
-          </a:xfrm>
-        </p:spPr>
-        <p:txBody>
-          <a:bodyPr>
-            <a:normAutofit lnSpcReduction="10000"/>
-          </a:bodyPr>
-          <a:lstStyle/>
-          <a:p>
-            <a:r>
-              <a:rPr lang="en-GB" sz="1900" dirty="0"/>
-              <a:t>Google Play Services helps </a:t>
-            </a:r>
-            <a:r>
-              <a:rPr lang="en-GB" sz="1900" b="0" i="0" dirty="0">
-                <a:effectLst/>
-                <a:latin typeface="ibm plex sans"/>
-              </a:rPr>
-              <a:t>integrating Google’s advanced functionalities with other applications.</a:t>
-            </a:r>
-          </a:p>
-          <a:p>
-            <a:pPr lvl="1"/>
-            <a:r>
-              <a:rPr lang="en-GB" sz="1900" dirty="0"/>
-              <a:t>It is one of the most important parts of Android</a:t>
-            </a:r>
-          </a:p>
-          <a:p>
-            <a:r>
-              <a:rPr lang="en-GB" sz="1900" dirty="0">
-                <a:latin typeface="ibm plex sans"/>
-              </a:rPr>
-              <a:t>Core functionalities</a:t>
-            </a:r>
-          </a:p>
-          <a:p>
-            <a:pPr lvl="1"/>
-            <a:r>
-              <a:rPr lang="en-GB" sz="1900" dirty="0"/>
-              <a:t>Authentication to your Google service</a:t>
-            </a:r>
-          </a:p>
-          <a:p>
-            <a:pPr lvl="1"/>
-            <a:r>
-              <a:rPr lang="en-GB" sz="1900" dirty="0"/>
-              <a:t>Synchronized contacts, </a:t>
-            </a:r>
-          </a:p>
-          <a:p>
-            <a:pPr lvl="1"/>
-            <a:r>
-              <a:rPr lang="en-GB" sz="1900" dirty="0"/>
-              <a:t>Access to all the latest user privacy settings, and </a:t>
-            </a:r>
-          </a:p>
-          <a:p>
-            <a:pPr lvl="1"/>
-            <a:r>
-              <a:rPr lang="en-GB" sz="1900" dirty="0"/>
-              <a:t>Higher quality, lower-powered location-based services, maps</a:t>
-            </a:r>
-          </a:p>
-          <a:p>
-            <a:pPr lvl="1"/>
-            <a:r>
-              <a:rPr lang="en-GB" sz="1900" dirty="0"/>
-              <a:t>Offline search</a:t>
-            </a:r>
-          </a:p>
-        </p:txBody>
-      </p:sp>
-      <p:sp>
-        <p:nvSpPr>
-          <p:cNvPr id="21" name="Rectangle 16">
-            <a:extLst>
-              <a:ext uri="{FF2B5EF4-FFF2-40B4-BE49-F238E27FC236}">
-                <a16:creationId xmlns:a16="http://schemas.microsoft.com/office/drawing/2014/main" id="{46F7435D-E3DB-47B1-BA61-B00ACC83A9DE}"/>
-              </a:ext>
-              <a:ext uri="{C183D7F6-B498-43B3-948B-1728B52AA6E4}">
-                <adec:decorative xmlns:adec="http://schemas.microsoft.com/office/drawing/2017/decorative" val="1"/>
-              </a:ext>
-            </a:extLst>
-          </p:cNvPr>
-          <p:cNvSpPr>
-            <a:spLocks noGrp="1" noRot="1" noChangeAspect="1" noMove="1" noResize="1" noEditPoints="1" noAdjustHandles="1" noChangeArrowheads="1" noChangeShapeType="1" noTextEdit="1"/>
-          </p:cNvSpPr>
-          <p:nvPr>
-            <p:extLst>
-              <p:ext uri="{386F3935-93C4-4BCD-93E2-E3B085C9AB24}">
-                <p16:designElem xmlns:p16="http://schemas.microsoft.com/office/powerpoint/2015/main" val="1"/>
-              </p:ext>
-            </p:extLst>
-          </p:nvPr>
-        </p:nvSpPr>
-        <p:spPr>
-          <a:xfrm>
-            <a:off x="6092950" y="0"/>
-            <a:ext cx="6099050" cy="6858000"/>
-          </a:xfrm>
-          <a:prstGeom prst="rect">
-            <a:avLst/>
-          </a:prstGeom>
-          <a:solidFill>
-            <a:srgbClr val="C8CACA"/>
-          </a:solidFill>
-          <a:ln>
-            <a:noFill/>
-          </a:ln>
-        </p:spPr>
-        <p:style>
-          <a:lnRef idx="2">
-            <a:schemeClr val="accent1">
-              <a:shade val="50000"/>
-            </a:schemeClr>
-          </a:lnRef>
-          <a:fillRef idx="1">
-            <a:schemeClr val="accent1"/>
-          </a:fillRef>
-          <a:effectRef idx="0">
-            <a:schemeClr val="accent1"/>
-          </a:effectRef>
-          <a:fontRef idx="minor">
-            <a:schemeClr val="lt1"/>
-          </a:fontRef>
-        </p:style>
-        <p:txBody>
-          <a:bodyPr rtlCol="0" anchor="ctr"/>
-          <a:lstStyle/>
-          <a:p>
-            <a:pPr algn="ctr"/>
-            <a:endParaRPr lang="en-US"/>
-          </a:p>
-        </p:txBody>
-      </p:sp>
-      <p:sp>
-        <p:nvSpPr>
-          <p:cNvPr id="22" name="Rounded Rectangle 9">
-            <a:extLst>
-              <a:ext uri="{FF2B5EF4-FFF2-40B4-BE49-F238E27FC236}">
-                <a16:creationId xmlns:a16="http://schemas.microsoft.com/office/drawing/2014/main" id="{F263A0B5-F8C4-4116-809F-78A768EA79A6}"/>
-              </a:ext>
-              <a:ext uri="{C183D7F6-B498-43B3-948B-1728B52AA6E4}">
-                <adec:decorative xmlns:adec="http://schemas.microsoft.com/office/drawing/2017/decorative" val="1"/>
-              </a:ext>
-            </a:extLst>
-          </p:cNvPr>
-          <p:cNvSpPr>
-            <a:spLocks noGrp="1" noRot="1" noChangeAspect="1" noMove="1" noResize="1" noEditPoints="1" noAdjustHandles="1" noChangeArrowheads="1" noChangeShapeType="1" noTextEdit="1"/>
-          </p:cNvSpPr>
-          <p:nvPr>
-            <p:extLst>
-              <p:ext uri="{386F3935-93C4-4BCD-93E2-E3B085C9AB24}">
-                <p16:designElem xmlns:p16="http://schemas.microsoft.com/office/powerpoint/2015/main" val="1"/>
-              </p:ext>
-            </p:extLst>
-          </p:nvPr>
-        </p:nvSpPr>
-        <p:spPr>
-          <a:xfrm>
-            <a:off x="6577582" y="557784"/>
-            <a:ext cx="5130204" cy="5739187"/>
-          </a:xfrm>
-          <a:prstGeom prst="roundRect">
-            <a:avLst>
-              <a:gd name="adj" fmla="val 0"/>
-            </a:avLst>
-          </a:prstGeom>
-          <a:solidFill>
-            <a:srgbClr val="FFFFFF"/>
-          </a:solidFill>
-          <a:ln w="9525">
-            <a:solidFill>
-              <a:srgbClr val="C8CACA"/>
-            </a:solidFill>
-          </a:ln>
-          <a:effectLst>
-            <a:outerShdw blurRad="57150" dist="19050" dir="5400000" algn="t" rotWithShape="0">
-              <a:prstClr val="black">
-                <a:alpha val="63000"/>
-              </a:prstClr>
-            </a:outerShdw>
-          </a:effectLst>
-        </p:spPr>
-        <p:style>
-          <a:lnRef idx="2">
-            <a:schemeClr val="accent1">
-              <a:shade val="50000"/>
-            </a:schemeClr>
-          </a:lnRef>
-          <a:fillRef idx="1">
-            <a:schemeClr val="accent1"/>
-          </a:fillRef>
-          <a:effectRef idx="0">
-            <a:schemeClr val="accent1"/>
-          </a:effectRef>
-          <a:fontRef idx="minor">
-            <a:schemeClr val="lt1"/>
-          </a:fontRef>
-        </p:style>
-        <p:txBody>
-          <a:bodyPr rtlCol="0" anchor="ctr"/>
-          <a:lstStyle/>
-          <a:p>
-            <a:pPr algn="ctr"/>
-            <a:endParaRPr lang="en-US"/>
-          </a:p>
-        </p:txBody>
-      </p:sp>
-      <p:pic>
-        <p:nvPicPr>
-          <p:cNvPr id="5" name="Picture 4" descr="Graphical user interface, application&#10;&#10;Description automatically generated">
-            <a:extLst>
-              <a:ext uri="{FF2B5EF4-FFF2-40B4-BE49-F238E27FC236}">
-                <a16:creationId xmlns:a16="http://schemas.microsoft.com/office/drawing/2014/main" id="{BCACFC6F-0EC3-45FC-AA4F-35BE7318AF98}"/>
-              </a:ext>
-            </a:extLst>
-          </p:cNvPr>
-          <p:cNvPicPr>
-            <a:picLocks noChangeAspect="1"/>
-          </p:cNvPicPr>
-          <p:nvPr/>
-        </p:nvPicPr>
-        <p:blipFill>
-          <a:blip r:embed="rId2"/>
-          <a:stretch>
-            <a:fillRect/>
-          </a:stretch>
-        </p:blipFill>
-        <p:spPr>
-          <a:xfrm>
-            <a:off x="6904709" y="1480520"/>
-            <a:ext cx="4475531" cy="3893712"/>
-          </a:xfrm>
-          <a:prstGeom prst="rect">
-            <a:avLst/>
-          </a:prstGeom>
-          <a:effectLst/>
-        </p:spPr>
-      </p:pic>
-      <p:sp>
-        <p:nvSpPr>
-          <p:cNvPr id="13" name="TextBox 12">
-            <a:extLst>
-              <a:ext uri="{FF2B5EF4-FFF2-40B4-BE49-F238E27FC236}">
-                <a16:creationId xmlns:a16="http://schemas.microsoft.com/office/drawing/2014/main" id="{CB58F741-BA50-40F0-838D-2FD5FF080B77}"/>
-              </a:ext>
-            </a:extLst>
-          </p:cNvPr>
-          <p:cNvSpPr txBox="1"/>
-          <p:nvPr/>
-        </p:nvSpPr>
-        <p:spPr>
-          <a:xfrm>
-            <a:off x="6387083" y="1132649"/>
-            <a:ext cx="5510781" cy="307777"/>
-          </a:xfrm>
-          <a:prstGeom prst="rect">
-            <a:avLst/>
-          </a:prstGeom>
-          <a:solidFill>
-            <a:schemeClr val="accent4">
-              <a:lumMod val="20000"/>
-              <a:lumOff val="80000"/>
-            </a:schemeClr>
-          </a:solidFill>
-        </p:spPr>
-        <p:txBody>
-          <a:bodyPr wrap="square">
-            <a:spAutoFit/>
-          </a:bodyPr>
-          <a:lstStyle/>
-          <a:p>
-            <a:r>
-              <a:rPr lang="en-US" sz="1400"/>
-              <a:t>https://play.google.com/store/apps/details?id=</a:t>
-            </a:r>
-            <a:r>
-              <a:rPr lang="en-US" sz="1400">
-                <a:solidFill>
-                  <a:srgbClr val="C00000"/>
-                </a:solidFill>
-              </a:rPr>
-              <a:t>com.google.android.gms</a:t>
-            </a:r>
-            <a:endParaRPr lang="en-US" sz="1400" dirty="0">
-              <a:solidFill>
-                <a:srgbClr val="C00000"/>
-              </a:solidFill>
-            </a:endParaRPr>
-          </a:p>
-        </p:txBody>
-      </p:sp>
-      <p:sp>
-        <p:nvSpPr>
-          <p:cNvPr id="7" name="TextBox 6">
-            <a:extLst>
-              <a:ext uri="{FF2B5EF4-FFF2-40B4-BE49-F238E27FC236}">
-                <a16:creationId xmlns:a16="http://schemas.microsoft.com/office/drawing/2014/main" id="{ECFEF11C-29AD-4336-9C16-F6BB60DC0A73}"/>
-              </a:ext>
-            </a:extLst>
-          </p:cNvPr>
-          <p:cNvSpPr txBox="1"/>
-          <p:nvPr/>
-        </p:nvSpPr>
-        <p:spPr>
-          <a:xfrm>
-            <a:off x="8358359" y="5425132"/>
-            <a:ext cx="2191434" cy="369332"/>
-          </a:xfrm>
-          <a:prstGeom prst="rect">
-            <a:avLst/>
-          </a:prstGeom>
-          <a:noFill/>
-        </p:spPr>
-        <p:txBody>
-          <a:bodyPr wrap="none" rtlCol="0">
-            <a:spAutoFit/>
-          </a:bodyPr>
-          <a:lstStyle/>
-          <a:p>
-            <a:r>
-              <a:rPr lang="en-US" dirty="0">
-                <a:solidFill>
-                  <a:srgbClr val="C00000"/>
-                </a:solidFill>
-              </a:rPr>
-              <a:t>don’t /can’t delete it!</a:t>
-            </a:r>
-          </a:p>
-        </p:txBody>
-      </p:sp>
-    </p:spTree>
-    <p:extLst>
-      <p:ext uri="{BB962C8B-B14F-4D97-AF65-F5344CB8AC3E}">
-        <p14:creationId xmlns:p14="http://schemas.microsoft.com/office/powerpoint/2010/main" val="3337387503"/>
-      </p:ext>
-    </p:extLst>
-  </p:cSld>
-  <p:clrMapOvr>
-    <a:masterClrMapping/>
-  </p:clrMapOvr>
-</p:sld>
-</file>
-
-<file path=ppt/slides/slide27.xml><?xml version="1.0" encoding="utf-8"?>
-<p:sld xmlns:a="http://schemas.openxmlformats.org/drawingml/2006/main" xmlns:r="http://schemas.openxmlformats.org/officeDocument/2006/relationships" xmlns:p="http://schemas.openxmlformats.org/presentationml/2006/main">
-  <p:cSld>
-    <p:spTree>
-      <p:nvGrpSpPr>
-        <p:cNvPr id="1" name=""/>
-        <p:cNvGrpSpPr/>
-        <p:nvPr/>
-      </p:nvGrpSpPr>
-      <p:grpSpPr>
-        <a:xfrm>
-          <a:off x="0" y="0"/>
-          <a:ext cx="0" cy="0"/>
-          <a:chOff x="0" y="0"/>
-          <a:chExt cx="0" cy="0"/>
-        </a:xfrm>
-      </p:grpSpPr>
-      <p:sp>
-        <p:nvSpPr>
-          <p:cNvPr id="5" name="TextBox 4">
-            <a:extLst>
-              <a:ext uri="{FF2B5EF4-FFF2-40B4-BE49-F238E27FC236}">
-                <a16:creationId xmlns:a16="http://schemas.microsoft.com/office/drawing/2014/main" id="{30F094FB-F93E-4D74-8CDE-BD9580E4F361}"/>
-              </a:ext>
-            </a:extLst>
-          </p:cNvPr>
-          <p:cNvSpPr txBox="1"/>
-          <p:nvPr/>
-        </p:nvSpPr>
-        <p:spPr>
-          <a:xfrm>
-            <a:off x="974271" y="649076"/>
-            <a:ext cx="10078357" cy="5632311"/>
-          </a:xfrm>
-          <a:prstGeom prst="rect">
-            <a:avLst/>
-          </a:prstGeom>
-          <a:noFill/>
-        </p:spPr>
-        <p:txBody>
-          <a:bodyPr wrap="square">
-            <a:spAutoFit/>
-          </a:bodyPr>
-          <a:lstStyle/>
-          <a:p>
-            <a:r>
-              <a:rPr lang="en-GB" dirty="0">
-                <a:solidFill>
-                  <a:srgbClr val="C00000"/>
-                </a:solidFill>
-              </a:rPr>
-              <a:t>Google Maps API</a:t>
-            </a:r>
-            <a:r>
-              <a:rPr lang="en-GB" dirty="0"/>
-              <a:t>: This API allows other applications to access Google Maps without leaving the app. If you have used an app to book a cab or navigate to a booked hotel, then you must have used this service.</a:t>
-            </a:r>
-          </a:p>
-          <a:p>
-            <a:r>
-              <a:rPr lang="en-GB" dirty="0">
-                <a:solidFill>
-                  <a:srgbClr val="C00000"/>
-                </a:solidFill>
-              </a:rPr>
-              <a:t>Location APIs</a:t>
-            </a:r>
-            <a:r>
-              <a:rPr lang="en-GB" dirty="0"/>
-              <a:t>: Location API can be used to perform automatic actions when a user enters or leaves a specific geographic boundary. Fused Location provider means to reduce power usage while using location services.</a:t>
-            </a:r>
-          </a:p>
-          <a:p>
-            <a:r>
-              <a:rPr lang="en-GB" dirty="0">
-                <a:solidFill>
-                  <a:srgbClr val="C00000"/>
-                </a:solidFill>
-              </a:rPr>
-              <a:t>Google Drive API</a:t>
-            </a:r>
-            <a:r>
-              <a:rPr lang="en-GB" dirty="0"/>
-              <a:t>: If you have Google Drive installed on your device, sharing and storing files from other apps is made easier with this API.</a:t>
-            </a:r>
-          </a:p>
-          <a:p>
-            <a:r>
-              <a:rPr lang="en-GB" dirty="0">
-                <a:solidFill>
-                  <a:srgbClr val="C00000"/>
-                </a:solidFill>
-              </a:rPr>
-              <a:t>Google Play Game Services: </a:t>
-            </a:r>
-            <a:r>
-              <a:rPr lang="en-GB" dirty="0"/>
-              <a:t>These services are used to create a more competitive and immersive experience in multiplayer gaming sessions through </a:t>
-            </a:r>
-            <a:r>
-              <a:rPr lang="en-GB" dirty="0" err="1"/>
-              <a:t>leaderboards</a:t>
-            </a:r>
-            <a:r>
-              <a:rPr lang="en-GB" dirty="0"/>
-              <a:t> and achievements. Moreover, Saved Games API ensures that you do not lose your progress in a game by syncing and saving your game data.</a:t>
-            </a:r>
-          </a:p>
-          <a:p>
-            <a:r>
-              <a:rPr lang="en-GB" dirty="0">
-                <a:solidFill>
-                  <a:srgbClr val="C00000"/>
-                </a:solidFill>
-              </a:rPr>
-              <a:t>Google+ platform</a:t>
-            </a:r>
-            <a:r>
-              <a:rPr lang="en-GB" dirty="0"/>
-              <a:t>: You must have come across apps that provide you with “Sign-in with Google+” login option. This service allows you to use a single username and password to access multiple accounts on multiple apps.</a:t>
-            </a:r>
-          </a:p>
-          <a:p>
-            <a:r>
-              <a:rPr lang="en-GB" dirty="0">
-                <a:solidFill>
-                  <a:srgbClr val="C00000"/>
-                </a:solidFill>
-              </a:rPr>
-              <a:t>Google Cast Android API</a:t>
-            </a:r>
-            <a:r>
-              <a:rPr lang="en-GB" dirty="0"/>
-              <a:t>: It allows Android applications to cast content on-screen to other devices via Google Cast.</a:t>
-            </a:r>
-          </a:p>
-          <a:p>
-            <a:r>
-              <a:rPr lang="en-GB" dirty="0">
-                <a:solidFill>
-                  <a:srgbClr val="C00000"/>
-                </a:solidFill>
-              </a:rPr>
-              <a:t>Google Mobile Ads: </a:t>
-            </a:r>
-            <a:r>
-              <a:rPr lang="en-GB" dirty="0"/>
-              <a:t>Google Mobile Ads is used to integrate advertisements into applications and display intelligent ads such as those based on location or browsing history. This is how thousands of app developers monetize their app.</a:t>
-            </a:r>
-          </a:p>
-          <a:p>
-            <a:pPr algn="l" fontAlgn="base"/>
-            <a:r>
-              <a:rPr lang="en-GB" dirty="0">
-                <a:solidFill>
-                  <a:srgbClr val="C00000"/>
-                </a:solidFill>
-              </a:rPr>
-              <a:t>Other service</a:t>
-            </a:r>
-            <a:r>
-              <a:rPr lang="en-GB" dirty="0"/>
-              <a:t>: </a:t>
-            </a:r>
-            <a:r>
-              <a:rPr lang="en-GB" b="0" i="0" dirty="0">
-                <a:solidFill>
-                  <a:srgbClr val="333333"/>
-                </a:solidFill>
-                <a:effectLst/>
-                <a:latin typeface="ibm plex sans"/>
-              </a:rPr>
-              <a:t>Google Wallet, Google Play Protect, Google Fit API, Google account authentication methods</a:t>
-            </a:r>
-          </a:p>
-          <a:p>
-            <a:endParaRPr lang="en-US" dirty="0"/>
-          </a:p>
-        </p:txBody>
-      </p:sp>
-    </p:spTree>
-    <p:extLst>
-      <p:ext uri="{BB962C8B-B14F-4D97-AF65-F5344CB8AC3E}">
-        <p14:creationId xmlns:p14="http://schemas.microsoft.com/office/powerpoint/2010/main" val="2446382234"/>
-      </p:ext>
-    </p:extLst>
-  </p:cSld>
-  <p:clrMapOvr>
-    <a:masterClrMapping/>
-  </p:clrMapOvr>
-</p:sld>
-</file>
-
-<file path=ppt/slides/slide28.xml><?xml version="1.0" encoding="utf-8"?>
-<p:sld xmlns:a="http://schemas.openxmlformats.org/drawingml/2006/main" xmlns:r="http://schemas.openxmlformats.org/officeDocument/2006/relationships" xmlns:p="http://schemas.openxmlformats.org/presentationml/2006/main">
-  <p:cSld>
-    <p:spTree>
-      <p:nvGrpSpPr>
-        <p:cNvPr id="1" name=""/>
-        <p:cNvGrpSpPr/>
-        <p:nvPr/>
-      </p:nvGrpSpPr>
-      <p:grpSpPr>
-        <a:xfrm>
-          <a:off x="0" y="0"/>
-          <a:ext cx="0" cy="0"/>
-          <a:chOff x="0" y="0"/>
-          <a:chExt cx="0" cy="0"/>
-        </a:xfrm>
-      </p:grpSpPr>
-      <p:sp>
-        <p:nvSpPr>
-          <p:cNvPr id="2" name="Title 1">
-            <a:extLst>
-              <a:ext uri="{FF2B5EF4-FFF2-40B4-BE49-F238E27FC236}">
-                <a16:creationId xmlns:a16="http://schemas.microsoft.com/office/drawing/2014/main" id="{FF2F27BE-4EA2-4524-8599-EDE4D466B612}"/>
-              </a:ext>
-            </a:extLst>
-          </p:cNvPr>
-          <p:cNvSpPr>
-            <a:spLocks noGrp="1"/>
-          </p:cNvSpPr>
-          <p:nvPr>
-            <p:ph type="title"/>
-          </p:nvPr>
-        </p:nvSpPr>
-        <p:spPr/>
-        <p:txBody>
-          <a:bodyPr/>
-          <a:lstStyle/>
-          <a:p>
-            <a:r>
-              <a:rPr lang="en-US" dirty="0"/>
-              <a:t>Find all Gmail addresses appeared in the phone?</a:t>
-            </a:r>
-          </a:p>
-        </p:txBody>
-      </p:sp>
-      <p:pic>
-        <p:nvPicPr>
-          <p:cNvPr id="4" name="Picture 3">
-            <a:extLst>
-              <a:ext uri="{FF2B5EF4-FFF2-40B4-BE49-F238E27FC236}">
-                <a16:creationId xmlns:a16="http://schemas.microsoft.com/office/drawing/2014/main" id="{5F0734B1-DB38-4EEA-B6BC-87F4C1F4718A}"/>
-              </a:ext>
-            </a:extLst>
-          </p:cNvPr>
-          <p:cNvPicPr>
-            <a:picLocks noChangeAspect="1"/>
-          </p:cNvPicPr>
-          <p:nvPr/>
-        </p:nvPicPr>
-        <p:blipFill>
-          <a:blip r:embed="rId3"/>
-          <a:stretch>
-            <a:fillRect/>
-          </a:stretch>
-        </p:blipFill>
-        <p:spPr>
-          <a:xfrm>
-            <a:off x="838200" y="2158846"/>
-            <a:ext cx="10341236" cy="3276884"/>
-          </a:xfrm>
-          <a:prstGeom prst="rect">
-            <a:avLst/>
-          </a:prstGeom>
-        </p:spPr>
-      </p:pic>
-      <p:cxnSp>
-        <p:nvCxnSpPr>
-          <p:cNvPr id="6" name="Straight Arrow Connector 5">
-            <a:extLst>
-              <a:ext uri="{FF2B5EF4-FFF2-40B4-BE49-F238E27FC236}">
-                <a16:creationId xmlns:a16="http://schemas.microsoft.com/office/drawing/2014/main" id="{F4E9F194-ED37-4A08-AAB1-E6B7ED7CA724}"/>
-              </a:ext>
-            </a:extLst>
-          </p:cNvPr>
-          <p:cNvCxnSpPr/>
-          <p:nvPr/>
-        </p:nvCxnSpPr>
-        <p:spPr>
-          <a:xfrm flipH="1">
-            <a:off x="4237463" y="2988527"/>
-            <a:ext cx="431181" cy="133814"/>
-          </a:xfrm>
-          <a:prstGeom prst="straightConnector1">
-            <a:avLst/>
-          </a:prstGeom>
-          <a:ln>
-            <a:tailEnd type="triangle"/>
-          </a:ln>
-        </p:spPr>
-        <p:style>
-          <a:lnRef idx="1">
-            <a:schemeClr val="accent2"/>
-          </a:lnRef>
-          <a:fillRef idx="0">
-            <a:schemeClr val="accent2"/>
-          </a:fillRef>
-          <a:effectRef idx="0">
-            <a:schemeClr val="accent2"/>
-          </a:effectRef>
-          <a:fontRef idx="minor">
-            <a:schemeClr val="tx1"/>
-          </a:fontRef>
-        </p:style>
-      </p:cxnSp>
-      <p:cxnSp>
-        <p:nvCxnSpPr>
-          <p:cNvPr id="8" name="Straight Arrow Connector 7">
-            <a:extLst>
-              <a:ext uri="{FF2B5EF4-FFF2-40B4-BE49-F238E27FC236}">
-                <a16:creationId xmlns:a16="http://schemas.microsoft.com/office/drawing/2014/main" id="{CBF35393-5183-4DA1-8998-93AC6BC48A9B}"/>
-              </a:ext>
-            </a:extLst>
-          </p:cNvPr>
-          <p:cNvCxnSpPr/>
-          <p:nvPr/>
-        </p:nvCxnSpPr>
-        <p:spPr>
-          <a:xfrm flipH="1">
-            <a:off x="4438185" y="3256156"/>
-            <a:ext cx="327103" cy="104078"/>
-          </a:xfrm>
-          <a:prstGeom prst="straightConnector1">
-            <a:avLst/>
-          </a:prstGeom>
-          <a:ln>
-            <a:tailEnd type="triangle"/>
-          </a:ln>
-        </p:spPr>
-        <p:style>
-          <a:lnRef idx="1">
-            <a:schemeClr val="accent2"/>
-          </a:lnRef>
-          <a:fillRef idx="0">
-            <a:schemeClr val="accent2"/>
-          </a:fillRef>
-          <a:effectRef idx="0">
-            <a:schemeClr val="accent2"/>
-          </a:effectRef>
-          <a:fontRef idx="minor">
-            <a:schemeClr val="tx1"/>
-          </a:fontRef>
-        </p:style>
-      </p:cxnSp>
-    </p:spTree>
-    <p:extLst>
-      <p:ext uri="{BB962C8B-B14F-4D97-AF65-F5344CB8AC3E}">
-        <p14:creationId xmlns:p14="http://schemas.microsoft.com/office/powerpoint/2010/main" val="3237227748"/>
-      </p:ext>
-    </p:extLst>
-  </p:cSld>
-  <p:clrMapOvr>
-    <a:masterClrMapping/>
-  </p:clrMapOvr>
-</p:sld>
-</file>
-
-<file path=ppt/slides/slide29.xml><?xml version="1.0" encoding="utf-8"?>
-<p:sld xmlns:a="http://schemas.openxmlformats.org/drawingml/2006/main" xmlns:r="http://schemas.openxmlformats.org/officeDocument/2006/relationships" xmlns:p="http://schemas.openxmlformats.org/presentationml/2006/main">
-  <p:cSld>
     <p:spTree>
       <p:nvGrpSpPr>
         <p:cNvPr id="1" name=""/>
@@ -13787,462 +13055,7 @@
 </p:sld>
 </file>
 
-<file path=ppt/slides/slide3.xml><?xml version="1.0" encoding="utf-8"?>
-<p:sld xmlns:a="http://schemas.openxmlformats.org/drawingml/2006/main" xmlns:r="http://schemas.openxmlformats.org/officeDocument/2006/relationships" xmlns:p="http://schemas.openxmlformats.org/presentationml/2006/main">
-  <p:cSld>
-    <p:spTree>
-      <p:nvGrpSpPr>
-        <p:cNvPr id="1" name=""/>
-        <p:cNvGrpSpPr/>
-        <p:nvPr/>
-      </p:nvGrpSpPr>
-      <p:grpSpPr>
-        <a:xfrm>
-          <a:off x="0" y="0"/>
-          <a:ext cx="0" cy="0"/>
-          <a:chOff x="0" y="0"/>
-          <a:chExt cx="0" cy="0"/>
-        </a:xfrm>
-      </p:grpSpPr>
-      <p:sp>
-        <p:nvSpPr>
-          <p:cNvPr id="4" name="Title 3">
-            <a:extLst>
-              <a:ext uri="{FF2B5EF4-FFF2-40B4-BE49-F238E27FC236}">
-                <a16:creationId xmlns:a16="http://schemas.microsoft.com/office/drawing/2014/main" id="{38772083-1F8A-4C69-8797-37893A5BBE99}"/>
-              </a:ext>
-            </a:extLst>
-          </p:cNvPr>
-          <p:cNvSpPr>
-            <a:spLocks noGrp="1"/>
-          </p:cNvSpPr>
-          <p:nvPr>
-            <p:ph type="title"/>
-          </p:nvPr>
-        </p:nvSpPr>
-        <p:spPr/>
-        <p:txBody>
-          <a:bodyPr/>
-          <a:lstStyle/>
-          <a:p>
-            <a:r>
-              <a:rPr lang="en-US" dirty="0"/>
-              <a:t>Locations</a:t>
-            </a:r>
-          </a:p>
-        </p:txBody>
-      </p:sp>
-      <p:graphicFrame>
-        <p:nvGraphicFramePr>
-          <p:cNvPr id="5" name="Table 5">
-            <a:extLst>
-              <a:ext uri="{FF2B5EF4-FFF2-40B4-BE49-F238E27FC236}">
-                <a16:creationId xmlns:a16="http://schemas.microsoft.com/office/drawing/2014/main" id="{2270B41F-1C59-4C7E-A402-D6E7C492DC78}"/>
-              </a:ext>
-            </a:extLst>
-          </p:cNvPr>
-          <p:cNvGraphicFramePr>
-            <a:graphicFrameLocks noGrp="1"/>
-          </p:cNvGraphicFramePr>
-          <p:nvPr>
-            <p:extLst>
-              <p:ext uri="{D42A27DB-BD31-4B8C-83A1-F6EECF244321}">
-                <p14:modId xmlns:p14="http://schemas.microsoft.com/office/powerpoint/2010/main" val="86133117"/>
-              </p:ext>
-            </p:extLst>
-          </p:nvPr>
-        </p:nvGraphicFramePr>
-        <p:xfrm>
-          <a:off x="838200" y="2139588"/>
-          <a:ext cx="9606776" cy="3327400"/>
-        </p:xfrm>
-        <a:graphic>
-          <a:graphicData uri="http://schemas.openxmlformats.org/drawingml/2006/table">
-            <a:tbl>
-              <a:tblPr firstRow="1" bandRow="1">
-                <a:tableStyleId>{5C22544A-7EE6-4342-B048-85BDC9FD1C3A}</a:tableStyleId>
-              </a:tblPr>
-              <a:tblGrid>
-                <a:gridCol w="3741420">
-                  <a:extLst>
-                    <a:ext uri="{9D8B030D-6E8A-4147-A177-3AD203B41FA5}">
-                      <a16:colId xmlns:a16="http://schemas.microsoft.com/office/drawing/2014/main" val="2701201367"/>
-                    </a:ext>
-                  </a:extLst>
-                </a:gridCol>
-                <a:gridCol w="5865356">
-                  <a:extLst>
-                    <a:ext uri="{9D8B030D-6E8A-4147-A177-3AD203B41FA5}">
-                      <a16:colId xmlns:a16="http://schemas.microsoft.com/office/drawing/2014/main" val="1661643983"/>
-                    </a:ext>
-                  </a:extLst>
-                </a:gridCol>
-              </a:tblGrid>
-              <a:tr h="370840">
-                <a:tc>
-                  <a:txBody>
-                    <a:bodyPr/>
-                    <a:lstStyle/>
-                    <a:p>
-                      <a:r>
-                        <a:rPr lang="en-US" dirty="0"/>
-                        <a:t>Description</a:t>
-                      </a:r>
-                    </a:p>
-                  </a:txBody>
-                  <a:tcPr/>
-                </a:tc>
-                <a:tc>
-                  <a:txBody>
-                    <a:bodyPr/>
-                    <a:lstStyle/>
-                    <a:p>
-                      <a:r>
-                        <a:rPr lang="en-US" dirty="0"/>
-                        <a:t>Path</a:t>
-                      </a:r>
-                    </a:p>
-                  </a:txBody>
-                  <a:tcPr/>
-                </a:tc>
-                <a:extLst>
-                  <a:ext uri="{0D108BD9-81ED-4DB2-BD59-A6C34878D82A}">
-                    <a16:rowId xmlns:a16="http://schemas.microsoft.com/office/drawing/2014/main" val="4278287503"/>
-                  </a:ext>
-                </a:extLst>
-              </a:tr>
-              <a:tr h="370840">
-                <a:tc>
-                  <a:txBody>
-                    <a:bodyPr/>
-                    <a:lstStyle/>
-                    <a:p>
-                      <a:r>
-                        <a:rPr lang="en-US" dirty="0"/>
-                        <a:t>Build properties</a:t>
-                      </a:r>
-                    </a:p>
-                  </a:txBody>
-                  <a:tcPr/>
-                </a:tc>
-                <a:tc>
-                  <a:txBody>
-                    <a:bodyPr/>
-                    <a:lstStyle/>
-                    <a:p>
-                      <a:r>
-                        <a:rPr lang="en-GB" dirty="0"/>
-                        <a:t>Pixel 3/product/</a:t>
-                      </a:r>
-                      <a:r>
-                        <a:rPr lang="en-GB" dirty="0" err="1"/>
-                        <a:t>build.prop</a:t>
-                      </a:r>
-                      <a:endParaRPr lang="en-US" dirty="0"/>
-                    </a:p>
-                  </a:txBody>
-                  <a:tcPr/>
-                </a:tc>
-                <a:extLst>
-                  <a:ext uri="{0D108BD9-81ED-4DB2-BD59-A6C34878D82A}">
-                    <a16:rowId xmlns:a16="http://schemas.microsoft.com/office/drawing/2014/main" val="2140727610"/>
-                  </a:ext>
-                </a:extLst>
-              </a:tr>
-              <a:tr h="370840">
-                <a:tc>
-                  <a:txBody>
-                    <a:bodyPr/>
-                    <a:lstStyle/>
-                    <a:p>
-                      <a:endParaRPr lang="en-US" dirty="0"/>
-                    </a:p>
-                  </a:txBody>
-                  <a:tcPr/>
-                </a:tc>
-                <a:tc>
-                  <a:txBody>
-                    <a:bodyPr/>
-                    <a:lstStyle/>
-                    <a:p>
-                      <a:r>
-                        <a:rPr lang="en-GB" dirty="0"/>
-                        <a:t>Pixel 3</a:t>
-                      </a:r>
-                      <a:r>
-                        <a:rPr lang="en-US" dirty="0"/>
-                        <a:t>/system/</a:t>
-                      </a:r>
-                      <a:r>
-                        <a:rPr lang="en-US" dirty="0" err="1"/>
-                        <a:t>build.prop</a:t>
-                      </a:r>
-                      <a:endParaRPr lang="en-US" dirty="0"/>
-                    </a:p>
-                  </a:txBody>
-                  <a:tcPr/>
-                </a:tc>
-                <a:extLst>
-                  <a:ext uri="{0D108BD9-81ED-4DB2-BD59-A6C34878D82A}">
-                    <a16:rowId xmlns:a16="http://schemas.microsoft.com/office/drawing/2014/main" val="607753671"/>
-                  </a:ext>
-                </a:extLst>
-              </a:tr>
-              <a:tr h="185420">
-                <a:tc>
-                  <a:txBody>
-                    <a:bodyPr/>
-                    <a:lstStyle/>
-                    <a:p>
-                      <a:r>
-                        <a:rPr lang="en-US" dirty="0"/>
-                        <a:t>Apps, app config/generated data</a:t>
-                      </a:r>
-                    </a:p>
-                  </a:txBody>
-                  <a:tcPr/>
-                </a:tc>
-                <a:tc>
-                  <a:txBody>
-                    <a:bodyPr/>
-                    <a:lstStyle/>
-                    <a:p>
-                      <a:r>
-                        <a:rPr lang="en-US" dirty="0"/>
-                        <a:t>Pixel 3/data/data</a:t>
-                      </a:r>
-                    </a:p>
-                  </a:txBody>
-                  <a:tcPr/>
-                </a:tc>
-                <a:extLst>
-                  <a:ext uri="{0D108BD9-81ED-4DB2-BD59-A6C34878D82A}">
-                    <a16:rowId xmlns:a16="http://schemas.microsoft.com/office/drawing/2014/main" val="3739047947"/>
-                  </a:ext>
-                </a:extLst>
-              </a:tr>
-              <a:tr h="185420">
-                <a:tc>
-                  <a:txBody>
-                    <a:bodyPr/>
-                    <a:lstStyle/>
-                    <a:p>
-                      <a:r>
-                        <a:rPr lang="en-US" dirty="0"/>
-                        <a:t>User-specific/Carrier config</a:t>
-                      </a:r>
-                    </a:p>
-                  </a:txBody>
-                  <a:tcPr/>
-                </a:tc>
-                <a:tc>
-                  <a:txBody>
-                    <a:bodyPr/>
-                    <a:lstStyle/>
-                    <a:p>
-                      <a:r>
-                        <a:rPr lang="en-US" dirty="0"/>
-                        <a:t>Pixel 3/data/</a:t>
-                      </a:r>
-                      <a:r>
-                        <a:rPr lang="en-US" dirty="0" err="1"/>
-                        <a:t>user_de</a:t>
-                      </a:r>
-                      <a:r>
-                        <a:rPr lang="en-US" dirty="0"/>
-                        <a:t>/0/</a:t>
-                      </a:r>
-                      <a:r>
-                        <a:rPr lang="en-US" dirty="0" err="1"/>
-                        <a:t>com.android.providers.telephony</a:t>
-                      </a:r>
-                      <a:endParaRPr lang="en-US" dirty="0"/>
-                    </a:p>
-                  </a:txBody>
-                  <a:tcPr/>
-                </a:tc>
-                <a:extLst>
-                  <a:ext uri="{0D108BD9-81ED-4DB2-BD59-A6C34878D82A}">
-                    <a16:rowId xmlns:a16="http://schemas.microsoft.com/office/drawing/2014/main" val="1988467817"/>
-                  </a:ext>
-                </a:extLst>
-              </a:tr>
-              <a:tr h="370840">
-                <a:tc>
-                  <a:txBody>
-                    <a:bodyPr/>
-                    <a:lstStyle/>
-                    <a:p>
-                      <a:r>
-                        <a:rPr lang="en-GB" dirty="0"/>
-                        <a:t>Device  and component serial number </a:t>
-                      </a:r>
-                      <a:endParaRPr lang="en-US" dirty="0"/>
-                    </a:p>
-                  </a:txBody>
-                  <a:tcPr/>
-                </a:tc>
-                <a:tc>
-                  <a:txBody>
-                    <a:bodyPr/>
-                    <a:lstStyle/>
-                    <a:p>
-                      <a:r>
-                        <a:rPr lang="en-US" dirty="0"/>
-                        <a:t>Pixel 3/</a:t>
-                      </a:r>
-                      <a:r>
-                        <a:rPr lang="en-US" dirty="0" err="1"/>
-                        <a:t>mnt</a:t>
-                      </a:r>
-                      <a:r>
-                        <a:rPr lang="en-US" dirty="0"/>
-                        <a:t>/vendor</a:t>
-                      </a:r>
-                    </a:p>
-                  </a:txBody>
-                  <a:tcPr/>
-                </a:tc>
-                <a:extLst>
-                  <a:ext uri="{0D108BD9-81ED-4DB2-BD59-A6C34878D82A}">
-                    <a16:rowId xmlns:a16="http://schemas.microsoft.com/office/drawing/2014/main" val="2700463618"/>
-                  </a:ext>
-                </a:extLst>
-              </a:tr>
-              <a:tr h="370840">
-                <a:tc>
-                  <a:txBody>
-                    <a:bodyPr/>
-                    <a:lstStyle/>
-                    <a:p>
-                      <a:r>
-                        <a:rPr lang="en-US" dirty="0"/>
-                        <a:t>User information</a:t>
-                      </a:r>
-                    </a:p>
-                  </a:txBody>
-                  <a:tcPr/>
-                </a:tc>
-                <a:tc>
-                  <a:txBody>
-                    <a:bodyPr/>
-                    <a:lstStyle/>
-                    <a:p>
-                      <a:r>
-                        <a:rPr lang="en-US" dirty="0"/>
-                        <a:t>Pixel 3/data/system/users</a:t>
-                      </a:r>
-                    </a:p>
-                  </a:txBody>
-                  <a:tcPr/>
-                </a:tc>
-                <a:extLst>
-                  <a:ext uri="{0D108BD9-81ED-4DB2-BD59-A6C34878D82A}">
-                    <a16:rowId xmlns:a16="http://schemas.microsoft.com/office/drawing/2014/main" val="2751451165"/>
-                  </a:ext>
-                </a:extLst>
-              </a:tr>
-              <a:tr h="370840">
-                <a:tc>
-                  <a:txBody>
-                    <a:bodyPr/>
-                    <a:lstStyle/>
-                    <a:p>
-                      <a:r>
-                        <a:rPr lang="en-US" dirty="0"/>
-                        <a:t>Bluetooth</a:t>
-                      </a:r>
-                    </a:p>
-                  </a:txBody>
-                  <a:tcPr/>
-                </a:tc>
-                <a:tc>
-                  <a:txBody>
-                    <a:bodyPr/>
-                    <a:lstStyle/>
-                    <a:p>
-                      <a:r>
-                        <a:rPr lang="en-US" dirty="0"/>
-                        <a:t>Pixel 3/data/system/users/0/settings_secure.xml</a:t>
-                      </a:r>
-                    </a:p>
-                  </a:txBody>
-                  <a:tcPr/>
-                </a:tc>
-                <a:extLst>
-                  <a:ext uri="{0D108BD9-81ED-4DB2-BD59-A6C34878D82A}">
-                    <a16:rowId xmlns:a16="http://schemas.microsoft.com/office/drawing/2014/main" val="1168453834"/>
-                  </a:ext>
-                </a:extLst>
-              </a:tr>
-              <a:tr h="370840">
-                <a:tc>
-                  <a:txBody>
-                    <a:bodyPr/>
-                    <a:lstStyle/>
-                    <a:p>
-                      <a:r>
-                        <a:rPr lang="en-US" dirty="0" err="1"/>
-                        <a:t>Wifi</a:t>
-                      </a:r>
-                      <a:endParaRPr lang="en-US" dirty="0"/>
-                    </a:p>
-                  </a:txBody>
-                  <a:tcPr/>
-                </a:tc>
-                <a:tc>
-                  <a:txBody>
-                    <a:bodyPr/>
-                    <a:lstStyle/>
-                    <a:p>
-                      <a:r>
-                        <a:rPr lang="en-US" dirty="0"/>
-                        <a:t>Pixel 3/data/</a:t>
-                      </a:r>
-                      <a:r>
-                        <a:rPr lang="en-US" dirty="0" err="1"/>
-                        <a:t>misc</a:t>
-                      </a:r>
-                      <a:r>
-                        <a:rPr lang="en-US" dirty="0"/>
-                        <a:t>/</a:t>
-                      </a:r>
-                      <a:r>
-                        <a:rPr lang="en-US" dirty="0" err="1"/>
-                        <a:t>wifi</a:t>
-                      </a:r>
-                      <a:r>
-                        <a:rPr lang="en-US" dirty="0"/>
-                        <a:t>/WifiConfigStore.xml</a:t>
-                      </a:r>
-                    </a:p>
-                  </a:txBody>
-                  <a:tcPr/>
-                </a:tc>
-                <a:extLst>
-                  <a:ext uri="{0D108BD9-81ED-4DB2-BD59-A6C34878D82A}">
-                    <a16:rowId xmlns:a16="http://schemas.microsoft.com/office/drawing/2014/main" val="3253478535"/>
-                  </a:ext>
-                </a:extLst>
-              </a:tr>
-            </a:tbl>
-          </a:graphicData>
-        </a:graphic>
-      </p:graphicFrame>
-    </p:spTree>
-    <p:extLst>
-      <p:ext uri="{BB962C8B-B14F-4D97-AF65-F5344CB8AC3E}">
-        <p14:creationId xmlns:p14="http://schemas.microsoft.com/office/powerpoint/2010/main" val="2092254946"/>
-      </p:ext>
-    </p:extLst>
-  </p:cSld>
-  <p:clrMapOvr>
-    <a:masterClrMapping/>
-  </p:clrMapOvr>
-</p:sld>
-</file>
-
-<file path=ppt/slides/slide30.xml><?xml version="1.0" encoding="utf-8"?>
+<file path=ppt/slides/slide27.xml><?xml version="1.0" encoding="utf-8"?>
 <p:sld xmlns:a="http://schemas.openxmlformats.org/drawingml/2006/main" xmlns:r="http://schemas.openxmlformats.org/officeDocument/2006/relationships" xmlns:p="http://schemas.openxmlformats.org/presentationml/2006/main">
   <p:cSld>
     <p:bg>
@@ -14429,7 +13242,7 @@
 </p:sld>
 </file>
 
-<file path=ppt/slides/slide31.xml><?xml version="1.0" encoding="utf-8"?>
+<file path=ppt/slides/slide28.xml><?xml version="1.0" encoding="utf-8"?>
 <p:sld xmlns:a="http://schemas.openxmlformats.org/drawingml/2006/main" xmlns:r="http://schemas.openxmlformats.org/officeDocument/2006/relationships" xmlns:p="http://schemas.openxmlformats.org/presentationml/2006/main">
   <p:cSld>
     <p:spTree>
@@ -14697,7 +13510,7 @@
 </p:sld>
 </file>
 
-<file path=ppt/slides/slide32.xml><?xml version="1.0" encoding="utf-8"?>
+<file path=ppt/slides/slide29.xml><?xml version="1.0" encoding="utf-8"?>
 <p:sld xmlns:a="http://schemas.openxmlformats.org/drawingml/2006/main" xmlns:r="http://schemas.openxmlformats.org/officeDocument/2006/relationships" xmlns:p="http://schemas.openxmlformats.org/presentationml/2006/main">
   <p:cSld>
     <p:bg>
@@ -14801,7 +13614,553 @@
 </p:sld>
 </file>
 
-<file path=ppt/slides/slide33.xml><?xml version="1.0" encoding="utf-8"?>
+<file path=ppt/slides/slide3.xml><?xml version="1.0" encoding="utf-8"?>
+<p:sld xmlns:a="http://schemas.openxmlformats.org/drawingml/2006/main" xmlns:r="http://schemas.openxmlformats.org/officeDocument/2006/relationships" xmlns:p="http://schemas.openxmlformats.org/presentationml/2006/main">
+  <p:cSld>
+    <p:spTree>
+      <p:nvGrpSpPr>
+        <p:cNvPr id="1" name=""/>
+        <p:cNvGrpSpPr/>
+        <p:nvPr/>
+      </p:nvGrpSpPr>
+      <p:grpSpPr>
+        <a:xfrm>
+          <a:off x="0" y="0"/>
+          <a:ext cx="0" cy="0"/>
+          <a:chOff x="0" y="0"/>
+          <a:chExt cx="0" cy="0"/>
+        </a:xfrm>
+      </p:grpSpPr>
+      <p:sp>
+        <p:nvSpPr>
+          <p:cNvPr id="4" name="Title 3">
+            <a:extLst>
+              <a:ext uri="{FF2B5EF4-FFF2-40B4-BE49-F238E27FC236}">
+                <a16:creationId xmlns:a16="http://schemas.microsoft.com/office/drawing/2014/main" id="{38772083-1F8A-4C69-8797-37893A5BBE99}"/>
+              </a:ext>
+            </a:extLst>
+          </p:cNvPr>
+          <p:cNvSpPr>
+            <a:spLocks noGrp="1"/>
+          </p:cNvSpPr>
+          <p:nvPr>
+            <p:ph type="title"/>
+          </p:nvPr>
+        </p:nvSpPr>
+        <p:spPr/>
+        <p:txBody>
+          <a:bodyPr/>
+          <a:lstStyle/>
+          <a:p>
+            <a:r>
+              <a:rPr lang="en-US" dirty="0"/>
+              <a:t>Device Information</a:t>
+            </a:r>
+          </a:p>
+        </p:txBody>
+      </p:sp>
+      <p:graphicFrame>
+        <p:nvGraphicFramePr>
+          <p:cNvPr id="5" name="Table 5">
+            <a:extLst>
+              <a:ext uri="{FF2B5EF4-FFF2-40B4-BE49-F238E27FC236}">
+                <a16:creationId xmlns:a16="http://schemas.microsoft.com/office/drawing/2014/main" id="{2270B41F-1C59-4C7E-A402-D6E7C492DC78}"/>
+              </a:ext>
+            </a:extLst>
+          </p:cNvPr>
+          <p:cNvGraphicFramePr>
+            <a:graphicFrameLocks noGrp="1"/>
+          </p:cNvGraphicFramePr>
+          <p:nvPr>
+            <p:extLst>
+              <p:ext uri="{D42A27DB-BD31-4B8C-83A1-F6EECF244321}">
+                <p14:modId xmlns:p14="http://schemas.microsoft.com/office/powerpoint/2010/main" val="355202003"/>
+              </p:ext>
+            </p:extLst>
+          </p:nvPr>
+        </p:nvGraphicFramePr>
+        <p:xfrm>
+          <a:off x="960665" y="1943645"/>
+          <a:ext cx="9606776" cy="3698240"/>
+        </p:xfrm>
+        <a:graphic>
+          <a:graphicData uri="http://schemas.openxmlformats.org/drawingml/2006/table">
+            <a:tbl>
+              <a:tblPr firstRow="1" bandRow="1">
+                <a:tableStyleId>{5C22544A-7EE6-4342-B048-85BDC9FD1C3A}</a:tableStyleId>
+              </a:tblPr>
+              <a:tblGrid>
+                <a:gridCol w="3741420">
+                  <a:extLst>
+                    <a:ext uri="{9D8B030D-6E8A-4147-A177-3AD203B41FA5}">
+                      <a16:colId xmlns:a16="http://schemas.microsoft.com/office/drawing/2014/main" val="2701201367"/>
+                    </a:ext>
+                  </a:extLst>
+                </a:gridCol>
+                <a:gridCol w="5865356">
+                  <a:extLst>
+                    <a:ext uri="{9D8B030D-6E8A-4147-A177-3AD203B41FA5}">
+                      <a16:colId xmlns:a16="http://schemas.microsoft.com/office/drawing/2014/main" val="1661643983"/>
+                    </a:ext>
+                  </a:extLst>
+                </a:gridCol>
+              </a:tblGrid>
+              <a:tr h="370840">
+                <a:tc>
+                  <a:txBody>
+                    <a:bodyPr/>
+                    <a:lstStyle/>
+                    <a:p>
+                      <a:r>
+                        <a:rPr lang="en-US" dirty="0"/>
+                        <a:t>Device Info</a:t>
+                      </a:r>
+                    </a:p>
+                  </a:txBody>
+                  <a:tcPr/>
+                </a:tc>
+                <a:tc>
+                  <a:txBody>
+                    <a:bodyPr/>
+                    <a:lstStyle/>
+                    <a:p>
+                      <a:r>
+                        <a:rPr lang="en-US" dirty="0"/>
+                        <a:t>Path</a:t>
+                      </a:r>
+                    </a:p>
+                  </a:txBody>
+                  <a:tcPr/>
+                </a:tc>
+                <a:extLst>
+                  <a:ext uri="{0D108BD9-81ED-4DB2-BD59-A6C34878D82A}">
+                    <a16:rowId xmlns:a16="http://schemas.microsoft.com/office/drawing/2014/main" val="4278287503"/>
+                  </a:ext>
+                </a:extLst>
+              </a:tr>
+              <a:tr h="370840">
+                <a:tc>
+                  <a:txBody>
+                    <a:bodyPr/>
+                    <a:lstStyle/>
+                    <a:p>
+                      <a:r>
+                        <a:rPr lang="en-US" dirty="0"/>
+                        <a:t>Build properties</a:t>
+                      </a:r>
+                    </a:p>
+                  </a:txBody>
+                  <a:tcPr/>
+                </a:tc>
+                <a:tc>
+                  <a:txBody>
+                    <a:bodyPr/>
+                    <a:lstStyle/>
+                    <a:p>
+                      <a:r>
+                        <a:rPr lang="en-GB" dirty="0">
+                          <a:latin typeface="Arial Narrow" panose="020B0606020202030204" pitchFamily="34" charset="0"/>
+                        </a:rPr>
+                        <a:t>Pixel 3/product/</a:t>
+                      </a:r>
+                      <a:r>
+                        <a:rPr lang="en-GB" dirty="0" err="1">
+                          <a:latin typeface="Arial Narrow" panose="020B0606020202030204" pitchFamily="34" charset="0"/>
+                        </a:rPr>
+                        <a:t>build.prop</a:t>
+                      </a:r>
+                      <a:endParaRPr lang="en-US" dirty="0">
+                        <a:latin typeface="Arial Narrow" panose="020B0606020202030204" pitchFamily="34" charset="0"/>
+                      </a:endParaRPr>
+                    </a:p>
+                  </a:txBody>
+                  <a:tcPr/>
+                </a:tc>
+                <a:extLst>
+                  <a:ext uri="{0D108BD9-81ED-4DB2-BD59-A6C34878D82A}">
+                    <a16:rowId xmlns:a16="http://schemas.microsoft.com/office/drawing/2014/main" val="2140727610"/>
+                  </a:ext>
+                </a:extLst>
+              </a:tr>
+              <a:tr h="370840">
+                <a:tc>
+                  <a:txBody>
+                    <a:bodyPr/>
+                    <a:lstStyle/>
+                    <a:p>
+                      <a:endParaRPr lang="en-US" dirty="0"/>
+                    </a:p>
+                  </a:txBody>
+                  <a:tcPr/>
+                </a:tc>
+                <a:tc>
+                  <a:txBody>
+                    <a:bodyPr/>
+                    <a:lstStyle/>
+                    <a:p>
+                      <a:r>
+                        <a:rPr lang="en-GB" dirty="0">
+                          <a:latin typeface="Arial Narrow" panose="020B0606020202030204" pitchFamily="34" charset="0"/>
+                        </a:rPr>
+                        <a:t>Pixel 3</a:t>
+                      </a:r>
+                      <a:r>
+                        <a:rPr lang="en-US" dirty="0">
+                          <a:latin typeface="Arial Narrow" panose="020B0606020202030204" pitchFamily="34" charset="0"/>
+                        </a:rPr>
+                        <a:t>/system/</a:t>
+                      </a:r>
+                      <a:r>
+                        <a:rPr lang="en-US" dirty="0" err="1">
+                          <a:latin typeface="Arial Narrow" panose="020B0606020202030204" pitchFamily="34" charset="0"/>
+                        </a:rPr>
+                        <a:t>build.prop</a:t>
+                      </a:r>
+                      <a:endParaRPr lang="en-US" dirty="0">
+                        <a:latin typeface="Arial Narrow" panose="020B0606020202030204" pitchFamily="34" charset="0"/>
+                      </a:endParaRPr>
+                    </a:p>
+                  </a:txBody>
+                  <a:tcPr/>
+                </a:tc>
+                <a:extLst>
+                  <a:ext uri="{0D108BD9-81ED-4DB2-BD59-A6C34878D82A}">
+                    <a16:rowId xmlns:a16="http://schemas.microsoft.com/office/drawing/2014/main" val="607753671"/>
+                  </a:ext>
+                </a:extLst>
+              </a:tr>
+              <a:tr h="185420">
+                <a:tc>
+                  <a:txBody>
+                    <a:bodyPr/>
+                    <a:lstStyle/>
+                    <a:p>
+                      <a:r>
+                        <a:rPr lang="en-US" dirty="0"/>
+                        <a:t>Apps, app config/generated data</a:t>
+                      </a:r>
+                    </a:p>
+                  </a:txBody>
+                  <a:tcPr/>
+                </a:tc>
+                <a:tc>
+                  <a:txBody>
+                    <a:bodyPr/>
+                    <a:lstStyle/>
+                    <a:p>
+                      <a:r>
+                        <a:rPr lang="en-US" dirty="0">
+                          <a:latin typeface="Arial Narrow" panose="020B0606020202030204" pitchFamily="34" charset="0"/>
+                        </a:rPr>
+                        <a:t>Pixel 3/data/data</a:t>
+                      </a:r>
+                    </a:p>
+                  </a:txBody>
+                  <a:tcPr/>
+                </a:tc>
+                <a:extLst>
+                  <a:ext uri="{0D108BD9-81ED-4DB2-BD59-A6C34878D82A}">
+                    <a16:rowId xmlns:a16="http://schemas.microsoft.com/office/drawing/2014/main" val="3739047947"/>
+                  </a:ext>
+                </a:extLst>
+              </a:tr>
+              <a:tr h="185420">
+                <a:tc>
+                  <a:txBody>
+                    <a:bodyPr/>
+                    <a:lstStyle/>
+                    <a:p>
+                      <a:r>
+                        <a:rPr lang="en-US" dirty="0"/>
+                        <a:t>User-specific/Carrier config</a:t>
+                      </a:r>
+                    </a:p>
+                  </a:txBody>
+                  <a:tcPr/>
+                </a:tc>
+                <a:tc>
+                  <a:txBody>
+                    <a:bodyPr/>
+                    <a:lstStyle/>
+                    <a:p>
+                      <a:r>
+                        <a:rPr lang="en-US" dirty="0">
+                          <a:latin typeface="Arial Narrow" panose="020B0606020202030204" pitchFamily="34" charset="0"/>
+                        </a:rPr>
+                        <a:t>Pixel 3/data/</a:t>
+                      </a:r>
+                      <a:r>
+                        <a:rPr lang="en-US" dirty="0" err="1">
+                          <a:latin typeface="Arial Narrow" panose="020B0606020202030204" pitchFamily="34" charset="0"/>
+                        </a:rPr>
+                        <a:t>user_de</a:t>
+                      </a:r>
+                      <a:r>
+                        <a:rPr lang="en-US" dirty="0">
+                          <a:latin typeface="Arial Narrow" panose="020B0606020202030204" pitchFamily="34" charset="0"/>
+                        </a:rPr>
+                        <a:t>/0/</a:t>
+                      </a:r>
+                      <a:r>
+                        <a:rPr lang="en-US" dirty="0" err="1">
+                          <a:latin typeface="Arial Narrow" panose="020B0606020202030204" pitchFamily="34" charset="0"/>
+                        </a:rPr>
+                        <a:t>com.android.providers.telephony</a:t>
+                      </a:r>
+                      <a:endParaRPr lang="en-US" dirty="0">
+                        <a:latin typeface="Arial Narrow" panose="020B0606020202030204" pitchFamily="34" charset="0"/>
+                      </a:endParaRPr>
+                    </a:p>
+                  </a:txBody>
+                  <a:tcPr/>
+                </a:tc>
+                <a:extLst>
+                  <a:ext uri="{0D108BD9-81ED-4DB2-BD59-A6C34878D82A}">
+                    <a16:rowId xmlns:a16="http://schemas.microsoft.com/office/drawing/2014/main" val="1988467817"/>
+                  </a:ext>
+                </a:extLst>
+              </a:tr>
+              <a:tr h="370840">
+                <a:tc>
+                  <a:txBody>
+                    <a:bodyPr/>
+                    <a:lstStyle/>
+                    <a:p>
+                      <a:r>
+                        <a:rPr lang="en-GB" dirty="0"/>
+                        <a:t>Device and component serial number </a:t>
+                      </a:r>
+                      <a:endParaRPr lang="en-US" dirty="0"/>
+                    </a:p>
+                  </a:txBody>
+                  <a:tcPr/>
+                </a:tc>
+                <a:tc>
+                  <a:txBody>
+                    <a:bodyPr/>
+                    <a:lstStyle/>
+                    <a:p>
+                      <a:r>
+                        <a:rPr lang="en-US" dirty="0">
+                          <a:latin typeface="Arial Narrow" panose="020B0606020202030204" pitchFamily="34" charset="0"/>
+                        </a:rPr>
+                        <a:t>Pixel 3/</a:t>
+                      </a:r>
+                      <a:r>
+                        <a:rPr lang="en-US" dirty="0" err="1">
+                          <a:latin typeface="Arial Narrow" panose="020B0606020202030204" pitchFamily="34" charset="0"/>
+                        </a:rPr>
+                        <a:t>mnt</a:t>
+                      </a:r>
+                      <a:r>
+                        <a:rPr lang="en-US" dirty="0">
+                          <a:latin typeface="Arial Narrow" panose="020B0606020202030204" pitchFamily="34" charset="0"/>
+                        </a:rPr>
+                        <a:t>/vendor</a:t>
+                      </a:r>
+                    </a:p>
+                  </a:txBody>
+                  <a:tcPr/>
+                </a:tc>
+                <a:extLst>
+                  <a:ext uri="{0D108BD9-81ED-4DB2-BD59-A6C34878D82A}">
+                    <a16:rowId xmlns:a16="http://schemas.microsoft.com/office/drawing/2014/main" val="2700463618"/>
+                  </a:ext>
+                </a:extLst>
+              </a:tr>
+              <a:tr h="370840">
+                <a:tc>
+                  <a:txBody>
+                    <a:bodyPr/>
+                    <a:lstStyle/>
+                    <a:p>
+                      <a:r>
+                        <a:rPr lang="en-US" dirty="0"/>
+                        <a:t>User information</a:t>
+                      </a:r>
+                    </a:p>
+                  </a:txBody>
+                  <a:tcPr/>
+                </a:tc>
+                <a:tc>
+                  <a:txBody>
+                    <a:bodyPr/>
+                    <a:lstStyle/>
+                    <a:p>
+                      <a:r>
+                        <a:rPr lang="en-US" dirty="0">
+                          <a:latin typeface="Arial Narrow" panose="020B0606020202030204" pitchFamily="34" charset="0"/>
+                        </a:rPr>
+                        <a:t>Pixel 3/data/system/users</a:t>
+                      </a:r>
+                    </a:p>
+                  </a:txBody>
+                  <a:tcPr/>
+                </a:tc>
+                <a:extLst>
+                  <a:ext uri="{0D108BD9-81ED-4DB2-BD59-A6C34878D82A}">
+                    <a16:rowId xmlns:a16="http://schemas.microsoft.com/office/drawing/2014/main" val="2751451165"/>
+                  </a:ext>
+                </a:extLst>
+              </a:tr>
+              <a:tr h="370840">
+                <a:tc>
+                  <a:txBody>
+                    <a:bodyPr/>
+                    <a:lstStyle/>
+                    <a:p>
+                      <a:r>
+                        <a:rPr lang="en-US" dirty="0"/>
+                        <a:t>Bluetooth</a:t>
+                      </a:r>
+                    </a:p>
+                  </a:txBody>
+                  <a:tcPr/>
+                </a:tc>
+                <a:tc>
+                  <a:txBody>
+                    <a:bodyPr/>
+                    <a:lstStyle/>
+                    <a:p>
+                      <a:r>
+                        <a:rPr lang="en-US" dirty="0">
+                          <a:latin typeface="Arial Narrow" panose="020B0606020202030204" pitchFamily="34" charset="0"/>
+                        </a:rPr>
+                        <a:t>Pixel 3/data/system/users/0/settings_secure.xml</a:t>
+                      </a:r>
+                    </a:p>
+                  </a:txBody>
+                  <a:tcPr/>
+                </a:tc>
+                <a:extLst>
+                  <a:ext uri="{0D108BD9-81ED-4DB2-BD59-A6C34878D82A}">
+                    <a16:rowId xmlns:a16="http://schemas.microsoft.com/office/drawing/2014/main" val="1168453834"/>
+                  </a:ext>
+                </a:extLst>
+              </a:tr>
+              <a:tr h="370840">
+                <a:tc>
+                  <a:txBody>
+                    <a:bodyPr/>
+                    <a:lstStyle/>
+                    <a:p>
+                      <a:r>
+                        <a:rPr lang="en-US" dirty="0" err="1"/>
+                        <a:t>Wifi</a:t>
+                      </a:r>
+                      <a:endParaRPr lang="en-US" dirty="0"/>
+                    </a:p>
+                  </a:txBody>
+                  <a:tcPr/>
+                </a:tc>
+                <a:tc>
+                  <a:txBody>
+                    <a:bodyPr/>
+                    <a:lstStyle/>
+                    <a:p>
+                      <a:r>
+                        <a:rPr lang="en-US" dirty="0">
+                          <a:latin typeface="Arial Narrow" panose="020B0606020202030204" pitchFamily="34" charset="0"/>
+                        </a:rPr>
+                        <a:t>Pixel 3/data/</a:t>
+                      </a:r>
+                      <a:r>
+                        <a:rPr lang="en-US" dirty="0" err="1">
+                          <a:latin typeface="Arial Narrow" panose="020B0606020202030204" pitchFamily="34" charset="0"/>
+                        </a:rPr>
+                        <a:t>misc</a:t>
+                      </a:r>
+                      <a:r>
+                        <a:rPr lang="en-US" dirty="0">
+                          <a:latin typeface="Arial Narrow" panose="020B0606020202030204" pitchFamily="34" charset="0"/>
+                        </a:rPr>
+                        <a:t>/</a:t>
+                      </a:r>
+                      <a:r>
+                        <a:rPr lang="en-US" dirty="0" err="1">
+                          <a:latin typeface="Arial Narrow" panose="020B0606020202030204" pitchFamily="34" charset="0"/>
+                        </a:rPr>
+                        <a:t>wifi</a:t>
+                      </a:r>
+                      <a:r>
+                        <a:rPr lang="en-US" dirty="0">
+                          <a:latin typeface="Arial Narrow" panose="020B0606020202030204" pitchFamily="34" charset="0"/>
+                        </a:rPr>
+                        <a:t>/WifiConfigStore.xml</a:t>
+                      </a:r>
+                    </a:p>
+                  </a:txBody>
+                  <a:tcPr/>
+                </a:tc>
+                <a:extLst>
+                  <a:ext uri="{0D108BD9-81ED-4DB2-BD59-A6C34878D82A}">
+                    <a16:rowId xmlns:a16="http://schemas.microsoft.com/office/drawing/2014/main" val="3253478535"/>
+                  </a:ext>
+                </a:extLst>
+              </a:tr>
+              <a:tr h="370840">
+                <a:tc>
+                  <a:txBody>
+                    <a:bodyPr/>
+                    <a:lstStyle/>
+                    <a:p>
+                      <a:r>
+                        <a:rPr lang="en-GB"/>
+                        <a:t>Other artifacts </a:t>
+                      </a:r>
+                      <a:endParaRPr lang="en-US" dirty="0"/>
+                    </a:p>
+                  </a:txBody>
+                  <a:tcPr/>
+                </a:tc>
+                <a:tc>
+                  <a:txBody>
+                    <a:bodyPr/>
+                    <a:lstStyle/>
+                    <a:p>
+                      <a:r>
+                        <a:rPr lang="en-US" dirty="0">
+                          <a:latin typeface="Arial Narrow" panose="020B0606020202030204" pitchFamily="34" charset="0"/>
+                        </a:rPr>
+                        <a:t>Pixel 3</a:t>
+                      </a:r>
+                      <a:r>
+                        <a:rPr lang="it-IT" dirty="0">
+                          <a:latin typeface="Arial Narrow" panose="020B0606020202030204" pitchFamily="34" charset="0"/>
+                        </a:rPr>
+                        <a:t>/data/data/com.google.android.gms/</a:t>
+                      </a:r>
+                      <a:endParaRPr lang="en-US" dirty="0">
+                        <a:latin typeface="Arial Narrow" panose="020B0606020202030204" pitchFamily="34" charset="0"/>
+                      </a:endParaRPr>
+                    </a:p>
+                  </a:txBody>
+                  <a:tcPr/>
+                </a:tc>
+                <a:extLst>
+                  <a:ext uri="{0D108BD9-81ED-4DB2-BD59-A6C34878D82A}">
+                    <a16:rowId xmlns:a16="http://schemas.microsoft.com/office/drawing/2014/main" val="2011575924"/>
+                  </a:ext>
+                </a:extLst>
+              </a:tr>
+            </a:tbl>
+          </a:graphicData>
+        </a:graphic>
+      </p:graphicFrame>
+    </p:spTree>
+    <p:extLst>
+      <p:ext uri="{BB962C8B-B14F-4D97-AF65-F5344CB8AC3E}">
+        <p14:creationId xmlns:p14="http://schemas.microsoft.com/office/powerpoint/2010/main" val="2092254946"/>
+      </p:ext>
+    </p:extLst>
+  </p:cSld>
+  <p:clrMapOvr>
+    <a:masterClrMapping/>
+  </p:clrMapOvr>
+</p:sld>
+</file>
+
+<file path=ppt/slides/slide30.xml><?xml version="1.0" encoding="utf-8"?>
 <p:sld xmlns:a="http://schemas.openxmlformats.org/drawingml/2006/main" xmlns:r="http://schemas.openxmlformats.org/officeDocument/2006/relationships" xmlns:p="http://schemas.openxmlformats.org/presentationml/2006/main">
   <p:cSld>
     <p:spTree>
@@ -15001,7 +14360,7 @@
 </p:sld>
 </file>
 
-<file path=ppt/slides/slide34.xml><?xml version="1.0" encoding="utf-8"?>
+<file path=ppt/slides/slide31.xml><?xml version="1.0" encoding="utf-8"?>
 <p:sld xmlns:a="http://schemas.openxmlformats.org/drawingml/2006/main" xmlns:r="http://schemas.openxmlformats.org/officeDocument/2006/relationships" xmlns:p="http://schemas.openxmlformats.org/presentationml/2006/main">
   <p:cSld>
     <p:spTree>
@@ -15213,7 +14572,7 @@
 </p:sld>
 </file>
 
-<file path=ppt/slides/slide35.xml><?xml version="1.0" encoding="utf-8"?>
+<file path=ppt/slides/slide32.xml><?xml version="1.0" encoding="utf-8"?>
 <p:sld xmlns:a="http://schemas.openxmlformats.org/drawingml/2006/main" xmlns:r="http://schemas.openxmlformats.org/officeDocument/2006/relationships" xmlns:p="http://schemas.openxmlformats.org/presentationml/2006/main">
   <p:cSld>
     <p:spTree>
@@ -15409,7 +14768,7 @@
 </p:sld>
 </file>
 
-<file path=ppt/slides/slide36.xml><?xml version="1.0" encoding="utf-8"?>
+<file path=ppt/slides/slide33.xml><?xml version="1.0" encoding="utf-8"?>
 <p:sld xmlns:a="http://schemas.openxmlformats.org/drawingml/2006/main" xmlns:r="http://schemas.openxmlformats.org/officeDocument/2006/relationships" xmlns:p="http://schemas.openxmlformats.org/presentationml/2006/main">
   <p:cSld>
     <p:spTree>
@@ -15747,7 +15106,7 @@
 </p:sld>
 </file>
 
-<file path=ppt/slides/slide37.xml><?xml version="1.0" encoding="utf-8"?>
+<file path=ppt/slides/slide34.xml><?xml version="1.0" encoding="utf-8"?>
 <p:sld xmlns:a="http://schemas.openxmlformats.org/drawingml/2006/main" xmlns:r="http://schemas.openxmlformats.org/officeDocument/2006/relationships" xmlns:p="http://schemas.openxmlformats.org/presentationml/2006/main">
   <p:cSld>
     <p:spTree>
@@ -15963,7 +15322,173 @@
 </p:sld>
 </file>
 
-<file path=ppt/slides/slide38.xml><?xml version="1.0" encoding="utf-8"?>
+<file path=ppt/slides/slide35.xml><?xml version="1.0" encoding="utf-8"?>
+<p:sld xmlns:a="http://schemas.openxmlformats.org/drawingml/2006/main" xmlns:r="http://schemas.openxmlformats.org/officeDocument/2006/relationships" xmlns:p="http://schemas.openxmlformats.org/presentationml/2006/main">
+  <p:cSld>
+    <p:spTree>
+      <p:nvGrpSpPr>
+        <p:cNvPr id="1" name=""/>
+        <p:cNvGrpSpPr/>
+        <p:nvPr/>
+      </p:nvGrpSpPr>
+      <p:grpSpPr>
+        <a:xfrm>
+          <a:off x="0" y="0"/>
+          <a:ext cx="0" cy="0"/>
+          <a:chOff x="0" y="0"/>
+          <a:chExt cx="0" cy="0"/>
+        </a:xfrm>
+      </p:grpSpPr>
+      <p:sp>
+        <p:nvSpPr>
+          <p:cNvPr id="2" name="Title 1">
+            <a:extLst>
+              <a:ext uri="{FF2B5EF4-FFF2-40B4-BE49-F238E27FC236}">
+                <a16:creationId xmlns:a16="http://schemas.microsoft.com/office/drawing/2014/main" id="{FF2F27BE-4EA2-4524-8599-EDE4D466B612}"/>
+              </a:ext>
+            </a:extLst>
+          </p:cNvPr>
+          <p:cNvSpPr>
+            <a:spLocks noGrp="1"/>
+          </p:cNvSpPr>
+          <p:nvPr>
+            <p:ph type="title"/>
+          </p:nvPr>
+        </p:nvSpPr>
+        <p:spPr/>
+        <p:txBody>
+          <a:bodyPr/>
+          <a:lstStyle/>
+          <a:p>
+            <a:r>
+              <a:rPr lang="en-US" dirty="0"/>
+              <a:t>Find all Gmail addresses appeared in the phone?</a:t>
+            </a:r>
+          </a:p>
+        </p:txBody>
+      </p:sp>
+      <p:pic>
+        <p:nvPicPr>
+          <p:cNvPr id="4" name="Picture 3">
+            <a:extLst>
+              <a:ext uri="{FF2B5EF4-FFF2-40B4-BE49-F238E27FC236}">
+                <a16:creationId xmlns:a16="http://schemas.microsoft.com/office/drawing/2014/main" id="{5F0734B1-DB38-4EEA-B6BC-87F4C1F4718A}"/>
+              </a:ext>
+            </a:extLst>
+          </p:cNvPr>
+          <p:cNvPicPr>
+            <a:picLocks noChangeAspect="1"/>
+          </p:cNvPicPr>
+          <p:nvPr/>
+        </p:nvPicPr>
+        <p:blipFill>
+          <a:blip r:embed="rId3"/>
+          <a:stretch>
+            <a:fillRect/>
+          </a:stretch>
+        </p:blipFill>
+        <p:spPr>
+          <a:xfrm>
+            <a:off x="838200" y="2158846"/>
+            <a:ext cx="10341236" cy="3276884"/>
+          </a:xfrm>
+          <a:prstGeom prst="rect">
+            <a:avLst/>
+          </a:prstGeom>
+        </p:spPr>
+      </p:pic>
+      <p:cxnSp>
+        <p:nvCxnSpPr>
+          <p:cNvPr id="6" name="Straight Arrow Connector 5">
+            <a:extLst>
+              <a:ext uri="{FF2B5EF4-FFF2-40B4-BE49-F238E27FC236}">
+                <a16:creationId xmlns:a16="http://schemas.microsoft.com/office/drawing/2014/main" id="{F4E9F194-ED37-4A08-AAB1-E6B7ED7CA724}"/>
+              </a:ext>
+            </a:extLst>
+          </p:cNvPr>
+          <p:cNvCxnSpPr/>
+          <p:nvPr/>
+        </p:nvCxnSpPr>
+        <p:spPr>
+          <a:xfrm flipH="1">
+            <a:off x="4237463" y="2988527"/>
+            <a:ext cx="431181" cy="133814"/>
+          </a:xfrm>
+          <a:prstGeom prst="straightConnector1">
+            <a:avLst/>
+          </a:prstGeom>
+          <a:ln>
+            <a:tailEnd type="triangle"/>
+          </a:ln>
+        </p:spPr>
+        <p:style>
+          <a:lnRef idx="1">
+            <a:schemeClr val="accent2"/>
+          </a:lnRef>
+          <a:fillRef idx="0">
+            <a:schemeClr val="accent2"/>
+          </a:fillRef>
+          <a:effectRef idx="0">
+            <a:schemeClr val="accent2"/>
+          </a:effectRef>
+          <a:fontRef idx="minor">
+            <a:schemeClr val="tx1"/>
+          </a:fontRef>
+        </p:style>
+      </p:cxnSp>
+      <p:cxnSp>
+        <p:nvCxnSpPr>
+          <p:cNvPr id="8" name="Straight Arrow Connector 7">
+            <a:extLst>
+              <a:ext uri="{FF2B5EF4-FFF2-40B4-BE49-F238E27FC236}">
+                <a16:creationId xmlns:a16="http://schemas.microsoft.com/office/drawing/2014/main" id="{CBF35393-5183-4DA1-8998-93AC6BC48A9B}"/>
+              </a:ext>
+            </a:extLst>
+          </p:cNvPr>
+          <p:cNvCxnSpPr/>
+          <p:nvPr/>
+        </p:nvCxnSpPr>
+        <p:spPr>
+          <a:xfrm flipH="1">
+            <a:off x="4438185" y="3256156"/>
+            <a:ext cx="327103" cy="104078"/>
+          </a:xfrm>
+          <a:prstGeom prst="straightConnector1">
+            <a:avLst/>
+          </a:prstGeom>
+          <a:ln>
+            <a:tailEnd type="triangle"/>
+          </a:ln>
+        </p:spPr>
+        <p:style>
+          <a:lnRef idx="1">
+            <a:schemeClr val="accent2"/>
+          </a:lnRef>
+          <a:fillRef idx="0">
+            <a:schemeClr val="accent2"/>
+          </a:fillRef>
+          <a:effectRef idx="0">
+            <a:schemeClr val="accent2"/>
+          </a:effectRef>
+          <a:fontRef idx="minor">
+            <a:schemeClr val="tx1"/>
+          </a:fontRef>
+        </p:style>
+      </p:cxnSp>
+    </p:spTree>
+    <p:extLst>
+      <p:ext uri="{BB962C8B-B14F-4D97-AF65-F5344CB8AC3E}">
+        <p14:creationId xmlns:p14="http://schemas.microsoft.com/office/powerpoint/2010/main" val="3237227748"/>
+      </p:ext>
+    </p:extLst>
+  </p:cSld>
+  <p:clrMapOvr>
+    <a:masterClrMapping/>
+  </p:clrMapOvr>
+</p:sld>
+</file>
+
+<file path=ppt/slides/slide36.xml><?xml version="1.0" encoding="utf-8"?>
 <p:sld xmlns:a="http://schemas.openxmlformats.org/drawingml/2006/main" xmlns:r="http://schemas.openxmlformats.org/officeDocument/2006/relationships" xmlns:p="http://schemas.openxmlformats.org/presentationml/2006/main">
   <p:cSld>
     <p:spTree>
@@ -16144,7 +15669,7 @@
 </p:sld>
 </file>
 
-<file path=ppt/slides/slide39.xml><?xml version="1.0" encoding="utf-8"?>
+<file path=ppt/slides/slide37.xml><?xml version="1.0" encoding="utf-8"?>
 <p:sld xmlns:a="http://schemas.openxmlformats.org/drawingml/2006/main" xmlns:r="http://schemas.openxmlformats.org/officeDocument/2006/relationships" xmlns:p="http://schemas.openxmlformats.org/presentationml/2006/main">
   <p:cSld>
     <p:spTree>
@@ -16415,93 +15940,7 @@
 </p:sld>
 </file>
 
-<file path=ppt/slides/slide4.xml><?xml version="1.0" encoding="utf-8"?>
-<p:sld xmlns:a="http://schemas.openxmlformats.org/drawingml/2006/main" xmlns:r="http://schemas.openxmlformats.org/officeDocument/2006/relationships" xmlns:p="http://schemas.openxmlformats.org/presentationml/2006/main">
-  <p:cSld>
-    <p:spTree>
-      <p:nvGrpSpPr>
-        <p:cNvPr id="1" name=""/>
-        <p:cNvGrpSpPr/>
-        <p:nvPr/>
-      </p:nvGrpSpPr>
-      <p:grpSpPr>
-        <a:xfrm>
-          <a:off x="0" y="0"/>
-          <a:ext cx="0" cy="0"/>
-          <a:chOff x="0" y="0"/>
-          <a:chExt cx="0" cy="0"/>
-        </a:xfrm>
-      </p:grpSpPr>
-      <p:sp>
-        <p:nvSpPr>
-          <p:cNvPr id="4" name="Title 3">
-            <a:extLst>
-              <a:ext uri="{FF2B5EF4-FFF2-40B4-BE49-F238E27FC236}">
-                <a16:creationId xmlns:a16="http://schemas.microsoft.com/office/drawing/2014/main" id="{49C2FCA1-650A-42EA-95A7-7A2FFD015D28}"/>
-              </a:ext>
-            </a:extLst>
-          </p:cNvPr>
-          <p:cNvSpPr>
-            <a:spLocks noGrp="1"/>
-          </p:cNvSpPr>
-          <p:nvPr>
-            <p:ph type="title"/>
-          </p:nvPr>
-        </p:nvSpPr>
-        <p:spPr/>
-        <p:txBody>
-          <a:bodyPr/>
-          <a:lstStyle/>
-          <a:p>
-            <a:r>
-              <a:rPr lang="en-GB" dirty="0"/>
-              <a:t>Device build and SIM card </a:t>
-            </a:r>
-          </a:p>
-        </p:txBody>
-      </p:sp>
-      <p:sp>
-        <p:nvSpPr>
-          <p:cNvPr id="5" name="Text Placeholder 4">
-            <a:extLst>
-              <a:ext uri="{FF2B5EF4-FFF2-40B4-BE49-F238E27FC236}">
-                <a16:creationId xmlns:a16="http://schemas.microsoft.com/office/drawing/2014/main" id="{4E9A3CBC-D866-46E5-AA37-8D47564F10CA}"/>
-              </a:ext>
-            </a:extLst>
-          </p:cNvPr>
-          <p:cNvSpPr>
-            <a:spLocks noGrp="1"/>
-          </p:cNvSpPr>
-          <p:nvPr>
-            <p:ph type="body" idx="1"/>
-          </p:nvPr>
-        </p:nvSpPr>
-        <p:spPr/>
-        <p:txBody>
-          <a:bodyPr/>
-          <a:lstStyle/>
-          <a:p>
-            <a:endParaRPr lang="en-GB" dirty="0"/>
-          </a:p>
-          <a:p>
-            <a:endParaRPr lang="en-US" dirty="0"/>
-          </a:p>
-        </p:txBody>
-      </p:sp>
-    </p:spTree>
-    <p:extLst>
-      <p:ext uri="{BB962C8B-B14F-4D97-AF65-F5344CB8AC3E}">
-        <p14:creationId xmlns:p14="http://schemas.microsoft.com/office/powerpoint/2010/main" val="2092816551"/>
-      </p:ext>
-    </p:extLst>
-  </p:cSld>
-  <p:clrMapOvr>
-    <a:masterClrMapping/>
-  </p:clrMapOvr>
-</p:sld>
-</file>
-
-<file path=ppt/slides/slide40.xml><?xml version="1.0" encoding="utf-8"?>
+<file path=ppt/slides/slide38.xml><?xml version="1.0" encoding="utf-8"?>
 <p:sld xmlns:a="http://schemas.openxmlformats.org/drawingml/2006/main" xmlns:r="http://schemas.openxmlformats.org/officeDocument/2006/relationships" xmlns:p="http://schemas.openxmlformats.org/presentationml/2006/main">
   <p:cSld>
     <p:spTree>
@@ -16627,7 +16066,7 @@
 </p:sld>
 </file>
 
-<file path=ppt/slides/slide41.xml><?xml version="1.0" encoding="utf-8"?>
+<file path=ppt/slides/slide39.xml><?xml version="1.0" encoding="utf-8"?>
 <p:sld xmlns:a="http://schemas.openxmlformats.org/drawingml/2006/main" xmlns:r="http://schemas.openxmlformats.org/officeDocument/2006/relationships" xmlns:p="http://schemas.openxmlformats.org/presentationml/2006/main">
   <p:cSld>
     <p:spTree>
@@ -16711,7 +16150,93 @@
 </p:sld>
 </file>
 
-<file path=ppt/slides/slide42.xml><?xml version="1.0" encoding="utf-8"?>
+<file path=ppt/slides/slide4.xml><?xml version="1.0" encoding="utf-8"?>
+<p:sld xmlns:a="http://schemas.openxmlformats.org/drawingml/2006/main" xmlns:r="http://schemas.openxmlformats.org/officeDocument/2006/relationships" xmlns:p="http://schemas.openxmlformats.org/presentationml/2006/main">
+  <p:cSld>
+    <p:spTree>
+      <p:nvGrpSpPr>
+        <p:cNvPr id="1" name=""/>
+        <p:cNvGrpSpPr/>
+        <p:nvPr/>
+      </p:nvGrpSpPr>
+      <p:grpSpPr>
+        <a:xfrm>
+          <a:off x="0" y="0"/>
+          <a:ext cx="0" cy="0"/>
+          <a:chOff x="0" y="0"/>
+          <a:chExt cx="0" cy="0"/>
+        </a:xfrm>
+      </p:grpSpPr>
+      <p:sp>
+        <p:nvSpPr>
+          <p:cNvPr id="4" name="Title 3">
+            <a:extLst>
+              <a:ext uri="{FF2B5EF4-FFF2-40B4-BE49-F238E27FC236}">
+                <a16:creationId xmlns:a16="http://schemas.microsoft.com/office/drawing/2014/main" id="{49C2FCA1-650A-42EA-95A7-7A2FFD015D28}"/>
+              </a:ext>
+            </a:extLst>
+          </p:cNvPr>
+          <p:cNvSpPr>
+            <a:spLocks noGrp="1"/>
+          </p:cNvSpPr>
+          <p:nvPr>
+            <p:ph type="title"/>
+          </p:nvPr>
+        </p:nvSpPr>
+        <p:spPr/>
+        <p:txBody>
+          <a:bodyPr/>
+          <a:lstStyle/>
+          <a:p>
+            <a:r>
+              <a:rPr lang="en-GB" dirty="0"/>
+              <a:t>Device build and SIM card </a:t>
+            </a:r>
+          </a:p>
+        </p:txBody>
+      </p:sp>
+      <p:sp>
+        <p:nvSpPr>
+          <p:cNvPr id="5" name="Text Placeholder 4">
+            <a:extLst>
+              <a:ext uri="{FF2B5EF4-FFF2-40B4-BE49-F238E27FC236}">
+                <a16:creationId xmlns:a16="http://schemas.microsoft.com/office/drawing/2014/main" id="{4E9A3CBC-D866-46E5-AA37-8D47564F10CA}"/>
+              </a:ext>
+            </a:extLst>
+          </p:cNvPr>
+          <p:cNvSpPr>
+            <a:spLocks noGrp="1"/>
+          </p:cNvSpPr>
+          <p:nvPr>
+            <p:ph type="body" idx="1"/>
+          </p:nvPr>
+        </p:nvSpPr>
+        <p:spPr/>
+        <p:txBody>
+          <a:bodyPr/>
+          <a:lstStyle/>
+          <a:p>
+            <a:endParaRPr lang="en-GB" dirty="0"/>
+          </a:p>
+          <a:p>
+            <a:endParaRPr lang="en-US" dirty="0"/>
+          </a:p>
+        </p:txBody>
+      </p:sp>
+    </p:spTree>
+    <p:extLst>
+      <p:ext uri="{BB962C8B-B14F-4D97-AF65-F5344CB8AC3E}">
+        <p14:creationId xmlns:p14="http://schemas.microsoft.com/office/powerpoint/2010/main" val="2092816551"/>
+      </p:ext>
+    </p:extLst>
+  </p:cSld>
+  <p:clrMapOvr>
+    <a:masterClrMapping/>
+  </p:clrMapOvr>
+</p:sld>
+</file>
+
+<file path=ppt/slides/slide40.xml><?xml version="1.0" encoding="utf-8"?>
 <p:sld xmlns:a="http://schemas.openxmlformats.org/drawingml/2006/main" xmlns:r="http://schemas.openxmlformats.org/officeDocument/2006/relationships" xmlns:p="http://schemas.openxmlformats.org/presentationml/2006/main">
   <p:cSld>
     <p:spTree>
@@ -16799,7 +16324,7 @@
 </p:sld>
 </file>
 
-<file path=ppt/slides/slide43.xml><?xml version="1.0" encoding="utf-8"?>
+<file path=ppt/slides/slide41.xml><?xml version="1.0" encoding="utf-8"?>
 <p:sld xmlns:a="http://schemas.openxmlformats.org/drawingml/2006/main" xmlns:r="http://schemas.openxmlformats.org/officeDocument/2006/relationships" xmlns:p="http://schemas.openxmlformats.org/presentationml/2006/main">
   <p:cSld>
     <p:spTree>
@@ -17034,7 +16559,7 @@
 </p:sld>
 </file>
 
-<file path=ppt/slides/slide44.xml><?xml version="1.0" encoding="utf-8"?>
+<file path=ppt/slides/slide42.xml><?xml version="1.0" encoding="utf-8"?>
 <p:sld xmlns:a="http://schemas.openxmlformats.org/drawingml/2006/main" xmlns:r="http://schemas.openxmlformats.org/officeDocument/2006/relationships" xmlns:p="http://schemas.openxmlformats.org/presentationml/2006/main">
   <p:cSld>
     <p:spTree>
@@ -17319,6 +16844,666 @@
     <p:extLst>
       <p:ext uri="{BB962C8B-B14F-4D97-AF65-F5344CB8AC3E}">
         <p14:creationId xmlns:p14="http://schemas.microsoft.com/office/powerpoint/2010/main" val="2142271013"/>
+      </p:ext>
+    </p:extLst>
+  </p:cSld>
+  <p:clrMapOvr>
+    <a:masterClrMapping/>
+  </p:clrMapOvr>
+</p:sld>
+</file>
+
+<file path=ppt/slides/slide43.xml><?xml version="1.0" encoding="utf-8"?>
+<p:sld xmlns:a="http://schemas.openxmlformats.org/drawingml/2006/main" xmlns:r="http://schemas.openxmlformats.org/officeDocument/2006/relationships" xmlns:p="http://schemas.openxmlformats.org/presentationml/2006/main">
+  <p:cSld>
+    <p:spTree>
+      <p:nvGrpSpPr>
+        <p:cNvPr id="1" name=""/>
+        <p:cNvGrpSpPr/>
+        <p:nvPr/>
+      </p:nvGrpSpPr>
+      <p:grpSpPr>
+        <a:xfrm>
+          <a:off x="0" y="0"/>
+          <a:ext cx="0" cy="0"/>
+          <a:chOff x="0" y="0"/>
+          <a:chExt cx="0" cy="0"/>
+        </a:xfrm>
+      </p:grpSpPr>
+      <p:sp>
+        <p:nvSpPr>
+          <p:cNvPr id="2" name="Title 1">
+            <a:extLst>
+              <a:ext uri="{FF2B5EF4-FFF2-40B4-BE49-F238E27FC236}">
+                <a16:creationId xmlns:a16="http://schemas.microsoft.com/office/drawing/2014/main" id="{67E54316-0396-7652-AFF2-5244C76244ED}"/>
+              </a:ext>
+            </a:extLst>
+          </p:cNvPr>
+          <p:cNvSpPr>
+            <a:spLocks noGrp="1"/>
+          </p:cNvSpPr>
+          <p:nvPr>
+            <p:ph type="title"/>
+          </p:nvPr>
+        </p:nvSpPr>
+        <p:spPr/>
+        <p:txBody>
+          <a:bodyPr/>
+          <a:lstStyle/>
+          <a:p>
+            <a:r>
+              <a:rPr lang="en-GB" dirty="0"/>
+              <a:t>Artifacts generated by API usage</a:t>
+            </a:r>
+            <a:endParaRPr lang="en-US" dirty="0"/>
+          </a:p>
+        </p:txBody>
+      </p:sp>
+      <p:sp>
+        <p:nvSpPr>
+          <p:cNvPr id="3" name="Text Placeholder 2">
+            <a:extLst>
+              <a:ext uri="{FF2B5EF4-FFF2-40B4-BE49-F238E27FC236}">
+                <a16:creationId xmlns:a16="http://schemas.microsoft.com/office/drawing/2014/main" id="{80C449BD-FD0E-441D-0C5D-6521FCB7BA6C}"/>
+              </a:ext>
+            </a:extLst>
+          </p:cNvPr>
+          <p:cNvSpPr>
+            <a:spLocks noGrp="1"/>
+          </p:cNvSpPr>
+          <p:nvPr>
+            <p:ph type="body" idx="1"/>
+          </p:nvPr>
+        </p:nvSpPr>
+        <p:spPr/>
+        <p:txBody>
+          <a:bodyPr/>
+          <a:lstStyle/>
+          <a:p>
+            <a:endParaRPr lang="en-US"/>
+          </a:p>
+        </p:txBody>
+      </p:sp>
+    </p:spTree>
+    <p:extLst>
+      <p:ext uri="{BB962C8B-B14F-4D97-AF65-F5344CB8AC3E}">
+        <p14:creationId xmlns:p14="http://schemas.microsoft.com/office/powerpoint/2010/main" val="4067287333"/>
+      </p:ext>
+    </p:extLst>
+  </p:cSld>
+  <p:clrMapOvr>
+    <a:masterClrMapping/>
+  </p:clrMapOvr>
+</p:sld>
+</file>
+
+<file path=ppt/slides/slide44.xml><?xml version="1.0" encoding="utf-8"?>
+<p:sld xmlns:a="http://schemas.openxmlformats.org/drawingml/2006/main" xmlns:r="http://schemas.openxmlformats.org/officeDocument/2006/relationships" xmlns:p="http://schemas.openxmlformats.org/presentationml/2006/main">
+  <p:cSld>
+    <p:bg>
+      <p:bgPr>
+        <a:solidFill>
+          <a:schemeClr val="bg1"/>
+        </a:solidFill>
+        <a:effectLst/>
+      </p:bgPr>
+    </p:bg>
+    <p:spTree>
+      <p:nvGrpSpPr>
+        <p:cNvPr id="1" name=""/>
+        <p:cNvGrpSpPr/>
+        <p:nvPr/>
+      </p:nvGrpSpPr>
+      <p:grpSpPr>
+        <a:xfrm>
+          <a:off x="0" y="0"/>
+          <a:ext cx="0" cy="0"/>
+          <a:chOff x="0" y="0"/>
+          <a:chExt cx="0" cy="0"/>
+        </a:xfrm>
+      </p:grpSpPr>
+      <p:sp>
+        <p:nvSpPr>
+          <p:cNvPr id="2" name="Title 1">
+            <a:extLst>
+              <a:ext uri="{FF2B5EF4-FFF2-40B4-BE49-F238E27FC236}">
+                <a16:creationId xmlns:a16="http://schemas.microsoft.com/office/drawing/2014/main" id="{86863385-441E-4CDB-A324-D740F6B05E36}"/>
+              </a:ext>
+            </a:extLst>
+          </p:cNvPr>
+          <p:cNvSpPr>
+            <a:spLocks noGrp="1"/>
+          </p:cNvSpPr>
+          <p:nvPr>
+            <p:ph type="title"/>
+          </p:nvPr>
+        </p:nvSpPr>
+        <p:spPr>
+          <a:xfrm>
+            <a:off x="648929" y="629267"/>
+            <a:ext cx="4944152" cy="1154563"/>
+          </a:xfrm>
+        </p:spPr>
+        <p:txBody>
+          <a:bodyPr>
+            <a:normAutofit/>
+          </a:bodyPr>
+          <a:lstStyle/>
+          <a:p>
+            <a:r>
+              <a:rPr lang="en-GB" sz="3700" dirty="0"/>
+              <a:t>Google Play services</a:t>
+            </a:r>
+            <a:endParaRPr lang="en-US" sz="3700" dirty="0">
+              <a:latin typeface="Arial Narrow" panose="020B0606020202030204" pitchFamily="34" charset="0"/>
+            </a:endParaRPr>
+          </a:p>
+        </p:txBody>
+      </p:sp>
+      <p:sp>
+        <p:nvSpPr>
+          <p:cNvPr id="3" name="Content Placeholder 2">
+            <a:extLst>
+              <a:ext uri="{FF2B5EF4-FFF2-40B4-BE49-F238E27FC236}">
+                <a16:creationId xmlns:a16="http://schemas.microsoft.com/office/drawing/2014/main" id="{DCB33D10-342B-4C24-A670-C8D5256EAC6A}"/>
+              </a:ext>
+            </a:extLst>
+          </p:cNvPr>
+          <p:cNvSpPr>
+            <a:spLocks noGrp="1"/>
+          </p:cNvSpPr>
+          <p:nvPr>
+            <p:ph idx="1"/>
+          </p:nvPr>
+        </p:nvSpPr>
+        <p:spPr>
+          <a:xfrm>
+            <a:off x="648929" y="1731364"/>
+            <a:ext cx="4944151" cy="4332157"/>
+          </a:xfrm>
+        </p:spPr>
+        <p:txBody>
+          <a:bodyPr>
+            <a:normAutofit/>
+          </a:bodyPr>
+          <a:lstStyle/>
+          <a:p>
+            <a:r>
+              <a:rPr lang="en-GB" sz="1900" dirty="0"/>
+              <a:t>What is Google Play services?</a:t>
+            </a:r>
+          </a:p>
+          <a:p>
+            <a:pPr lvl="1"/>
+            <a:r>
+              <a:rPr lang="en-US" sz="1500" dirty="0"/>
+              <a:t>Package name: </a:t>
+            </a:r>
+            <a:r>
+              <a:rPr lang="en-US" sz="1600" dirty="0" err="1">
+                <a:latin typeface="Arial Narrow" panose="020B0606020202030204" pitchFamily="34" charset="0"/>
+              </a:rPr>
+              <a:t>com.google.android.gms</a:t>
+            </a:r>
+            <a:endParaRPr lang="en-GB" sz="1500" dirty="0"/>
+          </a:p>
+          <a:p>
+            <a:pPr lvl="1"/>
+            <a:r>
+              <a:rPr lang="en-GB" sz="1500" dirty="0"/>
+              <a:t>A proprietary Google system component installed on most Google-certified Android devices </a:t>
+            </a:r>
+          </a:p>
+          <a:p>
+            <a:pPr lvl="1"/>
+            <a:r>
+              <a:rPr lang="en-GB" sz="1500" dirty="0"/>
+              <a:t>Provides common Google APIs and background services to Android apps </a:t>
+            </a:r>
+          </a:p>
+          <a:p>
+            <a:pPr lvl="1"/>
+            <a:r>
+              <a:rPr lang="en-GB" sz="1500" dirty="0"/>
+              <a:t>Not part of AOSP; Android can operate without Google Play services</a:t>
+            </a:r>
+          </a:p>
+          <a:p>
+            <a:r>
+              <a:rPr lang="en-GB" sz="1900" dirty="0"/>
+              <a:t>Major functions</a:t>
+            </a:r>
+          </a:p>
+          <a:p>
+            <a:pPr lvl="1"/>
+            <a:r>
+              <a:rPr lang="en-GB" sz="1500" dirty="0"/>
+              <a:t>Google account authentication APIs </a:t>
+            </a:r>
+          </a:p>
+          <a:p>
+            <a:pPr lvl="1"/>
+            <a:r>
+              <a:rPr lang="en-GB" sz="1500" dirty="0"/>
+              <a:t>Location services </a:t>
+            </a:r>
+          </a:p>
+          <a:p>
+            <a:pPr lvl="1"/>
+            <a:r>
+              <a:rPr lang="en-GB" sz="1500" dirty="0"/>
+              <a:t>Google Maps - related APIs </a:t>
+            </a:r>
+          </a:p>
+          <a:p>
+            <a:pPr lvl="1"/>
+            <a:r>
+              <a:rPr lang="en-GB" sz="1500" dirty="0"/>
+              <a:t>Firebase Cloud Messaging/push notifications </a:t>
+            </a:r>
+          </a:p>
+          <a:p>
+            <a:pPr lvl="1"/>
+            <a:r>
+              <a:rPr lang="en-GB" sz="1500" dirty="0"/>
+              <a:t>Security and compatibility services </a:t>
+            </a:r>
+          </a:p>
+          <a:p>
+            <a:pPr lvl="1"/>
+            <a:r>
+              <a:rPr lang="en-GB" sz="1500" dirty="0"/>
+              <a:t>Integration with other Google services</a:t>
+            </a:r>
+            <a:endParaRPr lang="en-GB" sz="1900" dirty="0"/>
+          </a:p>
+          <a:p>
+            <a:pPr marL="457200" lvl="1" indent="0">
+              <a:buNone/>
+            </a:pPr>
+            <a:endParaRPr lang="en-GB" sz="1900" dirty="0"/>
+          </a:p>
+        </p:txBody>
+      </p:sp>
+      <p:sp>
+        <p:nvSpPr>
+          <p:cNvPr id="21" name="Rectangle 16">
+            <a:extLst>
+              <a:ext uri="{FF2B5EF4-FFF2-40B4-BE49-F238E27FC236}">
+                <a16:creationId xmlns:a16="http://schemas.microsoft.com/office/drawing/2014/main" id="{46F7435D-E3DB-47B1-BA61-B00ACC83A9DE}"/>
+              </a:ext>
+              <a:ext uri="{C183D7F6-B498-43B3-948B-1728B52AA6E4}">
+                <adec:decorative xmlns:adec="http://schemas.microsoft.com/office/drawing/2017/decorative" val="1"/>
+              </a:ext>
+            </a:extLst>
+          </p:cNvPr>
+          <p:cNvSpPr>
+            <a:spLocks noGrp="1" noRot="1" noChangeAspect="1" noMove="1" noResize="1" noEditPoints="1" noAdjustHandles="1" noChangeArrowheads="1" noChangeShapeType="1" noTextEdit="1"/>
+          </p:cNvSpPr>
+          <p:nvPr>
+            <p:extLst>
+              <p:ext uri="{386F3935-93C4-4BCD-93E2-E3B085C9AB24}">
+                <p16:designElem xmlns:p16="http://schemas.microsoft.com/office/powerpoint/2015/main" val="1"/>
+              </p:ext>
+            </p:extLst>
+          </p:nvPr>
+        </p:nvSpPr>
+        <p:spPr>
+          <a:xfrm>
+            <a:off x="6092950" y="0"/>
+            <a:ext cx="6099050" cy="6858000"/>
+          </a:xfrm>
+          <a:prstGeom prst="rect">
+            <a:avLst/>
+          </a:prstGeom>
+          <a:solidFill>
+            <a:srgbClr val="C8CACA"/>
+          </a:solidFill>
+          <a:ln>
+            <a:noFill/>
+          </a:ln>
+        </p:spPr>
+        <p:style>
+          <a:lnRef idx="2">
+            <a:schemeClr val="accent1">
+              <a:shade val="50000"/>
+            </a:schemeClr>
+          </a:lnRef>
+          <a:fillRef idx="1">
+            <a:schemeClr val="accent1"/>
+          </a:fillRef>
+          <a:effectRef idx="0">
+            <a:schemeClr val="accent1"/>
+          </a:effectRef>
+          <a:fontRef idx="minor">
+            <a:schemeClr val="lt1"/>
+          </a:fontRef>
+        </p:style>
+        <p:txBody>
+          <a:bodyPr rtlCol="0" anchor="ctr"/>
+          <a:lstStyle/>
+          <a:p>
+            <a:pPr algn="ctr"/>
+            <a:endParaRPr lang="en-US"/>
+          </a:p>
+        </p:txBody>
+      </p:sp>
+      <p:sp>
+        <p:nvSpPr>
+          <p:cNvPr id="22" name="Rounded Rectangle 9">
+            <a:extLst>
+              <a:ext uri="{FF2B5EF4-FFF2-40B4-BE49-F238E27FC236}">
+                <a16:creationId xmlns:a16="http://schemas.microsoft.com/office/drawing/2014/main" id="{F263A0B5-F8C4-4116-809F-78A768EA79A6}"/>
+              </a:ext>
+              <a:ext uri="{C183D7F6-B498-43B3-948B-1728B52AA6E4}">
+                <adec:decorative xmlns:adec="http://schemas.microsoft.com/office/drawing/2017/decorative" val="1"/>
+              </a:ext>
+            </a:extLst>
+          </p:cNvPr>
+          <p:cNvSpPr>
+            <a:spLocks noGrp="1" noRot="1" noChangeAspect="1" noMove="1" noResize="1" noEditPoints="1" noAdjustHandles="1" noChangeArrowheads="1" noChangeShapeType="1" noTextEdit="1"/>
+          </p:cNvSpPr>
+          <p:nvPr>
+            <p:extLst>
+              <p:ext uri="{386F3935-93C4-4BCD-93E2-E3B085C9AB24}">
+                <p16:designElem xmlns:p16="http://schemas.microsoft.com/office/powerpoint/2015/main" val="1"/>
+              </p:ext>
+            </p:extLst>
+          </p:nvPr>
+        </p:nvSpPr>
+        <p:spPr>
+          <a:xfrm>
+            <a:off x="6577582" y="557784"/>
+            <a:ext cx="5130204" cy="5739187"/>
+          </a:xfrm>
+          <a:prstGeom prst="roundRect">
+            <a:avLst>
+              <a:gd name="adj" fmla="val 0"/>
+            </a:avLst>
+          </a:prstGeom>
+          <a:solidFill>
+            <a:srgbClr val="FFFFFF"/>
+          </a:solidFill>
+          <a:ln w="9525">
+            <a:solidFill>
+              <a:srgbClr val="C8CACA"/>
+            </a:solidFill>
+          </a:ln>
+          <a:effectLst>
+            <a:outerShdw blurRad="57150" dist="19050" dir="5400000" algn="t" rotWithShape="0">
+              <a:prstClr val="black">
+                <a:alpha val="63000"/>
+              </a:prstClr>
+            </a:outerShdw>
+          </a:effectLst>
+        </p:spPr>
+        <p:style>
+          <a:lnRef idx="2">
+            <a:schemeClr val="accent1">
+              <a:shade val="50000"/>
+            </a:schemeClr>
+          </a:lnRef>
+          <a:fillRef idx="1">
+            <a:schemeClr val="accent1"/>
+          </a:fillRef>
+          <a:effectRef idx="0">
+            <a:schemeClr val="accent1"/>
+          </a:effectRef>
+          <a:fontRef idx="minor">
+            <a:schemeClr val="lt1"/>
+          </a:fontRef>
+        </p:style>
+        <p:txBody>
+          <a:bodyPr rtlCol="0" anchor="ctr"/>
+          <a:lstStyle/>
+          <a:p>
+            <a:pPr algn="ctr"/>
+            <a:endParaRPr lang="en-US"/>
+          </a:p>
+        </p:txBody>
+      </p:sp>
+      <p:pic>
+        <p:nvPicPr>
+          <p:cNvPr id="5" name="Picture 4" descr="Graphical user interface, application&#10;&#10;Description automatically generated">
+            <a:extLst>
+              <a:ext uri="{FF2B5EF4-FFF2-40B4-BE49-F238E27FC236}">
+                <a16:creationId xmlns:a16="http://schemas.microsoft.com/office/drawing/2014/main" id="{BCACFC6F-0EC3-45FC-AA4F-35BE7318AF98}"/>
+              </a:ext>
+            </a:extLst>
+          </p:cNvPr>
+          <p:cNvPicPr>
+            <a:picLocks noChangeAspect="1"/>
+          </p:cNvPicPr>
+          <p:nvPr/>
+        </p:nvPicPr>
+        <p:blipFill>
+          <a:blip r:embed="rId2"/>
+          <a:stretch>
+            <a:fillRect/>
+          </a:stretch>
+        </p:blipFill>
+        <p:spPr>
+          <a:xfrm>
+            <a:off x="6904709" y="1480520"/>
+            <a:ext cx="4475531" cy="3893712"/>
+          </a:xfrm>
+          <a:prstGeom prst="rect">
+            <a:avLst/>
+          </a:prstGeom>
+          <a:effectLst/>
+        </p:spPr>
+      </p:pic>
+      <p:sp>
+        <p:nvSpPr>
+          <p:cNvPr id="13" name="TextBox 12">
+            <a:extLst>
+              <a:ext uri="{FF2B5EF4-FFF2-40B4-BE49-F238E27FC236}">
+                <a16:creationId xmlns:a16="http://schemas.microsoft.com/office/drawing/2014/main" id="{CB58F741-BA50-40F0-838D-2FD5FF080B77}"/>
+              </a:ext>
+            </a:extLst>
+          </p:cNvPr>
+          <p:cNvSpPr txBox="1"/>
+          <p:nvPr/>
+        </p:nvSpPr>
+        <p:spPr>
+          <a:xfrm>
+            <a:off x="6387083" y="1132649"/>
+            <a:ext cx="5510781" cy="307777"/>
+          </a:xfrm>
+          <a:prstGeom prst="rect">
+            <a:avLst/>
+          </a:prstGeom>
+          <a:solidFill>
+            <a:schemeClr val="accent4">
+              <a:lumMod val="20000"/>
+              <a:lumOff val="80000"/>
+            </a:schemeClr>
+          </a:solidFill>
+        </p:spPr>
+        <p:txBody>
+          <a:bodyPr wrap="square">
+            <a:spAutoFit/>
+          </a:bodyPr>
+          <a:lstStyle/>
+          <a:p>
+            <a:r>
+              <a:rPr lang="en-US" sz="1400" dirty="0"/>
+              <a:t>https://play.google.com/store/apps/details?id=</a:t>
+            </a:r>
+            <a:r>
+              <a:rPr lang="en-US" sz="1400" dirty="0">
+                <a:solidFill>
+                  <a:srgbClr val="C00000"/>
+                </a:solidFill>
+              </a:rPr>
+              <a:t>com.google.android.gms</a:t>
+            </a:r>
+          </a:p>
+        </p:txBody>
+      </p:sp>
+      <p:sp>
+        <p:nvSpPr>
+          <p:cNvPr id="7" name="TextBox 6">
+            <a:extLst>
+              <a:ext uri="{FF2B5EF4-FFF2-40B4-BE49-F238E27FC236}">
+                <a16:creationId xmlns:a16="http://schemas.microsoft.com/office/drawing/2014/main" id="{ECFEF11C-29AD-4336-9C16-F6BB60DC0A73}"/>
+              </a:ext>
+            </a:extLst>
+          </p:cNvPr>
+          <p:cNvSpPr txBox="1"/>
+          <p:nvPr/>
+        </p:nvSpPr>
+        <p:spPr>
+          <a:xfrm>
+            <a:off x="6828020" y="5469490"/>
+            <a:ext cx="4552219" cy="523220"/>
+          </a:xfrm>
+          <a:prstGeom prst="rect">
+            <a:avLst/>
+          </a:prstGeom>
+          <a:noFill/>
+        </p:spPr>
+        <p:txBody>
+          <a:bodyPr wrap="square" rtlCol="0">
+            <a:spAutoFit/>
+          </a:bodyPr>
+          <a:lstStyle/>
+          <a:p>
+            <a:r>
+              <a:rPr lang="en-US" sz="1400" dirty="0">
+                <a:solidFill>
+                  <a:srgbClr val="C00000"/>
+                </a:solidFill>
+              </a:rPr>
+              <a:t>Normally installed as a privileged/system app and cannot be uninstalled by a standard user on Google-certified devices.</a:t>
+            </a:r>
+          </a:p>
+        </p:txBody>
+      </p:sp>
+    </p:spTree>
+    <p:extLst>
+      <p:ext uri="{BB962C8B-B14F-4D97-AF65-F5344CB8AC3E}">
+        <p14:creationId xmlns:p14="http://schemas.microsoft.com/office/powerpoint/2010/main" val="3337387503"/>
+      </p:ext>
+    </p:extLst>
+  </p:cSld>
+  <p:clrMapOvr>
+    <a:masterClrMapping/>
+  </p:clrMapOvr>
+</p:sld>
+</file>
+
+<file path=ppt/slides/slide45.xml><?xml version="1.0" encoding="utf-8"?>
+<p:sld xmlns:a="http://schemas.openxmlformats.org/drawingml/2006/main" xmlns:r="http://schemas.openxmlformats.org/officeDocument/2006/relationships" xmlns:p="http://schemas.openxmlformats.org/presentationml/2006/main">
+  <p:cSld>
+    <p:spTree>
+      <p:nvGrpSpPr>
+        <p:cNvPr id="1" name=""/>
+        <p:cNvGrpSpPr/>
+        <p:nvPr/>
+      </p:nvGrpSpPr>
+      <p:grpSpPr>
+        <a:xfrm>
+          <a:off x="0" y="0"/>
+          <a:ext cx="0" cy="0"/>
+          <a:chOff x="0" y="0"/>
+          <a:chExt cx="0" cy="0"/>
+        </a:xfrm>
+      </p:grpSpPr>
+      <p:sp>
+        <p:nvSpPr>
+          <p:cNvPr id="2" name="Title 1">
+            <a:extLst>
+              <a:ext uri="{FF2B5EF4-FFF2-40B4-BE49-F238E27FC236}">
+                <a16:creationId xmlns:a16="http://schemas.microsoft.com/office/drawing/2014/main" id="{27730052-6B92-EC20-5B76-339D45876EA9}"/>
+              </a:ext>
+            </a:extLst>
+          </p:cNvPr>
+          <p:cNvSpPr>
+            <a:spLocks noGrp="1"/>
+          </p:cNvSpPr>
+          <p:nvPr>
+            <p:ph type="title"/>
+          </p:nvPr>
+        </p:nvSpPr>
+        <p:spPr/>
+        <p:txBody>
+          <a:bodyPr/>
+          <a:lstStyle/>
+          <a:p>
+            <a:r>
+              <a:rPr lang="en-GB" dirty="0"/>
+              <a:t>Why Google Play services matters in digital forensics</a:t>
+            </a:r>
+            <a:endParaRPr lang="en-US" dirty="0"/>
+          </a:p>
+        </p:txBody>
+      </p:sp>
+      <p:sp>
+        <p:nvSpPr>
+          <p:cNvPr id="3" name="Content Placeholder 2">
+            <a:extLst>
+              <a:ext uri="{FF2B5EF4-FFF2-40B4-BE49-F238E27FC236}">
+                <a16:creationId xmlns:a16="http://schemas.microsoft.com/office/drawing/2014/main" id="{A070D867-26D4-FE3E-A4F7-31719E878826}"/>
+              </a:ext>
+            </a:extLst>
+          </p:cNvPr>
+          <p:cNvSpPr>
+            <a:spLocks noGrp="1"/>
+          </p:cNvSpPr>
+          <p:nvPr>
+            <p:ph idx="1"/>
+          </p:nvPr>
+        </p:nvSpPr>
+        <p:spPr/>
+        <p:txBody>
+          <a:bodyPr>
+            <a:normAutofit/>
+          </a:bodyPr>
+          <a:lstStyle/>
+          <a:p>
+            <a:r>
+              <a:rPr lang="en-US" dirty="0" err="1">
+                <a:latin typeface="Arial Narrow" panose="020B0606020202030204" pitchFamily="34" charset="0"/>
+              </a:rPr>
+              <a:t>com.google.android.gms</a:t>
+            </a:r>
+            <a:r>
+              <a:rPr lang="en-US" dirty="0">
+                <a:latin typeface="Arial Narrow" panose="020B0606020202030204" pitchFamily="34" charset="0"/>
+              </a:rPr>
+              <a:t> </a:t>
+            </a:r>
+            <a:r>
+              <a:rPr lang="en-US" dirty="0"/>
+              <a:t>may contain account, device, location, notification, and Google-service artifacts</a:t>
+            </a:r>
+          </a:p>
+          <a:p>
+            <a:r>
+              <a:rPr lang="en-US" dirty="0"/>
+              <a:t>Multiple artifacts help reconstruct Android activity</a:t>
+            </a:r>
+          </a:p>
+          <a:p>
+            <a:r>
+              <a:rPr lang="en-US" dirty="0"/>
+              <a:t>Multiple artifacts</a:t>
+            </a:r>
+            <a:r>
+              <a:rPr lang="en-GB" dirty="0"/>
+              <a:t> can help investigators correlate activity across multiple apps and Google services</a:t>
+            </a:r>
+          </a:p>
+          <a:p>
+            <a:endParaRPr lang="en-US" dirty="0"/>
+          </a:p>
+        </p:txBody>
+      </p:sp>
+    </p:spTree>
+    <p:extLst>
+      <p:ext uri="{BB962C8B-B14F-4D97-AF65-F5344CB8AC3E}">
+        <p14:creationId xmlns:p14="http://schemas.microsoft.com/office/powerpoint/2010/main" val="1650449520"/>
       </p:ext>
     </p:extLst>
   </p:cSld>
@@ -17702,642 +17887,6 @@
           <a:chExt cx="0" cy="0"/>
         </a:xfrm>
       </p:grpSpPr>
-      <p:sp>
-        <p:nvSpPr>
-          <p:cNvPr id="11" name="Freeform: Shape 10">
-            <a:extLst>
-              <a:ext uri="{FF2B5EF4-FFF2-40B4-BE49-F238E27FC236}">
-                <a16:creationId xmlns:a16="http://schemas.microsoft.com/office/drawing/2014/main" id="{42285737-90EE-47DC-AC80-8AE156B11969}"/>
-              </a:ext>
-              <a:ext uri="{C183D7F6-B498-43B3-948B-1728B52AA6E4}">
-                <adec:decorative xmlns:adec="http://schemas.microsoft.com/office/drawing/2017/decorative" val="1"/>
-              </a:ext>
-            </a:extLst>
-          </p:cNvPr>
-          <p:cNvSpPr>
-            <a:spLocks noGrp="1" noRot="1" noChangeAspect="1" noMove="1" noResize="1" noEditPoints="1" noAdjustHandles="1" noChangeArrowheads="1" noChangeShapeType="1" noTextEdit="1"/>
-          </p:cNvSpPr>
-          <p:nvPr>
-            <p:extLst>
-              <p:ext uri="{386F3935-93C4-4BCD-93E2-E3B085C9AB24}">
-                <p16:designElem xmlns:p16="http://schemas.microsoft.com/office/powerpoint/2015/main" val="1"/>
-              </p:ext>
-            </p:extLst>
-          </p:nvPr>
-        </p:nvSpPr>
-        <p:spPr>
-          <a:xfrm flipV="1">
-            <a:off x="-1" y="-1"/>
-            <a:ext cx="4403709" cy="6858001"/>
-          </a:xfrm>
-          <a:custGeom>
-            <a:avLst/>
-            <a:gdLst>
-              <a:gd name="connsiteX0" fmla="*/ 3223890 w 4403709"/>
-              <a:gd name="connsiteY0" fmla="*/ 6858001 h 6858001"/>
-              <a:gd name="connsiteX1" fmla="*/ 4101908 w 4403709"/>
-              <a:gd name="connsiteY1" fmla="*/ 6858001 h 6858001"/>
-              <a:gd name="connsiteX2" fmla="*/ 3254950 w 4403709"/>
-              <a:gd name="connsiteY2" fmla="*/ 1599356 h 6858001"/>
-              <a:gd name="connsiteX3" fmla="*/ 3254950 w 4403709"/>
-              <a:gd name="connsiteY3" fmla="*/ 1594062 h 6858001"/>
-              <a:gd name="connsiteX4" fmla="*/ 4403709 w 4403709"/>
-              <a:gd name="connsiteY4" fmla="*/ 0 h 6858001"/>
-              <a:gd name="connsiteX5" fmla="*/ 3254950 w 4403709"/>
-              <a:gd name="connsiteY5" fmla="*/ 0 h 6858001"/>
-              <a:gd name="connsiteX6" fmla="*/ 2903520 w 4403709"/>
-              <a:gd name="connsiteY6" fmla="*/ 0 h 6858001"/>
-              <a:gd name="connsiteX7" fmla="*/ 0 w 4403709"/>
-              <a:gd name="connsiteY7" fmla="*/ 0 h 6858001"/>
-              <a:gd name="connsiteX8" fmla="*/ 0 w 4403709"/>
-              <a:gd name="connsiteY8" fmla="*/ 6858000 h 6858001"/>
-              <a:gd name="connsiteX9" fmla="*/ 3223890 w 4403709"/>
-              <a:gd name="connsiteY9" fmla="*/ 6858000 h 6858001"/>
-            </a:gdLst>
-            <a:ahLst/>
-            <a:cxnLst>
-              <a:cxn ang="0">
-                <a:pos x="connsiteX0" y="connsiteY0"/>
-              </a:cxn>
-              <a:cxn ang="0">
-                <a:pos x="connsiteX1" y="connsiteY1"/>
-              </a:cxn>
-              <a:cxn ang="0">
-                <a:pos x="connsiteX2" y="connsiteY2"/>
-              </a:cxn>
-              <a:cxn ang="0">
-                <a:pos x="connsiteX3" y="connsiteY3"/>
-              </a:cxn>
-              <a:cxn ang="0">
-                <a:pos x="connsiteX4" y="connsiteY4"/>
-              </a:cxn>
-              <a:cxn ang="0">
-                <a:pos x="connsiteX5" y="connsiteY5"/>
-              </a:cxn>
-              <a:cxn ang="0">
-                <a:pos x="connsiteX6" y="connsiteY6"/>
-              </a:cxn>
-              <a:cxn ang="0">
-                <a:pos x="connsiteX7" y="connsiteY7"/>
-              </a:cxn>
-              <a:cxn ang="0">
-                <a:pos x="connsiteX8" y="connsiteY8"/>
-              </a:cxn>
-              <a:cxn ang="0">
-                <a:pos x="connsiteX9" y="connsiteY9"/>
-              </a:cxn>
-            </a:cxnLst>
-            <a:rect l="l" t="t" r="r" b="b"/>
-            <a:pathLst>
-              <a:path w="4403709" h="6858001">
-                <a:moveTo>
-                  <a:pt x="3223890" y="6858001"/>
-                </a:moveTo>
-                <a:lnTo>
-                  <a:pt x="4101908" y="6858001"/>
-                </a:lnTo>
-                <a:lnTo>
-                  <a:pt x="3254950" y="1599356"/>
-                </a:lnTo>
-                <a:lnTo>
-                  <a:pt x="3254950" y="1594062"/>
-                </a:lnTo>
-                <a:lnTo>
-                  <a:pt x="4403709" y="0"/>
-                </a:lnTo>
-                <a:lnTo>
-                  <a:pt x="3254950" y="0"/>
-                </a:lnTo>
-                <a:lnTo>
-                  <a:pt x="2903520" y="0"/>
-                </a:lnTo>
-                <a:lnTo>
-                  <a:pt x="0" y="0"/>
-                </a:lnTo>
-                <a:lnTo>
-                  <a:pt x="0" y="6858000"/>
-                </a:lnTo>
-                <a:lnTo>
-                  <a:pt x="3223890" y="6858000"/>
-                </a:lnTo>
-                <a:close/>
-              </a:path>
-            </a:pathLst>
-          </a:custGeom>
-          <a:ln>
-            <a:noFill/>
-          </a:ln>
-        </p:spPr>
-        <p:style>
-          <a:lnRef idx="2">
-            <a:schemeClr val="accent1">
-              <a:shade val="50000"/>
-            </a:schemeClr>
-          </a:lnRef>
-          <a:fillRef idx="1002">
-            <a:schemeClr val="dk1"/>
-          </a:fillRef>
-          <a:effectRef idx="0">
-            <a:schemeClr val="accent1"/>
-          </a:effectRef>
-          <a:fontRef idx="minor">
-            <a:schemeClr val="lt1"/>
-          </a:fontRef>
-        </p:style>
-        <p:txBody>
-          <a:bodyPr rtlCol="0" anchor="ctr"/>
-          <a:lstStyle/>
-          <a:p>
-            <a:pPr marL="0" marR="0" lvl="0" indent="0" algn="ctr" defTabSz="457200" rtl="0" eaLnBrk="1" fontAlgn="auto" latinLnBrk="0" hangingPunct="1">
-              <a:lnSpc>
-                <a:spcPct val="100000"/>
-              </a:lnSpc>
-              <a:spcBef>
-                <a:spcPts val="0"/>
-              </a:spcBef>
-              <a:spcAft>
-                <a:spcPts val="0"/>
-              </a:spcAft>
-              <a:buClrTx/>
-              <a:buSzTx/>
-              <a:buFontTx/>
-              <a:buNone/>
-              <a:tabLst/>
-              <a:defRPr/>
-            </a:pPr>
-            <a:endParaRPr kumimoji="0" lang="en-US" sz="1800" b="0" i="0" u="none" strike="noStrike" kern="1200" cap="none" spc="0" normalizeH="0" baseline="0" noProof="0">
-              <a:ln>
-                <a:noFill/>
-              </a:ln>
-              <a:solidFill>
-                <a:prstClr val="black"/>
-              </a:solidFill>
-              <a:effectLst/>
-              <a:uLnTx/>
-              <a:uFillTx/>
-              <a:latin typeface="Calibri" panose="020F0502020204030204"/>
-              <a:ea typeface="+mn-ea"/>
-              <a:cs typeface="+mn-cs"/>
-            </a:endParaRPr>
-          </a:p>
-        </p:txBody>
-      </p:sp>
-      <p:grpSp>
-        <p:nvGrpSpPr>
-          <p:cNvPr id="13" name="Group 12">
-            <a:extLst>
-              <a:ext uri="{FF2B5EF4-FFF2-40B4-BE49-F238E27FC236}">
-                <a16:creationId xmlns:a16="http://schemas.microsoft.com/office/drawing/2014/main" id="{B57BDC17-F1B3-455F-BBF1-680AA1F25C06}"/>
-              </a:ext>
-              <a:ext uri="{C183D7F6-B498-43B3-948B-1728B52AA6E4}">
-                <adec:decorative xmlns:adec="http://schemas.microsoft.com/office/drawing/2017/decorative" val="1"/>
-              </a:ext>
-            </a:extLst>
-          </p:cNvPr>
-          <p:cNvGrpSpPr>
-            <a:grpSpLocks noGrp="1" noUngrp="1" noRot="1" noChangeAspect="1" noMove="1" noResize="1"/>
-          </p:cNvGrpSpPr>
-          <p:nvPr>
-            <p:extLst>
-              <p:ext uri="{386F3935-93C4-4BCD-93E2-E3B085C9AB24}">
-                <p16:designElem xmlns:p16="http://schemas.microsoft.com/office/powerpoint/2015/main" val="1"/>
-              </p:ext>
-            </p:extLst>
-          </p:nvPr>
-        </p:nvGrpSpPr>
-        <p:grpSpPr>
-          <a:xfrm>
-            <a:off x="3315292" y="0"/>
-            <a:ext cx="2436813" cy="6858001"/>
-            <a:chOff x="1320800" y="0"/>
-            <a:chExt cx="2436813" cy="6858001"/>
-          </a:xfrm>
-        </p:grpSpPr>
-        <p:sp>
-          <p:nvSpPr>
-            <p:cNvPr id="14" name="Freeform 6">
-              <a:extLst>
-                <a:ext uri="{FF2B5EF4-FFF2-40B4-BE49-F238E27FC236}">
-                  <a16:creationId xmlns:a16="http://schemas.microsoft.com/office/drawing/2014/main" id="{64E2FA9A-FEF7-4501-B0EB-5E45EDD2177A}"/>
-                </a:ext>
-                <a:ext uri="{C183D7F6-B498-43B3-948B-1728B52AA6E4}">
-                  <adec:decorative xmlns:adec="http://schemas.microsoft.com/office/drawing/2017/decorative" val="1"/>
-                </a:ext>
-              </a:extLst>
-            </p:cNvPr>
-            <p:cNvSpPr/>
-            <p:nvPr>
-              <p:extLst>
-                <p:ext uri="{386F3935-93C4-4BCD-93E2-E3B085C9AB24}">
-                  <p16:designElem xmlns:p16="http://schemas.microsoft.com/office/powerpoint/2015/main" val="1"/>
-                </p:ext>
-              </p:extLst>
-            </p:nvPr>
-          </p:nvSpPr>
-          <p:spPr bwMode="auto">
-            <a:xfrm>
-              <a:off x="1627188" y="0"/>
-              <a:ext cx="1122363" cy="5329238"/>
-            </a:xfrm>
-            <a:custGeom>
-              <a:avLst/>
-              <a:gdLst/>
-              <a:ahLst/>
-              <a:cxnLst/>
-              <a:rect l="0" t="0" r="r" b="b"/>
-              <a:pathLst>
-                <a:path w="707" h="3357">
-                  <a:moveTo>
-                    <a:pt x="0" y="3330"/>
-                  </a:moveTo>
-                  <a:lnTo>
-                    <a:pt x="156" y="3357"/>
-                  </a:lnTo>
-                  <a:lnTo>
-                    <a:pt x="707" y="0"/>
-                  </a:lnTo>
-                  <a:lnTo>
-                    <a:pt x="547" y="0"/>
-                  </a:lnTo>
-                  <a:lnTo>
-                    <a:pt x="0" y="3330"/>
-                  </a:lnTo>
-                  <a:close/>
-                </a:path>
-              </a:pathLst>
-            </a:custGeom>
-            <a:solidFill>
-              <a:schemeClr val="accent1"/>
-            </a:solidFill>
-            <a:ln>
-              <a:noFill/>
-            </a:ln>
-          </p:spPr>
-          <p:txBody>
-            <a:bodyPr/>
-            <a:lstStyle/>
-            <a:p>
-              <a:endParaRPr lang="en-US"/>
-            </a:p>
-          </p:txBody>
-        </p:sp>
-        <p:sp>
-          <p:nvSpPr>
-            <p:cNvPr id="15" name="Freeform 7">
-              <a:extLst>
-                <a:ext uri="{FF2B5EF4-FFF2-40B4-BE49-F238E27FC236}">
-                  <a16:creationId xmlns:a16="http://schemas.microsoft.com/office/drawing/2014/main" id="{BC38192B-B4CB-47D4-A3B1-10010247F158}"/>
-                </a:ext>
-                <a:ext uri="{C183D7F6-B498-43B3-948B-1728B52AA6E4}">
-                  <adec:decorative xmlns:adec="http://schemas.microsoft.com/office/drawing/2017/decorative" val="1"/>
-                </a:ext>
-              </a:extLst>
-            </p:cNvPr>
-            <p:cNvSpPr/>
-            <p:nvPr>
-              <p:extLst>
-                <p:ext uri="{386F3935-93C4-4BCD-93E2-E3B085C9AB24}">
-                  <p16:designElem xmlns:p16="http://schemas.microsoft.com/office/powerpoint/2015/main" val="1"/>
-                </p:ext>
-              </p:extLst>
-            </p:nvPr>
-          </p:nvSpPr>
-          <p:spPr bwMode="auto">
-            <a:xfrm>
-              <a:off x="1320800" y="0"/>
-              <a:ext cx="1117600" cy="5276850"/>
-            </a:xfrm>
-            <a:custGeom>
-              <a:avLst/>
-              <a:gdLst/>
-              <a:ahLst/>
-              <a:cxnLst/>
-              <a:rect l="0" t="0" r="r" b="b"/>
-              <a:pathLst>
-                <a:path w="704" h="3324">
-                  <a:moveTo>
-                    <a:pt x="704" y="0"/>
-                  </a:moveTo>
-                  <a:lnTo>
-                    <a:pt x="545" y="0"/>
-                  </a:lnTo>
-                  <a:lnTo>
-                    <a:pt x="0" y="3300"/>
-                  </a:lnTo>
-                  <a:lnTo>
-                    <a:pt x="157" y="3324"/>
-                  </a:lnTo>
-                  <a:lnTo>
-                    <a:pt x="704" y="0"/>
-                  </a:lnTo>
-                  <a:close/>
-                </a:path>
-              </a:pathLst>
-            </a:custGeom>
-            <a:solidFill>
-              <a:srgbClr val="595959"/>
-            </a:solidFill>
-            <a:ln>
-              <a:noFill/>
-            </a:ln>
-          </p:spPr>
-          <p:txBody>
-            <a:bodyPr/>
-            <a:lstStyle/>
-            <a:p>
-              <a:endParaRPr lang="en-US"/>
-            </a:p>
-          </p:txBody>
-        </p:sp>
-        <p:sp>
-          <p:nvSpPr>
-            <p:cNvPr id="16" name="Freeform 8">
-              <a:extLst>
-                <a:ext uri="{FF2B5EF4-FFF2-40B4-BE49-F238E27FC236}">
-                  <a16:creationId xmlns:a16="http://schemas.microsoft.com/office/drawing/2014/main" id="{96330E33-E171-4B0F-82B5-AF7230399B5C}"/>
-                </a:ext>
-                <a:ext uri="{C183D7F6-B498-43B3-948B-1728B52AA6E4}">
-                  <adec:decorative xmlns:adec="http://schemas.microsoft.com/office/drawing/2017/decorative" val="1"/>
-                </a:ext>
-              </a:extLst>
-            </p:cNvPr>
-            <p:cNvSpPr/>
-            <p:nvPr>
-              <p:extLst>
-                <p:ext uri="{386F3935-93C4-4BCD-93E2-E3B085C9AB24}">
-                  <p16:designElem xmlns:p16="http://schemas.microsoft.com/office/powerpoint/2015/main" val="1"/>
-                </p:ext>
-              </p:extLst>
-            </p:nvPr>
-          </p:nvSpPr>
-          <p:spPr bwMode="auto">
-            <a:xfrm>
-              <a:off x="1320800" y="5238750"/>
-              <a:ext cx="1228725" cy="1619250"/>
-            </a:xfrm>
-            <a:custGeom>
-              <a:avLst/>
-              <a:gdLst/>
-              <a:ahLst/>
-              <a:cxnLst/>
-              <a:rect l="0" t="0" r="r" b="b"/>
-              <a:pathLst>
-                <a:path w="774" h="1020">
-                  <a:moveTo>
-                    <a:pt x="0" y="0"/>
-                  </a:moveTo>
-                  <a:lnTo>
-                    <a:pt x="740" y="1020"/>
-                  </a:lnTo>
-                  <a:lnTo>
-                    <a:pt x="774" y="1020"/>
-                  </a:lnTo>
-                  <a:lnTo>
-                    <a:pt x="0" y="0"/>
-                  </a:lnTo>
-                  <a:close/>
-                </a:path>
-              </a:pathLst>
-            </a:custGeom>
-            <a:solidFill>
-              <a:srgbClr val="262626"/>
-            </a:solidFill>
-            <a:ln>
-              <a:noFill/>
-            </a:ln>
-          </p:spPr>
-          <p:txBody>
-            <a:bodyPr/>
-            <a:lstStyle/>
-            <a:p>
-              <a:endParaRPr lang="en-US"/>
-            </a:p>
-          </p:txBody>
-        </p:sp>
-        <p:sp>
-          <p:nvSpPr>
-            <p:cNvPr id="17" name="Freeform 9">
-              <a:extLst>
-                <a:ext uri="{FF2B5EF4-FFF2-40B4-BE49-F238E27FC236}">
-                  <a16:creationId xmlns:a16="http://schemas.microsoft.com/office/drawing/2014/main" id="{332B1723-69BF-42D7-B757-0FA059E15256}"/>
-                </a:ext>
-                <a:ext uri="{C183D7F6-B498-43B3-948B-1728B52AA6E4}">
-                  <adec:decorative xmlns:adec="http://schemas.microsoft.com/office/drawing/2017/decorative" val="1"/>
-                </a:ext>
-              </a:extLst>
-            </p:cNvPr>
-            <p:cNvSpPr/>
-            <p:nvPr>
-              <p:extLst>
-                <p:ext uri="{386F3935-93C4-4BCD-93E2-E3B085C9AB24}">
-                  <p16:designElem xmlns:p16="http://schemas.microsoft.com/office/powerpoint/2015/main" val="1"/>
-                </p:ext>
-              </p:extLst>
-            </p:nvPr>
-          </p:nvSpPr>
-          <p:spPr bwMode="auto">
-            <a:xfrm>
-              <a:off x="1627188" y="5291138"/>
-              <a:ext cx="1495425" cy="1566863"/>
-            </a:xfrm>
-            <a:custGeom>
-              <a:avLst/>
-              <a:gdLst/>
-              <a:ahLst/>
-              <a:cxnLst/>
-              <a:rect l="0" t="0" r="r" b="b"/>
-              <a:pathLst>
-                <a:path w="942" h="987">
-                  <a:moveTo>
-                    <a:pt x="0" y="0"/>
-                  </a:moveTo>
-                  <a:lnTo>
-                    <a:pt x="909" y="987"/>
-                  </a:lnTo>
-                  <a:lnTo>
-                    <a:pt x="942" y="987"/>
-                  </a:lnTo>
-                  <a:lnTo>
-                    <a:pt x="0" y="0"/>
-                  </a:lnTo>
-                  <a:close/>
-                </a:path>
-              </a:pathLst>
-            </a:custGeom>
-            <a:solidFill>
-              <a:schemeClr val="accent1">
-                <a:lumMod val="50000"/>
-              </a:schemeClr>
-            </a:solidFill>
-            <a:ln>
-              <a:noFill/>
-            </a:ln>
-          </p:spPr>
-          <p:txBody>
-            <a:bodyPr/>
-            <a:lstStyle/>
-            <a:p>
-              <a:endParaRPr lang="en-US"/>
-            </a:p>
-          </p:txBody>
-        </p:sp>
-        <p:sp>
-          <p:nvSpPr>
-            <p:cNvPr id="18" name="Freeform 10">
-              <a:extLst>
-                <a:ext uri="{FF2B5EF4-FFF2-40B4-BE49-F238E27FC236}">
-                  <a16:creationId xmlns:a16="http://schemas.microsoft.com/office/drawing/2014/main" id="{F115D62D-1E96-48D1-A78D-D370A0BFB9B5}"/>
-                </a:ext>
-                <a:ext uri="{C183D7F6-B498-43B3-948B-1728B52AA6E4}">
-                  <adec:decorative xmlns:adec="http://schemas.microsoft.com/office/drawing/2017/decorative" val="1"/>
-                </a:ext>
-              </a:extLst>
-            </p:cNvPr>
-            <p:cNvSpPr/>
-            <p:nvPr>
-              <p:extLst>
-                <p:ext uri="{386F3935-93C4-4BCD-93E2-E3B085C9AB24}">
-                  <p16:designElem xmlns:p16="http://schemas.microsoft.com/office/powerpoint/2015/main" val="1"/>
-                </p:ext>
-              </p:extLst>
-            </p:nvPr>
-          </p:nvSpPr>
-          <p:spPr bwMode="auto">
-            <a:xfrm>
-              <a:off x="1627188" y="5286375"/>
-              <a:ext cx="2130425" cy="1571625"/>
-            </a:xfrm>
-            <a:custGeom>
-              <a:avLst/>
-              <a:gdLst/>
-              <a:ahLst/>
-              <a:cxnLst/>
-              <a:rect l="0" t="0" r="r" b="b"/>
-              <a:pathLst>
-                <a:path w="1342" h="990">
-                  <a:moveTo>
-                    <a:pt x="0" y="3"/>
-                  </a:moveTo>
-                  <a:lnTo>
-                    <a:pt x="942" y="990"/>
-                  </a:lnTo>
-                  <a:lnTo>
-                    <a:pt x="1342" y="990"/>
-                  </a:lnTo>
-                  <a:lnTo>
-                    <a:pt x="156" y="27"/>
-                  </a:lnTo>
-                  <a:lnTo>
-                    <a:pt x="0" y="0"/>
-                  </a:lnTo>
-                  <a:lnTo>
-                    <a:pt x="0" y="3"/>
-                  </a:lnTo>
-                  <a:close/>
-                </a:path>
-              </a:pathLst>
-            </a:custGeom>
-            <a:solidFill>
-              <a:schemeClr val="accent1">
-                <a:lumMod val="75000"/>
-              </a:schemeClr>
-            </a:solidFill>
-            <a:ln>
-              <a:noFill/>
-            </a:ln>
-          </p:spPr>
-          <p:txBody>
-            <a:bodyPr/>
-            <a:lstStyle/>
-            <a:p>
-              <a:endParaRPr lang="en-US"/>
-            </a:p>
-          </p:txBody>
-        </p:sp>
-        <p:sp>
-          <p:nvSpPr>
-            <p:cNvPr id="19" name="Freeform 11">
-              <a:extLst>
-                <a:ext uri="{FF2B5EF4-FFF2-40B4-BE49-F238E27FC236}">
-                  <a16:creationId xmlns:a16="http://schemas.microsoft.com/office/drawing/2014/main" id="{91C2876A-169D-4822-A766-C00578C88B4B}"/>
-                </a:ext>
-                <a:ext uri="{C183D7F6-B498-43B3-948B-1728B52AA6E4}">
-                  <adec:decorative xmlns:adec="http://schemas.microsoft.com/office/drawing/2017/decorative" val="1"/>
-                </a:ext>
-              </a:extLst>
-            </p:cNvPr>
-            <p:cNvSpPr/>
-            <p:nvPr>
-              <p:extLst>
-                <p:ext uri="{386F3935-93C4-4BCD-93E2-E3B085C9AB24}">
-                  <p16:designElem xmlns:p16="http://schemas.microsoft.com/office/powerpoint/2015/main" val="1"/>
-                </p:ext>
-              </p:extLst>
-            </p:nvPr>
-          </p:nvSpPr>
-          <p:spPr bwMode="auto">
-            <a:xfrm>
-              <a:off x="1320800" y="5238750"/>
-              <a:ext cx="1695450" cy="1619250"/>
-            </a:xfrm>
-            <a:custGeom>
-              <a:avLst/>
-              <a:gdLst/>
-              <a:ahLst/>
-              <a:cxnLst/>
-              <a:rect l="0" t="0" r="r" b="b"/>
-              <a:pathLst>
-                <a:path w="1068" h="1020">
-                  <a:moveTo>
-                    <a:pt x="1068" y="1020"/>
-                  </a:moveTo>
-                  <a:lnTo>
-                    <a:pt x="184" y="60"/>
-                  </a:lnTo>
-                  <a:lnTo>
-                    <a:pt x="154" y="27"/>
-                  </a:lnTo>
-                  <a:lnTo>
-                    <a:pt x="157" y="27"/>
-                  </a:lnTo>
-                  <a:lnTo>
-                    <a:pt x="157" y="24"/>
-                  </a:lnTo>
-                  <a:lnTo>
-                    <a:pt x="154" y="24"/>
-                  </a:lnTo>
-                  <a:lnTo>
-                    <a:pt x="0" y="0"/>
-                  </a:lnTo>
-                  <a:lnTo>
-                    <a:pt x="0" y="0"/>
-                  </a:lnTo>
-                  <a:lnTo>
-                    <a:pt x="774" y="1020"/>
-                  </a:lnTo>
-                  <a:lnTo>
-                    <a:pt x="1068" y="1020"/>
-                  </a:lnTo>
-                  <a:close/>
-                </a:path>
-              </a:pathLst>
-            </a:custGeom>
-            <a:solidFill>
-              <a:srgbClr val="404040"/>
-            </a:solidFill>
-            <a:ln>
-              <a:noFill/>
-            </a:ln>
-          </p:spPr>
-          <p:txBody>
-            <a:bodyPr/>
-            <a:lstStyle/>
-            <a:p>
-              <a:endParaRPr lang="en-US"/>
-            </a:p>
-          </p:txBody>
-        </p:sp>
-      </p:grpSp>
       <p:pic>
         <p:nvPicPr>
           <p:cNvPr id="6" name="Picture 5">
@@ -18360,8 +17909,8 @@
         </p:blipFill>
         <p:spPr>
           <a:xfrm>
-            <a:off x="5102225" y="685800"/>
-            <a:ext cx="6307138" cy="3990975"/>
+            <a:off x="961152" y="2627909"/>
+            <a:ext cx="5896848" cy="3731355"/>
           </a:xfrm>
           <a:prstGeom prst="rect">
             <a:avLst/>
@@ -18390,8 +17939,8 @@
         </p:blipFill>
         <p:spPr>
           <a:xfrm>
-            <a:off x="5172466" y="4724400"/>
-            <a:ext cx="6307138" cy="1052513"/>
+            <a:off x="961152" y="1593966"/>
+            <a:ext cx="4326638" cy="722014"/>
           </a:xfrm>
           <a:prstGeom prst="rect">
             <a:avLst/>
@@ -18414,12 +17963,7 @@
             <p:ph type="title"/>
           </p:nvPr>
         </p:nvSpPr>
-        <p:spPr>
-          <a:xfrm>
-            <a:off x="535020" y="685800"/>
-            <a:ext cx="2780271" cy="5105400"/>
-          </a:xfrm>
-        </p:spPr>
+        <p:spPr/>
         <p:txBody>
           <a:bodyPr vert="horz" lIns="91440" tIns="45720" rIns="91440" bIns="45720" rtlCol="0" anchor="ctr">
             <a:normAutofit/>
@@ -18427,50 +17971,12 @@
           <a:lstStyle/>
           <a:p>
             <a:r>
-              <a:rPr lang="en-US" sz="4000" kern="1200">
-                <a:solidFill>
-                  <a:srgbClr val="FFFFFF"/>
-                </a:solidFill>
+              <a:rPr lang="en-US" sz="4000" kern="1200" dirty="0">
                 <a:latin typeface="+mj-lt"/>
                 <a:ea typeface="+mj-ea"/>
                 <a:cs typeface="+mj-cs"/>
               </a:rPr>
               <a:t>What is the latest security patch?</a:t>
-            </a:r>
-          </a:p>
-        </p:txBody>
-      </p:sp>
-      <p:sp>
-        <p:nvSpPr>
-          <p:cNvPr id="20" name="TextBox 19">
-            <a:extLst>
-              <a:ext uri="{FF2B5EF4-FFF2-40B4-BE49-F238E27FC236}">
-                <a16:creationId xmlns:a16="http://schemas.microsoft.com/office/drawing/2014/main" id="{1974F4DD-CEFA-4407-B9FB-910858255C1C}"/>
-              </a:ext>
-            </a:extLst>
-          </p:cNvPr>
-          <p:cNvSpPr txBox="1"/>
-          <p:nvPr/>
-        </p:nvSpPr>
-        <p:spPr>
-          <a:xfrm>
-            <a:off x="4369392" y="311706"/>
-            <a:ext cx="7575395" cy="369332"/>
-          </a:xfrm>
-          <a:prstGeom prst="rect">
-            <a:avLst/>
-          </a:prstGeom>
-          <a:noFill/>
-        </p:spPr>
-        <p:txBody>
-          <a:bodyPr wrap="square">
-            <a:spAutoFit/>
-          </a:bodyPr>
-          <a:lstStyle/>
-          <a:p>
-            <a:r>
-              <a:rPr lang="en-US" dirty="0"/>
-              <a:t>https://source.android.com/security/bulletin/2020-01-01#2020-01-01-details</a:t>
             </a:r>
           </a:p>
         </p:txBody>
